--- a/01-what-is-an-agent/slides/ep01-what-is-an-agent.pptx
+++ b/01-what-is-an-agent/slides/ep01-what-is-an-agent.pptx
@@ -2104,7 +2104,7 @@
                 <a:ea typeface="Calibri" pitchFamily="34" charset="-122"/>
                 <a:cs typeface="Calibri" pitchFamily="34" charset="-120"/>
               </a:rPr>
-              <a:t>THE AGENTIC ENTERPRISE  ·  EPISODE 1</a:t>
+              <a:t>ARTHASHASTRA LEARNING  ·  THE AGENTIC ENTERPRISE  ·  EP 1</a:t>
             </a:r>
             <a:endParaRPr lang="en-US" sz="1200" dirty="0"/>
           </a:p>
@@ -2238,7 +2238,7 @@
                 <a:ea typeface="Calibri" pitchFamily="34" charset="-122"/>
                 <a:cs typeface="Calibri" pitchFamily="34" charset="-120"/>
               </a:rPr>
-              <a:t>Delivery Head, AI &amp; Data Platforms · Founder, TradeNeo</a:t>
+              <a:t>Founder, Arthashastra Intelligence · Delivery Head, AI &amp; Data Platforms</a:t>
             </a:r>
             <a:endParaRPr lang="en-US" sz="1200" dirty="0"/>
           </a:p>
@@ -5348,7 +5348,7 @@
                 <a:ea typeface="Calibri" pitchFamily="34" charset="-122"/>
                 <a:cs typeface="Calibri" pitchFamily="34" charset="-120"/>
               </a:rPr>
-              <a:t>The Agentic Enterprise · one episode a week</a:t>
+              <a:t>Arthashastra Learning · one episode a week</a:t>
             </a:r>
             <a:endParaRPr lang="en-US" sz="1000" dirty="0"/>
           </a:p>
@@ -6034,7 +6034,7 @@
                 <a:ea typeface="Calibri" pitchFamily="34" charset="-122"/>
                 <a:cs typeface="Calibri" pitchFamily="34" charset="-120"/>
               </a:rPr>
-              <a:t>Harsha Pasumarthi · The Agentic Enterprise</a:t>
+              <a:t>Harsha Pasumarthi · Arthashastra Learning</a:t>
             </a:r>
             <a:endParaRPr lang="en-US" sz="1000" dirty="0"/>
           </a:p>
@@ -6675,7 +6675,7 @@
                 <a:ea typeface="Calibri" pitchFamily="34" charset="-122"/>
                 <a:cs typeface="Calibri" pitchFamily="34" charset="-120"/>
               </a:rPr>
-              <a:t>The Agentic Enterprise · Ep 1</a:t>
+              <a:t>Arthashastra Learning · The Agentic Enterprise · Ep 1</a:t>
             </a:r>
             <a:endParaRPr lang="en-US" sz="1000" dirty="0"/>
           </a:p>
@@ -7963,7 +7963,7 @@
                 <a:ea typeface="Calibri" pitchFamily="34" charset="-122"/>
                 <a:cs typeface="Calibri" pitchFamily="34" charset="-120"/>
               </a:rPr>
-              <a:t>The Agentic Enterprise · Ep 1</a:t>
+              <a:t>Arthashastra Learning · The Agentic Enterprise · Ep 1</a:t>
             </a:r>
             <a:endParaRPr lang="en-US" sz="1000" dirty="0"/>
           </a:p>
@@ -8867,7 +8867,7 @@
                 <a:ea typeface="Calibri" pitchFamily="34" charset="-122"/>
                 <a:cs typeface="Calibri" pitchFamily="34" charset="-120"/>
               </a:rPr>
-              <a:t>The Agentic Enterprise · Ep 1</a:t>
+              <a:t>Arthashastra Learning · The Agentic Enterprise · Ep 1</a:t>
             </a:r>
             <a:endParaRPr lang="en-US" sz="1000" dirty="0"/>
           </a:p>
@@ -9773,7 +9773,7 @@
                 <a:ea typeface="Calibri" pitchFamily="34" charset="-122"/>
                 <a:cs typeface="Calibri" pitchFamily="34" charset="-120"/>
               </a:rPr>
-              <a:t>The Agentic Enterprise · Ep 1</a:t>
+              <a:t>Arthashastra Learning · The Agentic Enterprise · Ep 1</a:t>
             </a:r>
             <a:endParaRPr lang="en-US" sz="1000" dirty="0"/>
           </a:p>
@@ -10441,7 +10441,7 @@
                 <a:ea typeface="Calibri" pitchFamily="34" charset="-122"/>
                 <a:cs typeface="Calibri" pitchFamily="34" charset="-120"/>
               </a:rPr>
-              <a:t>The Agentic Enterprise · Ep 1</a:t>
+              <a:t>Arthashastra Learning · The Agentic Enterprise · Ep 1</a:t>
             </a:r>
             <a:endParaRPr lang="en-US" sz="1000" dirty="0"/>
           </a:p>

--- a/01-what-is-an-agent/slides/ep01-what-is-an-agent.pptx
+++ b/01-what-is-an-agent/slides/ep01-what-is-an-agent.pptx
@@ -19,9 +19,10 @@
     <p:sldId id="267" r:id="rId13"/>
     <p:sldId id="268" r:id="rId14"/>
     <p:sldId id="269" r:id="rId15"/>
+    <p:sldId id="270" r:id="rId16"/>
   </p:sldIdLst>
   <p:notesMasterIdLst>
-    <p:notesMasterId r:id="rId16"/>
+    <p:notesMasterId r:id="rId17"/>
   </p:notesMasterIdLst>
   <p:sldSz cx="9144000" cy="5143500"/>
   <p:notesSz cx="5143500" cy="9144000"/>
@@ -603,7 +604,7 @@
           <a:p>
             <a:r>
               <a:rPr lang="en-US" dirty="0"/>
-              <a:t>Now the enterprise part. First breakpoint: identity. The agent calls your order API — as whom? Walk the three options. The enterprise answer is the third: the agent gets its own identity, scoped per tenant, per user, per task — with least-privilege tools.</a:t>
+              <a:t>Live-code this. The loop is 15 lines. Point at the three annotated parts: the model call (plan), the stop check (done), and the tool execution (act + observe). Then show MAX_STEPS — the limit.</a:t>
             </a:r>
             <a:endParaRPr lang="en-US" dirty="0"/>
           </a:p>
@@ -691,7 +692,7 @@
           <a:p>
             <a:r>
               <a:rPr lang="en-US" dirty="0"/>
-              <a:t>Second breakpoint: tenancy. One agent, many customers. Memory, tools and retrieval each have to be tenant-isolated — otherwise you've shipped a data leak with a chat window on it. I've lived this on a multi-tenant platform; the agent's placement follows the same ADR discipline as any other multi-tenant service.</a:t>
+              <a:t>Now the enterprise part. First breakpoint: identity. The agent calls your order API — as whom? Walk the three options. The enterprise answer is the third: the agent gets its own identity, scoped per tenant, per user, per task — with least-privilege tools.</a:t>
             </a:r>
             <a:endParaRPr lang="en-US" dirty="0"/>
           </a:p>
@@ -779,7 +780,7 @@
           <a:p>
             <a:r>
               <a:rPr lang="en-US" dirty="0"/>
-              <a:t>Third breakpoint: accountability. Who approved the action? How do you audit a decision the model made at step 7 of 12? Four things you need before an agent touches production — and each one is an episode later in the series.</a:t>
+              <a:t>Second breakpoint: tenancy. One agent, many customers. Memory, tools and retrieval each have to be tenant-isolated — otherwise you've shipped a data leak with a chat window on it. I've lived this on a multi-tenant platform; the agent's placement follows the same ADR discipline as any other multi-tenant service.</a:t>
             </a:r>
             <a:endParaRPr lang="en-US" dirty="0"/>
           </a:p>
@@ -867,7 +868,7 @@
           <a:p>
             <a:r>
               <a:rPr lang="en-US" dirty="0"/>
-              <a:t>Recap in 30 seconds, then the call to action. Next episode we build an MCP server for an enterprise data source — that's where tools stop being mocks.</a:t>
+              <a:t>Third breakpoint: accountability. Who approved the action? How do you audit a decision the model made at step 7 of 12? Four things you need before an agent touches production — and each one is an episode later in the series.</a:t>
             </a:r>
             <a:endParaRPr lang="en-US" dirty="0"/>
           </a:p>
@@ -955,7 +956,7 @@
           <a:p>
             <a:r>
               <a:rPr lang="en-US" dirty="0"/>
-              <a:t>Point at the repo. The issues tab is the whole 28-episode roadmap — ask them to open an issue with a use case they want covered. Subscribe, one episode a week.</a:t>
+              <a:t>Recap in 30 seconds, then the call to action. Next episode we build an MCP server for an enterprise data source — that's where tools stop being mocks.</a:t>
             </a:r>
             <a:endParaRPr lang="en-US" dirty="0"/>
           </a:p>
@@ -979,6 +980,94 @@
             <a:fld id="{F7021451-1387-4CA6-816F-3879F97B5CBC}" type="slidenum">
               <a:rPr lang="en-US"/>
               <a:t>14</a:t>
+            </a:fld>
+            <a:endParaRPr lang="en-US"/>
+          </a:p>
+        </p:txBody>
+      </p:sp>
+    </p:spTree>
+    <p:extLst>
+      <p:ext uri="{BB962C8B-B14F-4D97-AF65-F5344CB8AC3E}">
+        <p14:creationId xmlns:p14="http://schemas.microsoft.com/office/powerpoint/2010/main" val="1024086991"/>
+      </p:ext>
+    </p:extLst>
+  </p:cSld>
+  <p:clrMapOvr>
+    <a:masterClrMapping/>
+  </p:clrMapOvr>
+</p:notes>
+</file>
+
+<file path=ppt/notesSlides/notesSlide15.xml><?xml version="1.0" encoding="utf-8"?>
+<p:notes xmlns:a="http://schemas.openxmlformats.org/drawingml/2006/main" xmlns:r="http://schemas.openxmlformats.org/officeDocument/2006/relationships" xmlns:p="http://schemas.openxmlformats.org/presentationml/2006/main">
+  <p:cSld>
+    <p:spTree>
+      <p:nvGrpSpPr>
+        <p:cNvPr id="1" name=""/>
+        <p:cNvGrpSpPr/>
+        <p:nvPr/>
+      </p:nvGrpSpPr>
+      <p:grpSpPr>
+        <a:xfrm>
+          <a:off x="0" y="0"/>
+          <a:ext cx="0" cy="0"/>
+          <a:chOff x="0" y="0"/>
+          <a:chExt cx="0" cy="0"/>
+        </a:xfrm>
+      </p:grpSpPr>
+      <p:sp>
+        <p:nvSpPr>
+          <p:cNvPr id="2" name="Slide Image Placeholder 1"/>
+          <p:cNvSpPr>
+            <a:spLocks noGrp="1" noRot="1" noChangeAspect="1"/>
+          </p:cNvSpPr>
+          <p:nvPr>
+            <p:ph type="sldImg"/>
+          </p:nvPr>
+        </p:nvSpPr>
+        <p:spPr/>
+      </p:sp>
+      <p:sp>
+        <p:nvSpPr>
+          <p:cNvPr id="3" name="Notes Placeholder 2"/>
+          <p:cNvSpPr>
+            <a:spLocks noGrp="1"/>
+          </p:cNvSpPr>
+          <p:nvPr>
+            <p:ph type="body" idx="1"/>
+          </p:nvPr>
+        </p:nvSpPr>
+        <p:spPr/>
+        <p:txBody>
+          <a:bodyPr/>
+          <a:lstStyle/>
+          <a:p>
+            <a:r>
+              <a:rPr lang="en-US" dirty="0"/>
+              <a:t>Point at the repo. The issues tab is the whole 28-episode roadmap — ask them to open an issue with a use case they want covered. Subscribe, one episode a week.</a:t>
+            </a:r>
+            <a:endParaRPr lang="en-US" dirty="0"/>
+          </a:p>
+        </p:txBody>
+      </p:sp>
+      <p:sp>
+        <p:nvSpPr>
+          <p:cNvPr id="4" name="Slide Number Placeholder 3"/>
+          <p:cNvSpPr>
+            <a:spLocks noGrp="1"/>
+          </p:cNvSpPr>
+          <p:nvPr>
+            <p:ph type="sldNum" sz="quarter" idx="10"/>
+          </p:nvPr>
+        </p:nvSpPr>
+        <p:spPr/>
+        <p:txBody>
+          <a:bodyPr/>
+          <a:lstStyle/>
+          <a:p>
+            <a:fld id="{F7021451-1387-4CA6-816F-3879F97B5CBC}" type="slidenum">
+              <a:rPr lang="en-US"/>
+              <a:t>15</a:t>
             </a:fld>
             <a:endParaRPr lang="en-US"/>
           </a:p>
@@ -1659,7 +1748,7 @@
           <a:p>
             <a:r>
               <a:rPr lang="en-US" dirty="0"/>
-              <a:t>Live-code this. The loop is 15 lines. Point at the three annotated parts: the model call (plan), the stop check (done), and the tool execution (act + observe). Then show MAX_STEPS — the limit.</a:t>
+              <a:t>Transition slide before the live code. Four steps, and we only type step 3 on camera — the tools and mock data are already in agent_starter.py. Say: 'Everything you need is one Python file and one API key.'</a:t>
             </a:r>
             <a:endParaRPr lang="en-US" dirty="0"/>
           </a:p>
@@ -2284,63 +2373,24 @@
         </p:nvSpPr>
         <p:spPr>
           <a:xfrm>
-            <a:off x="457200" y="411480"/>
-            <a:ext cx="5486400" cy="274320"/>
-          </a:xfrm>
-          <a:prstGeom prst="rect">
-            <a:avLst/>
-          </a:prstGeom>
-          <a:noFill/>
-          <a:ln/>
-        </p:spPr>
-        <p:txBody>
-          <a:bodyPr wrap="square" lIns="0" tIns="0" rIns="0" bIns="0" rtlCol="0" anchor="ctr"/>
-          <a:lstStyle/>
-          <a:p>
-            <a:pPr indent="0" marL="0">
-              <a:buNone/>
-            </a:pPr>
-            <a:r>
-              <a:rPr lang="en-US" sz="1100" spc="300" kern="0" dirty="0">
-                <a:solidFill>
-                  <a:srgbClr val="F5A623"/>
-                </a:solidFill>
-                <a:latin typeface="Calibri" pitchFamily="34" charset="0"/>
-                <a:ea typeface="Calibri" pitchFamily="34" charset="-122"/>
-                <a:cs typeface="Calibri" pitchFamily="34" charset="-120"/>
-              </a:rPr>
-              <a:t>WHAT BREAKS IN THE ENTERPRISE · 1 OF 3</a:t>
-            </a:r>
-            <a:endParaRPr lang="en-US" sz="1100" dirty="0"/>
-          </a:p>
-        </p:txBody>
-      </p:sp>
-      <p:sp>
-        <p:nvSpPr>
-          <p:cNvPr id="4" name="Text 1"/>
-          <p:cNvSpPr txBox="1"/>
-          <p:nvPr/>
-        </p:nvSpPr>
-        <p:spPr>
-          <a:xfrm>
-            <a:off x="457200" y="731520"/>
-            <a:ext cx="8229600" cy="640080"/>
-          </a:xfrm>
-          <a:prstGeom prst="rect">
-            <a:avLst/>
-          </a:prstGeom>
-          <a:noFill/>
-          <a:ln/>
-        </p:spPr>
-        <p:txBody>
-          <a:bodyPr wrap="square" lIns="0" tIns="0" rIns="0" bIns="0" rtlCol="0" anchor="ctr"/>
-          <a:lstStyle/>
-          <a:p>
-            <a:pPr indent="0" marL="0">
-              <a:buNone/>
-            </a:pPr>
-            <a:r>
-              <a:rPr lang="en-US" sz="2800" b="1" dirty="0">
+            <a:off x="457200" y="320040"/>
+            <a:ext cx="8229600" cy="731520"/>
+          </a:xfrm>
+          <a:prstGeom prst="rect">
+            <a:avLst/>
+          </a:prstGeom>
+          <a:noFill/>
+          <a:ln/>
+        </p:spPr>
+        <p:txBody>
+          <a:bodyPr wrap="square" lIns="0" tIns="0" rIns="0" bIns="0" rtlCol="0" anchor="ctr"/>
+          <a:lstStyle/>
+          <a:p>
+            <a:pPr indent="0" marL="0">
+              <a:buNone/>
+            </a:pPr>
+            <a:r>
+              <a:rPr lang="en-US" sz="3000" b="1" dirty="0">
                 <a:solidFill>
                   <a:srgbClr val="F3F5F7"/>
                 </a:solidFill>
@@ -2348,30 +2398,30 @@
                 <a:ea typeface="Cambria" pitchFamily="34" charset="-122"/>
                 <a:cs typeface="Cambria" pitchFamily="34" charset="-120"/>
               </a:rPr>
-              <a:t>Identity: the agent calls your API — as whom?</a:t>
-            </a:r>
-            <a:endParaRPr lang="en-US" sz="2800" dirty="0"/>
-          </a:p>
-        </p:txBody>
-      </p:sp>
-      <p:sp>
-        <p:nvSpPr>
-          <p:cNvPr id="5" name="Shape 2"/>
+              <a:t>The whole agent is one loop</a:t>
+            </a:r>
+            <a:endParaRPr lang="en-US" sz="3000" dirty="0"/>
+          </a:p>
+        </p:txBody>
+      </p:sp>
+      <p:sp>
+        <p:nvSpPr>
+          <p:cNvPr id="4" name="Shape 1"/>
           <p:cNvSpPr/>
           <p:nvPr/>
         </p:nvSpPr>
         <p:spPr>
           <a:xfrm>
-            <a:off x="457200" y="1600200"/>
-            <a:ext cx="2606040" cy="2697480"/>
+            <a:off x="457200" y="1143000"/>
+            <a:ext cx="5394960" cy="3337560"/>
           </a:xfrm>
           <a:prstGeom prst="roundRect">
             <a:avLst>
-              <a:gd name="adj" fmla="val 2807"/>
+              <a:gd name="adj" fmla="val 2192"/>
             </a:avLst>
           </a:prstGeom>
           <a:solidFill>
-            <a:srgbClr val="1B2127"/>
+            <a:srgbClr val="0B0E11"/>
           </a:solidFill>
           <a:ln w="9525">
             <a:solidFill>
@@ -2383,23 +2433,286 @@
       </p:sp>
       <p:sp>
         <p:nvSpPr>
-          <p:cNvPr id="6" name="Shape 3"/>
-          <p:cNvSpPr/>
-          <p:nvPr/>
-        </p:nvSpPr>
-        <p:spPr>
-          <a:xfrm>
-            <a:off x="731520" y="1828800"/>
-            <a:ext cx="457200" cy="457200"/>
-          </a:xfrm>
-          <a:prstGeom prst="ellipse">
-            <a:avLst/>
-          </a:prstGeom>
-          <a:solidFill>
-            <a:srgbClr val="E5533D"/>
-          </a:solidFill>
-          <a:ln/>
-        </p:spPr>
+          <p:cNvPr id="5" name="Text 2"/>
+          <p:cNvSpPr txBox="1"/>
+          <p:nvPr/>
+        </p:nvSpPr>
+        <p:spPr>
+          <a:xfrm>
+            <a:off x="640080" y="1280160"/>
+            <a:ext cx="5120640" cy="3108960"/>
+          </a:xfrm>
+          <a:prstGeom prst="rect">
+            <a:avLst/>
+          </a:prstGeom>
+          <a:noFill/>
+          <a:ln/>
+        </p:spPr>
+        <p:txBody>
+          <a:bodyPr wrap="square" lIns="0" tIns="0" rIns="0" bIns="0" rtlCol="0" anchor="t"/>
+          <a:lstStyle/>
+          <a:p>
+            <a:pPr indent="0" marL="0">
+              <a:buNone/>
+            </a:pPr>
+            <a:r>
+              <a:rPr lang="en-US" sz="1100" dirty="0">
+                <a:solidFill>
+                  <a:srgbClr val="F3F5F7"/>
+                </a:solidFill>
+                <a:latin typeface="Courier New" pitchFamily="34" charset="0"/>
+                <a:ea typeface="Courier New" pitchFamily="34" charset="-122"/>
+                <a:cs typeface="Courier New" pitchFamily="34" charset="-120"/>
+              </a:rPr>
+              <a:t>for step in range(MAX_STEPS):</a:t>
+            </a:r>
+            <a:endParaRPr lang="en-US" sz="1100" dirty="0"/>
+          </a:p>
+          <a:p>
+            <a:pPr indent="0" marL="0">
+              <a:buNone/>
+            </a:pPr>
+            <a:r>
+              <a:rPr lang="en-US" sz="1100" dirty="0">
+                <a:solidFill>
+                  <a:srgbClr val="F3F5F7"/>
+                </a:solidFill>
+                <a:latin typeface="Courier New" pitchFamily="34" charset="0"/>
+                <a:ea typeface="Courier New" pitchFamily="34" charset="-122"/>
+                <a:cs typeface="Courier New" pitchFamily="34" charset="-120"/>
+              </a:rPr>
+              <a:t>    resp = client.messages.create(</a:t>
+            </a:r>
+            <a:endParaRPr lang="en-US" sz="1100" dirty="0"/>
+          </a:p>
+          <a:p>
+            <a:pPr indent="0" marL="0">
+              <a:buNone/>
+            </a:pPr>
+            <a:r>
+              <a:rPr lang="en-US" sz="1100" dirty="0">
+                <a:solidFill>
+                  <a:srgbClr val="F3F5F7"/>
+                </a:solidFill>
+                <a:latin typeface="Courier New" pitchFamily="34" charset="0"/>
+                <a:ea typeface="Courier New" pitchFamily="34" charset="-122"/>
+                <a:cs typeface="Courier New" pitchFamily="34" charset="-120"/>
+              </a:rPr>
+              <a:t>        model=MODEL, system=SYSTEM,</a:t>
+            </a:r>
+            <a:endParaRPr lang="en-US" sz="1100" dirty="0"/>
+          </a:p>
+          <a:p>
+            <a:pPr indent="0" marL="0">
+              <a:buNone/>
+            </a:pPr>
+            <a:r>
+              <a:rPr lang="en-US" sz="1100" dirty="0">
+                <a:solidFill>
+                  <a:srgbClr val="F5A623"/>
+                </a:solidFill>
+                <a:latin typeface="Courier New" pitchFamily="34" charset="0"/>
+                <a:ea typeface="Courier New" pitchFamily="34" charset="-122"/>
+                <a:cs typeface="Courier New" pitchFamily="34" charset="-120"/>
+              </a:rPr>
+              <a:t>        tools=TOOLS, messages=messages)</a:t>
+            </a:r>
+            <a:endParaRPr lang="en-US" sz="1100" dirty="0"/>
+          </a:p>
+          <a:p>
+            <a:pPr indent="0" marL="0">
+              <a:buNone/>
+            </a:pPr>
+            <a:r>
+              <a:rPr lang="en-US" sz="1100" dirty="0">
+                <a:solidFill>
+                  <a:srgbClr val="F3F5F7"/>
+                </a:solidFill>
+                <a:latin typeface="Courier New" pitchFamily="34" charset="0"/>
+                <a:ea typeface="Courier New" pitchFamily="34" charset="-122"/>
+                <a:cs typeface="Courier New" pitchFamily="34" charset="-120"/>
+              </a:rPr>
+              <a:t>    messages.append(assistant(resp.content))</a:t>
+            </a:r>
+            <a:endParaRPr lang="en-US" sz="1100" dirty="0"/>
+          </a:p>
+          <a:p>
+            <a:pPr indent="0" marL="0">
+              <a:buNone/>
+            </a:pPr>
+            <a:endParaRPr lang="en-US" sz="1100" dirty="0"/>
+          </a:p>
+          <a:p>
+            <a:pPr indent="0" marL="0">
+              <a:buNone/>
+            </a:pPr>
+            <a:r>
+              <a:rPr lang="en-US" sz="1100" dirty="0">
+                <a:solidFill>
+                  <a:srgbClr val="4FB3BF"/>
+                </a:solidFill>
+                <a:latin typeface="Courier New" pitchFamily="34" charset="0"/>
+                <a:ea typeface="Courier New" pitchFamily="34" charset="-122"/>
+                <a:cs typeface="Courier New" pitchFamily="34" charset="-120"/>
+              </a:rPr>
+              <a:t>    if resp.stop_reason != "tool_use":</a:t>
+            </a:r>
+            <a:endParaRPr lang="en-US" sz="1100" dirty="0"/>
+          </a:p>
+          <a:p>
+            <a:pPr indent="0" marL="0">
+              <a:buNone/>
+            </a:pPr>
+            <a:r>
+              <a:rPr lang="en-US" sz="1100" dirty="0">
+                <a:solidFill>
+                  <a:srgbClr val="4FB3BF"/>
+                </a:solidFill>
+                <a:latin typeface="Courier New" pitchFamily="34" charset="0"/>
+                <a:ea typeface="Courier New" pitchFamily="34" charset="-122"/>
+                <a:cs typeface="Courier New" pitchFamily="34" charset="-120"/>
+              </a:rPr>
+              <a:t>        return final_text(resp)</a:t>
+            </a:r>
+            <a:endParaRPr lang="en-US" sz="1100" dirty="0"/>
+          </a:p>
+          <a:p>
+            <a:pPr indent="0" marL="0">
+              <a:buNone/>
+            </a:pPr>
+            <a:endParaRPr lang="en-US" sz="1100" dirty="0"/>
+          </a:p>
+          <a:p>
+            <a:pPr indent="0" marL="0">
+              <a:buNone/>
+            </a:pPr>
+            <a:r>
+              <a:rPr lang="en-US" sz="1100" dirty="0">
+                <a:solidFill>
+                  <a:srgbClr val="F3F5F7"/>
+                </a:solidFill>
+                <a:latin typeface="Courier New" pitchFamily="34" charset="0"/>
+                <a:ea typeface="Courier New" pitchFamily="34" charset="-122"/>
+                <a:cs typeface="Courier New" pitchFamily="34" charset="-120"/>
+              </a:rPr>
+              <a:t>    for block in tool_uses(resp):</a:t>
+            </a:r>
+            <a:endParaRPr lang="en-US" sz="1100" dirty="0"/>
+          </a:p>
+          <a:p>
+            <a:pPr indent="0" marL="0">
+              <a:buNone/>
+            </a:pPr>
+            <a:r>
+              <a:rPr lang="en-US" sz="1100" dirty="0">
+                <a:solidFill>
+                  <a:srgbClr val="F5A623"/>
+                </a:solidFill>
+                <a:latin typeface="Courier New" pitchFamily="34" charset="0"/>
+                <a:ea typeface="Courier New" pitchFamily="34" charset="-122"/>
+                <a:cs typeface="Courier New" pitchFamily="34" charset="-120"/>
+              </a:rPr>
+              <a:t>        out = HANDLERS[block.name](**block.input)</a:t>
+            </a:r>
+            <a:endParaRPr lang="en-US" sz="1100" dirty="0"/>
+          </a:p>
+          <a:p>
+            <a:pPr indent="0" marL="0">
+              <a:buNone/>
+            </a:pPr>
+            <a:r>
+              <a:rPr lang="en-US" sz="1100" dirty="0">
+                <a:solidFill>
+                  <a:srgbClr val="F3F5F7"/>
+                </a:solidFill>
+                <a:latin typeface="Courier New" pitchFamily="34" charset="0"/>
+                <a:ea typeface="Courier New" pitchFamily="34" charset="-122"/>
+                <a:cs typeface="Courier New" pitchFamily="34" charset="-120"/>
+              </a:rPr>
+              <a:t>        results.append(tool_result(block.id, out))</a:t>
+            </a:r>
+            <a:endParaRPr lang="en-US" sz="1100" dirty="0"/>
+          </a:p>
+          <a:p>
+            <a:pPr indent="0" marL="0">
+              <a:buNone/>
+            </a:pPr>
+            <a:r>
+              <a:rPr lang="en-US" sz="1100" dirty="0">
+                <a:solidFill>
+                  <a:srgbClr val="F3F5F7"/>
+                </a:solidFill>
+                <a:latin typeface="Courier New" pitchFamily="34" charset="0"/>
+                <a:ea typeface="Courier New" pitchFamily="34" charset="-122"/>
+                <a:cs typeface="Courier New" pitchFamily="34" charset="-120"/>
+              </a:rPr>
+              <a:t>    messages.append(user(results))</a:t>
+            </a:r>
+            <a:endParaRPr lang="en-US" sz="1100" dirty="0"/>
+          </a:p>
+          <a:p>
+            <a:pPr indent="0" marL="0">
+              <a:buNone/>
+            </a:pPr>
+            <a:endParaRPr lang="en-US" sz="1100" dirty="0"/>
+          </a:p>
+          <a:p>
+            <a:pPr indent="0" marL="0">
+              <a:buNone/>
+            </a:pPr>
+            <a:r>
+              <a:rPr lang="en-US" sz="1100" dirty="0">
+                <a:solidFill>
+                  <a:srgbClr val="E5533D"/>
+                </a:solidFill>
+                <a:latin typeface="Courier New" pitchFamily="34" charset="0"/>
+                <a:ea typeface="Courier New" pitchFamily="34" charset="-122"/>
+                <a:cs typeface="Courier New" pitchFamily="34" charset="-120"/>
+              </a:rPr>
+              <a:t>return "Stopped: step limit reached."</a:t>
+            </a:r>
+            <a:endParaRPr lang="en-US" sz="1100" dirty="0"/>
+          </a:p>
+        </p:txBody>
+      </p:sp>
+      <p:sp>
+        <p:nvSpPr>
+          <p:cNvPr id="6" name="Text 3"/>
+          <p:cNvSpPr txBox="1"/>
+          <p:nvPr/>
+        </p:nvSpPr>
+        <p:spPr>
+          <a:xfrm>
+            <a:off x="6080760" y="1143000"/>
+            <a:ext cx="2606040" cy="274320"/>
+          </a:xfrm>
+          <a:prstGeom prst="rect">
+            <a:avLst/>
+          </a:prstGeom>
+          <a:noFill/>
+          <a:ln/>
+        </p:spPr>
+        <p:txBody>
+          <a:bodyPr wrap="square" lIns="0" tIns="0" rIns="0" bIns="0" rtlCol="0" anchor="ctr"/>
+          <a:lstStyle/>
+          <a:p>
+            <a:pPr indent="0" marL="0">
+              <a:buNone/>
+            </a:pPr>
+            <a:r>
+              <a:rPr lang="en-US" sz="1100" b="1" spc="200" kern="0" dirty="0">
+                <a:solidFill>
+                  <a:srgbClr val="F5A623"/>
+                </a:solidFill>
+                <a:latin typeface="Calibri" pitchFamily="34" charset="0"/>
+                <a:ea typeface="Calibri" pitchFamily="34" charset="-122"/>
+                <a:cs typeface="Calibri" pitchFamily="34" charset="-120"/>
+              </a:rPr>
+              <a:t>PLAN</a:t>
+            </a:r>
+            <a:endParaRPr lang="en-US" sz="1100" dirty="0"/>
+          </a:p>
+        </p:txBody>
       </p:sp>
       <p:sp>
         <p:nvSpPr>
@@ -2409,34 +2722,34 @@
         </p:nvSpPr>
         <p:spPr>
           <a:xfrm>
-            <a:off x="731520" y="1828800"/>
-            <a:ext cx="457200" cy="457200"/>
-          </a:xfrm>
-          <a:prstGeom prst="rect">
-            <a:avLst/>
-          </a:prstGeom>
-          <a:noFill/>
-          <a:ln/>
-        </p:spPr>
-        <p:txBody>
-          <a:bodyPr wrap="square" lIns="0" tIns="0" rIns="0" bIns="0" rtlCol="0" anchor="ctr"/>
-          <a:lstStyle/>
-          <a:p>
-            <a:pPr algn="ctr" indent="0" marL="0">
-              <a:buNone/>
-            </a:pPr>
-            <a:r>
-              <a:rPr lang="en-US" sz="1600" b="1" dirty="0">
-                <a:solidFill>
-                  <a:srgbClr val="0F1316"/>
-                </a:solidFill>
-                <a:latin typeface="Calibri" pitchFamily="34" charset="0"/>
-                <a:ea typeface="Calibri" pitchFamily="34" charset="-122"/>
-                <a:cs typeface="Calibri" pitchFamily="34" charset="-120"/>
-              </a:rPr>
-              <a:t>✕</a:t>
-            </a:r>
-            <a:endParaRPr lang="en-US" sz="1600" dirty="0"/>
+            <a:off x="6080760" y="1417320"/>
+            <a:ext cx="2606040" cy="548640"/>
+          </a:xfrm>
+          <a:prstGeom prst="rect">
+            <a:avLst/>
+          </a:prstGeom>
+          <a:noFill/>
+          <a:ln/>
+        </p:spPr>
+        <p:txBody>
+          <a:bodyPr wrap="square" lIns="0" tIns="0" rIns="0" bIns="0" rtlCol="0" anchor="t"/>
+          <a:lstStyle/>
+          <a:p>
+            <a:pPr indent="0" marL="0">
+              <a:buNone/>
+            </a:pPr>
+            <a:r>
+              <a:rPr lang="en-US" sz="1200" dirty="0">
+                <a:solidFill>
+                  <a:srgbClr val="9AA6B2"/>
+                </a:solidFill>
+                <a:latin typeface="Calibri" pitchFamily="34" charset="0"/>
+                <a:ea typeface="Calibri" pitchFamily="34" charset="-122"/>
+                <a:cs typeface="Calibri" pitchFamily="34" charset="-120"/>
+              </a:rPr>
+              <a:t>the model sees the goal, the tools, and everything so far — and picks</a:t>
+            </a:r>
+            <a:endParaRPr lang="en-US" sz="1200" dirty="0"/>
           </a:p>
         </p:txBody>
       </p:sp>
@@ -2448,8 +2761,47 @@
         </p:nvSpPr>
         <p:spPr>
           <a:xfrm>
-            <a:off x="731520" y="2423160"/>
-            <a:ext cx="2103120" cy="457200"/>
+            <a:off x="6080760" y="1984248"/>
+            <a:ext cx="2606040" cy="274320"/>
+          </a:xfrm>
+          <a:prstGeom prst="rect">
+            <a:avLst/>
+          </a:prstGeom>
+          <a:noFill/>
+          <a:ln/>
+        </p:spPr>
+        <p:txBody>
+          <a:bodyPr wrap="square" lIns="0" tIns="0" rIns="0" bIns="0" rtlCol="0" anchor="ctr"/>
+          <a:lstStyle/>
+          <a:p>
+            <a:pPr indent="0" marL="0">
+              <a:buNone/>
+            </a:pPr>
+            <a:r>
+              <a:rPr lang="en-US" sz="1100" b="1" spc="200" kern="0" dirty="0">
+                <a:solidFill>
+                  <a:srgbClr val="4FB3BF"/>
+                </a:solidFill>
+                <a:latin typeface="Calibri" pitchFamily="34" charset="0"/>
+                <a:ea typeface="Calibri" pitchFamily="34" charset="-122"/>
+                <a:cs typeface="Calibri" pitchFamily="34" charset="-120"/>
+              </a:rPr>
+              <a:t>DONE</a:t>
+            </a:r>
+            <a:endParaRPr lang="en-US" sz="1100" dirty="0"/>
+          </a:p>
+        </p:txBody>
+      </p:sp>
+      <p:sp>
+        <p:nvSpPr>
+          <p:cNvPr id="9" name="Text 6"/>
+          <p:cNvSpPr txBox="1"/>
+          <p:nvPr/>
+        </p:nvSpPr>
+        <p:spPr>
+          <a:xfrm>
+            <a:off x="6080760" y="2258568"/>
+            <a:ext cx="2606040" cy="548640"/>
           </a:xfrm>
           <a:prstGeom prst="rect">
             <a:avLst/>
@@ -2465,30 +2817,69 @@
               <a:buNone/>
             </a:pPr>
             <a:r>
-              <a:rPr lang="en-US" sz="1700" b="1" dirty="0">
-                <a:solidFill>
-                  <a:srgbClr val="F3F5F7"/>
-                </a:solidFill>
-                <a:latin typeface="Cambria" pitchFamily="34" charset="0"/>
-                <a:ea typeface="Cambria" pitchFamily="34" charset="-122"/>
-                <a:cs typeface="Cambria" pitchFamily="34" charset="-120"/>
-              </a:rPr>
-              <a:t>Service account</a:t>
-            </a:r>
-            <a:endParaRPr lang="en-US" sz="1700" dirty="0"/>
-          </a:p>
-        </p:txBody>
-      </p:sp>
-      <p:sp>
-        <p:nvSpPr>
-          <p:cNvPr id="9" name="Text 6"/>
-          <p:cNvSpPr txBox="1"/>
-          <p:nvPr/>
-        </p:nvSpPr>
-        <p:spPr>
-          <a:xfrm>
-            <a:off x="731520" y="2926080"/>
-            <a:ext cx="2103120" cy="1280160"/>
+              <a:rPr lang="en-US" sz="1200" dirty="0">
+                <a:solidFill>
+                  <a:srgbClr val="9AA6B2"/>
+                </a:solidFill>
+                <a:latin typeface="Calibri" pitchFamily="34" charset="0"/>
+                <a:ea typeface="Calibri" pitchFamily="34" charset="-122"/>
+                <a:cs typeface="Calibri" pitchFamily="34" charset="-120"/>
+              </a:rPr>
+              <a:t>no tool requested → the model thinks the goal is met</a:t>
+            </a:r>
+            <a:endParaRPr lang="en-US" sz="1200" dirty="0"/>
+          </a:p>
+        </p:txBody>
+      </p:sp>
+      <p:sp>
+        <p:nvSpPr>
+          <p:cNvPr id="10" name="Text 7"/>
+          <p:cNvSpPr txBox="1"/>
+          <p:nvPr/>
+        </p:nvSpPr>
+        <p:spPr>
+          <a:xfrm>
+            <a:off x="6080760" y="2825496"/>
+            <a:ext cx="2606040" cy="274320"/>
+          </a:xfrm>
+          <a:prstGeom prst="rect">
+            <a:avLst/>
+          </a:prstGeom>
+          <a:noFill/>
+          <a:ln/>
+        </p:spPr>
+        <p:txBody>
+          <a:bodyPr wrap="square" lIns="0" tIns="0" rIns="0" bIns="0" rtlCol="0" anchor="ctr"/>
+          <a:lstStyle/>
+          <a:p>
+            <a:pPr indent="0" marL="0">
+              <a:buNone/>
+            </a:pPr>
+            <a:r>
+              <a:rPr lang="en-US" sz="1100" b="1" spc="200" kern="0" dirty="0">
+                <a:solidFill>
+                  <a:srgbClr val="F5A623"/>
+                </a:solidFill>
+                <a:latin typeface="Calibri" pitchFamily="34" charset="0"/>
+                <a:ea typeface="Calibri" pitchFamily="34" charset="-122"/>
+                <a:cs typeface="Calibri" pitchFamily="34" charset="-120"/>
+              </a:rPr>
+              <a:t>ACT + OBSERVE</a:t>
+            </a:r>
+            <a:endParaRPr lang="en-US" sz="1100" dirty="0"/>
+          </a:p>
+        </p:txBody>
+      </p:sp>
+      <p:sp>
+        <p:nvSpPr>
+          <p:cNvPr id="11" name="Text 8"/>
+          <p:cNvSpPr txBox="1"/>
+          <p:nvPr/>
+        </p:nvSpPr>
+        <p:spPr>
+          <a:xfrm>
+            <a:off x="6080760" y="3099816"/>
+            <a:ext cx="2606040" cy="548640"/>
           </a:xfrm>
           <a:prstGeom prst="rect">
             <a:avLst/>
@@ -2512,7 +2903,7 @@
                 <a:ea typeface="Calibri" pitchFamily="34" charset="-122"/>
                 <a:cs typeface="Calibri" pitchFamily="34" charset="-120"/>
               </a:rPr>
-              <a:t>Simple. Over-privileged. One prompt injection away from reading every tenant.</a:t>
+              <a:t>run what it asked for, feed the result back</a:t>
             </a:r>
             <a:endParaRPr lang="en-US" sz="1200" dirty="0"/>
           </a:p>
@@ -2520,87 +2911,40 @@
       </p:sp>
       <p:sp>
         <p:nvSpPr>
-          <p:cNvPr id="10" name="Shape 7"/>
-          <p:cNvSpPr/>
-          <p:nvPr/>
-        </p:nvSpPr>
-        <p:spPr>
-          <a:xfrm>
-            <a:off x="3246120" y="1600200"/>
-            <a:ext cx="2606040" cy="2697480"/>
-          </a:xfrm>
-          <a:prstGeom prst="roundRect">
-            <a:avLst>
-              <a:gd name="adj" fmla="val 2807"/>
-            </a:avLst>
-          </a:prstGeom>
-          <a:solidFill>
-            <a:srgbClr val="1B2127"/>
-          </a:solidFill>
-          <a:ln w="9525">
-            <a:solidFill>
-              <a:srgbClr val="2E3842"/>
-            </a:solidFill>
-            <a:prstDash val="solid"/>
-          </a:ln>
-        </p:spPr>
-      </p:sp>
-      <p:sp>
-        <p:nvSpPr>
-          <p:cNvPr id="11" name="Shape 8"/>
-          <p:cNvSpPr/>
-          <p:nvPr/>
-        </p:nvSpPr>
-        <p:spPr>
-          <a:xfrm>
-            <a:off x="3520440" y="1828800"/>
-            <a:ext cx="457200" cy="457200"/>
-          </a:xfrm>
-          <a:prstGeom prst="ellipse">
-            <a:avLst/>
-          </a:prstGeom>
-          <a:solidFill>
-            <a:srgbClr val="F5A623"/>
-          </a:solidFill>
-          <a:ln/>
-        </p:spPr>
-      </p:sp>
-      <p:sp>
-        <p:nvSpPr>
           <p:cNvPr id="12" name="Text 9"/>
           <p:cNvSpPr txBox="1"/>
           <p:nvPr/>
         </p:nvSpPr>
         <p:spPr>
           <a:xfrm>
-            <a:off x="3520440" y="1828800"/>
-            <a:ext cx="457200" cy="457200"/>
-          </a:xfrm>
-          <a:prstGeom prst="rect">
-            <a:avLst/>
-          </a:prstGeom>
-          <a:noFill/>
-          <a:ln/>
-        </p:spPr>
-        <p:txBody>
-          <a:bodyPr wrap="square" lIns="0" tIns="0" rIns="0" bIns="0" rtlCol="0" anchor="ctr"/>
-          <a:lstStyle/>
-          <a:p>
-            <a:pPr algn="ctr" indent="0" marL="0">
-              <a:buNone/>
-            </a:pPr>
-            <a:r>
-              <a:rPr lang="en-US" sz="1600" b="1" dirty="0">
-                <a:solidFill>
-                  <a:srgbClr val="0F1316"/>
-                </a:solidFill>
-                <a:latin typeface="Calibri" pitchFamily="34" charset="0"/>
-                <a:ea typeface="Calibri" pitchFamily="34" charset="-122"/>
-                <a:cs typeface="Calibri" pitchFamily="34" charset="-120"/>
-              </a:rPr>
-              <a:t>~</a:t>
-            </a:r>
-            <a:endParaRPr lang="en-US" sz="1600" dirty="0"/>
+            <a:off x="6080760" y="3666744"/>
+            <a:ext cx="2606040" cy="274320"/>
+          </a:xfrm>
+          <a:prstGeom prst="rect">
+            <a:avLst/>
+          </a:prstGeom>
+          <a:noFill/>
+          <a:ln/>
+        </p:spPr>
+        <p:txBody>
+          <a:bodyPr wrap="square" lIns="0" tIns="0" rIns="0" bIns="0" rtlCol="0" anchor="ctr"/>
+          <a:lstStyle/>
+          <a:p>
+            <a:pPr indent="0" marL="0">
+              <a:buNone/>
+            </a:pPr>
+            <a:r>
+              <a:rPr lang="en-US" sz="1100" b="1" spc="200" kern="0" dirty="0">
+                <a:solidFill>
+                  <a:srgbClr val="E5533D"/>
+                </a:solidFill>
+                <a:latin typeface="Calibri" pitchFamily="34" charset="0"/>
+                <a:ea typeface="Calibri" pitchFamily="34" charset="-122"/>
+                <a:cs typeface="Calibri" pitchFamily="34" charset="-120"/>
+              </a:rPr>
+              <a:t>LIMIT</a:t>
+            </a:r>
+            <a:endParaRPr lang="en-US" sz="1100" dirty="0"/>
           </a:p>
         </p:txBody>
       </p:sp>
@@ -2612,8 +2956,8 @@
         </p:nvSpPr>
         <p:spPr>
           <a:xfrm>
-            <a:off x="3520440" y="2423160"/>
-            <a:ext cx="2103120" cy="457200"/>
+            <a:off x="6080760" y="3941064"/>
+            <a:ext cx="2606040" cy="548640"/>
           </a:xfrm>
           <a:prstGeom prst="rect">
             <a:avLst/>
@@ -2629,226 +2973,23 @@
               <a:buNone/>
             </a:pPr>
             <a:r>
-              <a:rPr lang="en-US" sz="1700" b="1" dirty="0">
-                <a:solidFill>
-                  <a:srgbClr val="F3F5F7"/>
-                </a:solidFill>
-                <a:latin typeface="Cambria" pitchFamily="34" charset="0"/>
-                <a:ea typeface="Cambria" pitchFamily="34" charset="-122"/>
-                <a:cs typeface="Cambria" pitchFamily="34" charset="-120"/>
-              </a:rPr>
-              <a:t>The user's token</a:t>
-            </a:r>
-            <a:endParaRPr lang="en-US" sz="1700" dirty="0"/>
+              <a:rPr lang="en-US" sz="1200" dirty="0">
+                <a:solidFill>
+                  <a:srgbClr val="9AA6B2"/>
+                </a:solidFill>
+                <a:latin typeface="Calibri" pitchFamily="34" charset="0"/>
+                <a:ea typeface="Calibri" pitchFamily="34" charset="-122"/>
+                <a:cs typeface="Calibri" pitchFamily="34" charset="-120"/>
+              </a:rPr>
+              <a:t>MAX_STEPS. Also cap cost and time in production</a:t>
+            </a:r>
+            <a:endParaRPr lang="en-US" sz="1200" dirty="0"/>
           </a:p>
         </p:txBody>
       </p:sp>
       <p:sp>
         <p:nvSpPr>
           <p:cNvPr id="14" name="Text 11"/>
-          <p:cNvSpPr txBox="1"/>
-          <p:nvPr/>
-        </p:nvSpPr>
-        <p:spPr>
-          <a:xfrm>
-            <a:off x="3520440" y="2926080"/>
-            <a:ext cx="2103120" cy="1280160"/>
-          </a:xfrm>
-          <a:prstGeom prst="rect">
-            <a:avLst/>
-          </a:prstGeom>
-          <a:noFill/>
-          <a:ln/>
-        </p:spPr>
-        <p:txBody>
-          <a:bodyPr wrap="square" lIns="0" tIns="0" rIns="0" bIns="0" rtlCol="0" anchor="t"/>
-          <a:lstStyle/>
-          <a:p>
-            <a:pPr indent="0" marL="0">
-              <a:buNone/>
-            </a:pPr>
-            <a:r>
-              <a:rPr lang="en-US" sz="1200" dirty="0">
-                <a:solidFill>
-                  <a:srgbClr val="9AA6B2"/>
-                </a:solidFill>
-                <a:latin typeface="Calibri" pitchFamily="34" charset="0"/>
-                <a:ea typeface="Calibri" pitchFamily="34" charset="-122"/>
-                <a:cs typeface="Calibri" pitchFamily="34" charset="-120"/>
-              </a:rPr>
-              <a:t>Scoped correctly — but how do you delegate it safely to a process that runs for minutes?</a:t>
-            </a:r>
-            <a:endParaRPr lang="en-US" sz="1200" dirty="0"/>
-          </a:p>
-        </p:txBody>
-      </p:sp>
-      <p:sp>
-        <p:nvSpPr>
-          <p:cNvPr id="15" name="Shape 12"/>
-          <p:cNvSpPr/>
-          <p:nvPr/>
-        </p:nvSpPr>
-        <p:spPr>
-          <a:xfrm>
-            <a:off x="6035040" y="1600200"/>
-            <a:ext cx="2606040" cy="2697480"/>
-          </a:xfrm>
-          <a:prstGeom prst="roundRect">
-            <a:avLst>
-              <a:gd name="adj" fmla="val 2807"/>
-            </a:avLst>
-          </a:prstGeom>
-          <a:solidFill>
-            <a:srgbClr val="1B2127"/>
-          </a:solidFill>
-          <a:ln w="9525">
-            <a:solidFill>
-              <a:srgbClr val="2E3842"/>
-            </a:solidFill>
-            <a:prstDash val="solid"/>
-          </a:ln>
-        </p:spPr>
-      </p:sp>
-      <p:sp>
-        <p:nvSpPr>
-          <p:cNvPr id="16" name="Shape 13"/>
-          <p:cNvSpPr/>
-          <p:nvPr/>
-        </p:nvSpPr>
-        <p:spPr>
-          <a:xfrm>
-            <a:off x="6309360" y="1828800"/>
-            <a:ext cx="457200" cy="457200"/>
-          </a:xfrm>
-          <a:prstGeom prst="ellipse">
-            <a:avLst/>
-          </a:prstGeom>
-          <a:solidFill>
-            <a:srgbClr val="4FB3BF"/>
-          </a:solidFill>
-          <a:ln/>
-        </p:spPr>
-      </p:sp>
-      <p:sp>
-        <p:nvSpPr>
-          <p:cNvPr id="17" name="Text 14"/>
-          <p:cNvSpPr txBox="1"/>
-          <p:nvPr/>
-        </p:nvSpPr>
-        <p:spPr>
-          <a:xfrm>
-            <a:off x="6309360" y="1828800"/>
-            <a:ext cx="457200" cy="457200"/>
-          </a:xfrm>
-          <a:prstGeom prst="rect">
-            <a:avLst/>
-          </a:prstGeom>
-          <a:noFill/>
-          <a:ln/>
-        </p:spPr>
-        <p:txBody>
-          <a:bodyPr wrap="square" lIns="0" tIns="0" rIns="0" bIns="0" rtlCol="0" anchor="ctr"/>
-          <a:lstStyle/>
-          <a:p>
-            <a:pPr algn="ctr" indent="0" marL="0">
-              <a:buNone/>
-            </a:pPr>
-            <a:r>
-              <a:rPr lang="en-US" sz="1600" b="1" dirty="0">
-                <a:solidFill>
-                  <a:srgbClr val="0F1316"/>
-                </a:solidFill>
-                <a:latin typeface="Calibri" pitchFamily="34" charset="0"/>
-                <a:ea typeface="Calibri" pitchFamily="34" charset="-122"/>
-                <a:cs typeface="Calibri" pitchFamily="34" charset="-120"/>
-              </a:rPr>
-              <a:t>✓</a:t>
-            </a:r>
-            <a:endParaRPr lang="en-US" sz="1600" dirty="0"/>
-          </a:p>
-        </p:txBody>
-      </p:sp>
-      <p:sp>
-        <p:nvSpPr>
-          <p:cNvPr id="18" name="Text 15"/>
-          <p:cNvSpPr txBox="1"/>
-          <p:nvPr/>
-        </p:nvSpPr>
-        <p:spPr>
-          <a:xfrm>
-            <a:off x="6309360" y="2423160"/>
-            <a:ext cx="2103120" cy="457200"/>
-          </a:xfrm>
-          <a:prstGeom prst="rect">
-            <a:avLst/>
-          </a:prstGeom>
-          <a:noFill/>
-          <a:ln/>
-        </p:spPr>
-        <p:txBody>
-          <a:bodyPr wrap="square" lIns="0" tIns="0" rIns="0" bIns="0" rtlCol="0" anchor="t"/>
-          <a:lstStyle/>
-          <a:p>
-            <a:pPr indent="0" marL="0">
-              <a:buNone/>
-            </a:pPr>
-            <a:r>
-              <a:rPr lang="en-US" sz="1700" b="1" dirty="0">
-                <a:solidFill>
-                  <a:srgbClr val="F3F5F7"/>
-                </a:solidFill>
-                <a:latin typeface="Cambria" pitchFamily="34" charset="0"/>
-                <a:ea typeface="Cambria" pitchFamily="34" charset="-122"/>
-                <a:cs typeface="Cambria" pitchFamily="34" charset="-120"/>
-              </a:rPr>
-              <a:t>Agent identity</a:t>
-            </a:r>
-            <a:endParaRPr lang="en-US" sz="1700" dirty="0"/>
-          </a:p>
-        </p:txBody>
-      </p:sp>
-      <p:sp>
-        <p:nvSpPr>
-          <p:cNvPr id="19" name="Text 16"/>
-          <p:cNvSpPr txBox="1"/>
-          <p:nvPr/>
-        </p:nvSpPr>
-        <p:spPr>
-          <a:xfrm>
-            <a:off x="6309360" y="2926080"/>
-            <a:ext cx="2103120" cy="1280160"/>
-          </a:xfrm>
-          <a:prstGeom prst="rect">
-            <a:avLst/>
-          </a:prstGeom>
-          <a:noFill/>
-          <a:ln/>
-        </p:spPr>
-        <p:txBody>
-          <a:bodyPr wrap="square" lIns="0" tIns="0" rIns="0" bIns="0" rtlCol="0" anchor="t"/>
-          <a:lstStyle/>
-          <a:p>
-            <a:pPr indent="0" marL="0">
-              <a:buNone/>
-            </a:pPr>
-            <a:r>
-              <a:rPr lang="en-US" sz="1200" dirty="0">
-                <a:solidFill>
-                  <a:srgbClr val="9AA6B2"/>
-                </a:solidFill>
-                <a:latin typeface="Calibri" pitchFamily="34" charset="0"/>
-                <a:ea typeface="Calibri" pitchFamily="34" charset="-122"/>
-                <a:cs typeface="Calibri" pitchFamily="34" charset="-120"/>
-              </a:rPr>
-              <a:t>Its own principal, scoped per tenant, per user, per task. Least-privilege tools. Auditable.</a:t>
-            </a:r>
-            <a:endParaRPr lang="en-US" sz="1200" dirty="0"/>
-          </a:p>
-        </p:txBody>
-      </p:sp>
-      <p:sp>
-        <p:nvSpPr>
-          <p:cNvPr id="20" name="Text 17"/>
           <p:cNvSpPr txBox="1"/>
           <p:nvPr/>
         </p:nvSpPr>
@@ -2879,7 +3020,7 @@
                 <a:ea typeface="Calibri" pitchFamily="34" charset="-122"/>
                 <a:cs typeface="Calibri" pitchFamily="34" charset="-120"/>
               </a:rPr>
-              <a:t>Episode 15 goes deep on delegated auth and least-privilege tools</a:t>
+              <a:t>basic_agent.py · ~100 lines including four mock tools</a:t>
             </a:r>
             <a:endParaRPr lang="en-US" sz="1000" dirty="0"/>
           </a:p>
@@ -2950,7 +3091,7 @@
                 <a:ea typeface="Calibri" pitchFamily="34" charset="-122"/>
                 <a:cs typeface="Calibri" pitchFamily="34" charset="-120"/>
               </a:rPr>
-              <a:t>WHAT BREAKS IN THE ENTERPRISE · 2 OF 3</a:t>
+              <a:t>WHAT BREAKS IN THE ENTERPRISE · 1 OF 3</a:t>
             </a:r>
             <a:endParaRPr lang="en-US" sz="1100" dirty="0"/>
           </a:p>
@@ -2989,7 +3130,7 @@
                 <a:ea typeface="Cambria" pitchFamily="34" charset="-122"/>
                 <a:cs typeface="Cambria" pitchFamily="34" charset="-120"/>
               </a:rPr>
-              <a:t>Tenancy: one agent, many customers</a:t>
+              <a:t>Identity: the agent calls your API — as whom?</a:t>
             </a:r>
             <a:endParaRPr lang="en-US" sz="2800" dirty="0"/>
           </a:p>
@@ -3003,115 +3144,12 @@
         </p:nvSpPr>
         <p:spPr>
           <a:xfrm>
-            <a:off x="457200" y="2103120"/>
-            <a:ext cx="2011680" cy="1371600"/>
+            <a:off x="457200" y="1600200"/>
+            <a:ext cx="2606040" cy="2697480"/>
           </a:xfrm>
           <a:prstGeom prst="roundRect">
             <a:avLst>
-              <a:gd name="adj" fmla="val 6667"/>
-            </a:avLst>
-          </a:prstGeom>
-          <a:solidFill>
-            <a:srgbClr val="232B33"/>
-          </a:solidFill>
-          <a:ln w="19050">
-            <a:solidFill>
-              <a:srgbClr val="F5A623"/>
-            </a:solidFill>
-            <a:prstDash val="solid"/>
-          </a:ln>
-        </p:spPr>
-      </p:sp>
-      <p:sp>
-        <p:nvSpPr>
-          <p:cNvPr id="6" name="Text 3"/>
-          <p:cNvSpPr txBox="1"/>
-          <p:nvPr/>
-        </p:nvSpPr>
-        <p:spPr>
-          <a:xfrm>
-            <a:off x="457200" y="2103120"/>
-            <a:ext cx="2011680" cy="1371600"/>
-          </a:xfrm>
-          <a:prstGeom prst="rect">
-            <a:avLst/>
-          </a:prstGeom>
-          <a:noFill/>
-          <a:ln/>
-        </p:spPr>
-        <p:txBody>
-          <a:bodyPr wrap="square" lIns="0" tIns="0" rIns="0" bIns="0" rtlCol="0" anchor="ctr"/>
-          <a:lstStyle/>
-          <a:p>
-            <a:pPr algn="ctr" indent="0" marL="0">
-              <a:buNone/>
-            </a:pPr>
-            <a:r>
-              <a:rPr lang="en-US" sz="1600" b="1" dirty="0">
-                <a:solidFill>
-                  <a:srgbClr val="F5A623"/>
-                </a:solidFill>
-                <a:latin typeface="Cambria" pitchFamily="34" charset="0"/>
-                <a:ea typeface="Cambria" pitchFamily="34" charset="-122"/>
-                <a:cs typeface="Cambria" pitchFamily="34" charset="-120"/>
-              </a:rPr>
-              <a:t>Agent</a:t>
-            </a:r>
-            <a:endParaRPr lang="en-US" sz="1600" dirty="0"/>
-          </a:p>
-          <a:p>
-            <a:pPr algn="ctr" indent="0" marL="0">
-              <a:buNone/>
-            </a:pPr>
-            <a:r>
-              <a:rPr lang="en-US" sz="1600" b="1" dirty="0">
-                <a:solidFill>
-                  <a:srgbClr val="F5A623"/>
-                </a:solidFill>
-                <a:latin typeface="Cambria" pitchFamily="34" charset="0"/>
-                <a:ea typeface="Cambria" pitchFamily="34" charset="-122"/>
-                <a:cs typeface="Cambria" pitchFamily="34" charset="-120"/>
-              </a:rPr>
-              <a:t>(model + loop)</a:t>
-            </a:r>
-            <a:endParaRPr lang="en-US" sz="1600" dirty="0"/>
-          </a:p>
-        </p:txBody>
-      </p:sp>
-      <p:sp>
-        <p:nvSpPr>
-          <p:cNvPr id="7" name="Shape 4"/>
-          <p:cNvSpPr/>
-          <p:nvPr/>
-        </p:nvSpPr>
-        <p:spPr>
-          <a:xfrm>
-            <a:off x="2606040" y="1874520"/>
-            <a:ext cx="548640" cy="201168"/>
-          </a:xfrm>
-          <a:prstGeom prst="rightArrow">
-            <a:avLst/>
-          </a:prstGeom>
-          <a:solidFill>
-            <a:srgbClr val="2E3842"/>
-          </a:solidFill>
-          <a:ln/>
-        </p:spPr>
-      </p:sp>
-      <p:sp>
-        <p:nvSpPr>
-          <p:cNvPr id="8" name="Shape 5"/>
-          <p:cNvSpPr/>
-          <p:nvPr/>
-        </p:nvSpPr>
-        <p:spPr>
-          <a:xfrm>
-            <a:off x="3291840" y="1600200"/>
-            <a:ext cx="2468880" cy="777240"/>
-          </a:xfrm>
-          <a:prstGeom prst="roundRect">
-            <a:avLst>
-              <a:gd name="adj" fmla="val 9412"/>
+              <a:gd name="adj" fmla="val 2807"/>
             </a:avLst>
           </a:prstGeom>
           <a:solidFill>
@@ -3127,30 +3165,89 @@
       </p:sp>
       <p:sp>
         <p:nvSpPr>
-          <p:cNvPr id="9" name="Text 6"/>
-          <p:cNvSpPr txBox="1"/>
-          <p:nvPr/>
-        </p:nvSpPr>
-        <p:spPr>
-          <a:xfrm>
-            <a:off x="3474720" y="1645920"/>
-            <a:ext cx="2194560" cy="320040"/>
-          </a:xfrm>
-          <a:prstGeom prst="rect">
-            <a:avLst/>
-          </a:prstGeom>
-          <a:noFill/>
-          <a:ln/>
-        </p:spPr>
-        <p:txBody>
-          <a:bodyPr wrap="square" lIns="0" tIns="0" rIns="0" bIns="0" rtlCol="0" anchor="ctr"/>
-          <a:lstStyle/>
-          <a:p>
-            <a:pPr indent="0" marL="0">
-              <a:buNone/>
-            </a:pPr>
-            <a:r>
-              <a:rPr lang="en-US" sz="1500" b="1" dirty="0">
+          <p:cNvPr id="6" name="Shape 3"/>
+          <p:cNvSpPr/>
+          <p:nvPr/>
+        </p:nvSpPr>
+        <p:spPr>
+          <a:xfrm>
+            <a:off x="731520" y="1828800"/>
+            <a:ext cx="457200" cy="457200"/>
+          </a:xfrm>
+          <a:prstGeom prst="ellipse">
+            <a:avLst/>
+          </a:prstGeom>
+          <a:solidFill>
+            <a:srgbClr val="E5533D"/>
+          </a:solidFill>
+          <a:ln/>
+        </p:spPr>
+      </p:sp>
+      <p:sp>
+        <p:nvSpPr>
+          <p:cNvPr id="7" name="Text 4"/>
+          <p:cNvSpPr txBox="1"/>
+          <p:nvPr/>
+        </p:nvSpPr>
+        <p:spPr>
+          <a:xfrm>
+            <a:off x="731520" y="1828800"/>
+            <a:ext cx="457200" cy="457200"/>
+          </a:xfrm>
+          <a:prstGeom prst="rect">
+            <a:avLst/>
+          </a:prstGeom>
+          <a:noFill/>
+          <a:ln/>
+        </p:spPr>
+        <p:txBody>
+          <a:bodyPr wrap="square" lIns="0" tIns="0" rIns="0" bIns="0" rtlCol="0" anchor="ctr"/>
+          <a:lstStyle/>
+          <a:p>
+            <a:pPr algn="ctr" indent="0" marL="0">
+              <a:buNone/>
+            </a:pPr>
+            <a:r>
+              <a:rPr lang="en-US" sz="1600" b="1" dirty="0">
+                <a:solidFill>
+                  <a:srgbClr val="0F1316"/>
+                </a:solidFill>
+                <a:latin typeface="Calibri" pitchFamily="34" charset="0"/>
+                <a:ea typeface="Calibri" pitchFamily="34" charset="-122"/>
+                <a:cs typeface="Calibri" pitchFamily="34" charset="-120"/>
+              </a:rPr>
+              <a:t>✕</a:t>
+            </a:r>
+            <a:endParaRPr lang="en-US" sz="1600" dirty="0"/>
+          </a:p>
+        </p:txBody>
+      </p:sp>
+      <p:sp>
+        <p:nvSpPr>
+          <p:cNvPr id="8" name="Text 5"/>
+          <p:cNvSpPr txBox="1"/>
+          <p:nvPr/>
+        </p:nvSpPr>
+        <p:spPr>
+          <a:xfrm>
+            <a:off x="731520" y="2423160"/>
+            <a:ext cx="2103120" cy="457200"/>
+          </a:xfrm>
+          <a:prstGeom prst="rect">
+            <a:avLst/>
+          </a:prstGeom>
+          <a:noFill/>
+          <a:ln/>
+        </p:spPr>
+        <p:txBody>
+          <a:bodyPr wrap="square" lIns="0" tIns="0" rIns="0" bIns="0" rtlCol="0" anchor="t"/>
+          <a:lstStyle/>
+          <a:p>
+            <a:pPr indent="0" marL="0">
+              <a:buNone/>
+            </a:pPr>
+            <a:r>
+              <a:rPr lang="en-US" sz="1700" b="1" dirty="0">
                 <a:solidFill>
                   <a:srgbClr val="F3F5F7"/>
                 </a:solidFill>
@@ -3158,38 +3255,38 @@
                 <a:ea typeface="Cambria" pitchFamily="34" charset="-122"/>
                 <a:cs typeface="Cambria" pitchFamily="34" charset="-120"/>
               </a:rPr>
-              <a:t>Memory</a:t>
-            </a:r>
-            <a:endParaRPr lang="en-US" sz="1500" dirty="0"/>
-          </a:p>
-        </p:txBody>
-      </p:sp>
-      <p:sp>
-        <p:nvSpPr>
-          <p:cNvPr id="10" name="Text 7"/>
-          <p:cNvSpPr txBox="1"/>
-          <p:nvPr/>
-        </p:nvSpPr>
-        <p:spPr>
-          <a:xfrm>
-            <a:off x="3474720" y="1965960"/>
-            <a:ext cx="2194560" cy="365760"/>
-          </a:xfrm>
-          <a:prstGeom prst="rect">
-            <a:avLst/>
-          </a:prstGeom>
-          <a:noFill/>
-          <a:ln/>
-        </p:spPr>
-        <p:txBody>
-          <a:bodyPr wrap="square" lIns="0" tIns="0" rIns="0" bIns="0" rtlCol="0" anchor="ctr"/>
-          <a:lstStyle/>
-          <a:p>
-            <a:pPr indent="0" marL="0">
-              <a:buNone/>
-            </a:pPr>
-            <a:r>
-              <a:rPr lang="en-US" sz="1100" dirty="0">
+              <a:t>Service account</a:t>
+            </a:r>
+            <a:endParaRPr lang="en-US" sz="1700" dirty="0"/>
+          </a:p>
+        </p:txBody>
+      </p:sp>
+      <p:sp>
+        <p:nvSpPr>
+          <p:cNvPr id="9" name="Text 6"/>
+          <p:cNvSpPr txBox="1"/>
+          <p:nvPr/>
+        </p:nvSpPr>
+        <p:spPr>
+          <a:xfrm>
+            <a:off x="731520" y="2926080"/>
+            <a:ext cx="2103120" cy="1280160"/>
+          </a:xfrm>
+          <a:prstGeom prst="rect">
+            <a:avLst/>
+          </a:prstGeom>
+          <a:noFill/>
+          <a:ln/>
+        </p:spPr>
+        <p:txBody>
+          <a:bodyPr wrap="square" lIns="0" tIns="0" rIns="0" bIns="0" rtlCol="0" anchor="t"/>
+          <a:lstStyle/>
+          <a:p>
+            <a:pPr indent="0" marL="0">
+              <a:buNone/>
+            </a:pPr>
+            <a:r>
+              <a:rPr lang="en-US" sz="1200" dirty="0">
                 <a:solidFill>
                   <a:srgbClr val="9AA6B2"/>
                 </a:solidFill>
@@ -3197,244 +3294,26 @@
                 <a:ea typeface="Calibri" pitchFamily="34" charset="-122"/>
                 <a:cs typeface="Calibri" pitchFamily="34" charset="-120"/>
               </a:rPr>
-              <a:t>per-tenant store, never shared context</a:t>
-            </a:r>
-            <a:endParaRPr lang="en-US" sz="1100" dirty="0"/>
-          </a:p>
-        </p:txBody>
-      </p:sp>
-      <p:sp>
-        <p:nvSpPr>
-          <p:cNvPr id="11" name="Shape 8"/>
+              <a:t>Simple. Over-privileged. One prompt injection away from reading every tenant.</a:t>
+            </a:r>
+            <a:endParaRPr lang="en-US" sz="1200" dirty="0"/>
+          </a:p>
+        </p:txBody>
+      </p:sp>
+      <p:sp>
+        <p:nvSpPr>
+          <p:cNvPr id="10" name="Shape 7"/>
           <p:cNvSpPr/>
           <p:nvPr/>
         </p:nvSpPr>
         <p:spPr>
           <a:xfrm>
-            <a:off x="5989320" y="1737360"/>
-            <a:ext cx="731520" cy="502920"/>
+            <a:off x="3246120" y="1600200"/>
+            <a:ext cx="2606040" cy="2697480"/>
           </a:xfrm>
           <a:prstGeom prst="roundRect">
             <a:avLst>
-              <a:gd name="adj" fmla="val 10909"/>
-            </a:avLst>
-          </a:prstGeom>
-          <a:solidFill>
-            <a:srgbClr val="0F1316"/>
-          </a:solidFill>
-          <a:ln w="12700">
-            <a:solidFill>
-              <a:srgbClr val="4FB3BF"/>
-            </a:solidFill>
-            <a:prstDash val="solid"/>
-          </a:ln>
-        </p:spPr>
-      </p:sp>
-      <p:sp>
-        <p:nvSpPr>
-          <p:cNvPr id="12" name="Text 9"/>
-          <p:cNvSpPr txBox="1"/>
-          <p:nvPr/>
-        </p:nvSpPr>
-        <p:spPr>
-          <a:xfrm>
-            <a:off x="5989320" y="1737360"/>
-            <a:ext cx="731520" cy="502920"/>
-          </a:xfrm>
-          <a:prstGeom prst="rect">
-            <a:avLst/>
-          </a:prstGeom>
-          <a:noFill/>
-          <a:ln/>
-        </p:spPr>
-        <p:txBody>
-          <a:bodyPr wrap="square" lIns="0" tIns="0" rIns="0" bIns="0" rtlCol="0" anchor="ctr"/>
-          <a:lstStyle/>
-          <a:p>
-            <a:pPr algn="ctr" indent="0" marL="0">
-              <a:buNone/>
-            </a:pPr>
-            <a:r>
-              <a:rPr lang="en-US" sz="1200" b="1" dirty="0">
-                <a:solidFill>
-                  <a:srgbClr val="4FB3BF"/>
-                </a:solidFill>
-                <a:latin typeface="Calibri" pitchFamily="34" charset="0"/>
-                <a:ea typeface="Calibri" pitchFamily="34" charset="-122"/>
-                <a:cs typeface="Calibri" pitchFamily="34" charset="-120"/>
-              </a:rPr>
-              <a:t>T1</a:t>
-            </a:r>
-            <a:endParaRPr lang="en-US" sz="1200" dirty="0"/>
-          </a:p>
-        </p:txBody>
-      </p:sp>
-      <p:sp>
-        <p:nvSpPr>
-          <p:cNvPr id="13" name="Shape 10"/>
-          <p:cNvSpPr/>
-          <p:nvPr/>
-        </p:nvSpPr>
-        <p:spPr>
-          <a:xfrm>
-            <a:off x="6885432" y="1737360"/>
-            <a:ext cx="731520" cy="502920"/>
-          </a:xfrm>
-          <a:prstGeom prst="roundRect">
-            <a:avLst>
-              <a:gd name="adj" fmla="val 10909"/>
-            </a:avLst>
-          </a:prstGeom>
-          <a:solidFill>
-            <a:srgbClr val="0F1316"/>
-          </a:solidFill>
-          <a:ln w="12700">
-            <a:solidFill>
-              <a:srgbClr val="4FB3BF"/>
-            </a:solidFill>
-            <a:prstDash val="solid"/>
-          </a:ln>
-        </p:spPr>
-      </p:sp>
-      <p:sp>
-        <p:nvSpPr>
-          <p:cNvPr id="14" name="Text 11"/>
-          <p:cNvSpPr txBox="1"/>
-          <p:nvPr/>
-        </p:nvSpPr>
-        <p:spPr>
-          <a:xfrm>
-            <a:off x="6885432" y="1737360"/>
-            <a:ext cx="731520" cy="502920"/>
-          </a:xfrm>
-          <a:prstGeom prst="rect">
-            <a:avLst/>
-          </a:prstGeom>
-          <a:noFill/>
-          <a:ln/>
-        </p:spPr>
-        <p:txBody>
-          <a:bodyPr wrap="square" lIns="0" tIns="0" rIns="0" bIns="0" rtlCol="0" anchor="ctr"/>
-          <a:lstStyle/>
-          <a:p>
-            <a:pPr algn="ctr" indent="0" marL="0">
-              <a:buNone/>
-            </a:pPr>
-            <a:r>
-              <a:rPr lang="en-US" sz="1200" b="1" dirty="0">
-                <a:solidFill>
-                  <a:srgbClr val="4FB3BF"/>
-                </a:solidFill>
-                <a:latin typeface="Calibri" pitchFamily="34" charset="0"/>
-                <a:ea typeface="Calibri" pitchFamily="34" charset="-122"/>
-                <a:cs typeface="Calibri" pitchFamily="34" charset="-120"/>
-              </a:rPr>
-              <a:t>T2</a:t>
-            </a:r>
-            <a:endParaRPr lang="en-US" sz="1200" dirty="0"/>
-          </a:p>
-        </p:txBody>
-      </p:sp>
-      <p:sp>
-        <p:nvSpPr>
-          <p:cNvPr id="15" name="Shape 12"/>
-          <p:cNvSpPr/>
-          <p:nvPr/>
-        </p:nvSpPr>
-        <p:spPr>
-          <a:xfrm>
-            <a:off x="7781544" y="1737360"/>
-            <a:ext cx="731520" cy="502920"/>
-          </a:xfrm>
-          <a:prstGeom prst="roundRect">
-            <a:avLst>
-              <a:gd name="adj" fmla="val 10909"/>
-            </a:avLst>
-          </a:prstGeom>
-          <a:solidFill>
-            <a:srgbClr val="0F1316"/>
-          </a:solidFill>
-          <a:ln w="12700">
-            <a:solidFill>
-              <a:srgbClr val="4FB3BF"/>
-            </a:solidFill>
-            <a:prstDash val="solid"/>
-          </a:ln>
-        </p:spPr>
-      </p:sp>
-      <p:sp>
-        <p:nvSpPr>
-          <p:cNvPr id="16" name="Text 13"/>
-          <p:cNvSpPr txBox="1"/>
-          <p:nvPr/>
-        </p:nvSpPr>
-        <p:spPr>
-          <a:xfrm>
-            <a:off x="7781544" y="1737360"/>
-            <a:ext cx="731520" cy="502920"/>
-          </a:xfrm>
-          <a:prstGeom prst="rect">
-            <a:avLst/>
-          </a:prstGeom>
-          <a:noFill/>
-          <a:ln/>
-        </p:spPr>
-        <p:txBody>
-          <a:bodyPr wrap="square" lIns="0" tIns="0" rIns="0" bIns="0" rtlCol="0" anchor="ctr"/>
-          <a:lstStyle/>
-          <a:p>
-            <a:pPr algn="ctr" indent="0" marL="0">
-              <a:buNone/>
-            </a:pPr>
-            <a:r>
-              <a:rPr lang="en-US" sz="1200" b="1" dirty="0">
-                <a:solidFill>
-                  <a:srgbClr val="4FB3BF"/>
-                </a:solidFill>
-                <a:latin typeface="Calibri" pitchFamily="34" charset="0"/>
-                <a:ea typeface="Calibri" pitchFamily="34" charset="-122"/>
-                <a:cs typeface="Calibri" pitchFamily="34" charset="-120"/>
-              </a:rPr>
-              <a:t>T3</a:t>
-            </a:r>
-            <a:endParaRPr lang="en-US" sz="1200" dirty="0"/>
-          </a:p>
-        </p:txBody>
-      </p:sp>
-      <p:sp>
-        <p:nvSpPr>
-          <p:cNvPr id="17" name="Shape 14"/>
-          <p:cNvSpPr/>
-          <p:nvPr/>
-        </p:nvSpPr>
-        <p:spPr>
-          <a:xfrm>
-            <a:off x="2606040" y="2834640"/>
-            <a:ext cx="548640" cy="201168"/>
-          </a:xfrm>
-          <a:prstGeom prst="rightArrow">
-            <a:avLst/>
-          </a:prstGeom>
-          <a:solidFill>
-            <a:srgbClr val="2E3842"/>
-          </a:solidFill>
-          <a:ln/>
-        </p:spPr>
-      </p:sp>
-      <p:sp>
-        <p:nvSpPr>
-          <p:cNvPr id="18" name="Shape 15"/>
-          <p:cNvSpPr/>
-          <p:nvPr/>
-        </p:nvSpPr>
-        <p:spPr>
-          <a:xfrm>
-            <a:off x="3291840" y="2560320"/>
-            <a:ext cx="2468880" cy="777240"/>
-          </a:xfrm>
-          <a:prstGeom prst="roundRect">
-            <a:avLst>
-              <a:gd name="adj" fmla="val 9412"/>
+              <a:gd name="adj" fmla="val 2807"/>
             </a:avLst>
           </a:prstGeom>
           <a:solidFill>
@@ -3450,30 +3329,89 @@
       </p:sp>
       <p:sp>
         <p:nvSpPr>
-          <p:cNvPr id="19" name="Text 16"/>
-          <p:cNvSpPr txBox="1"/>
-          <p:nvPr/>
-        </p:nvSpPr>
-        <p:spPr>
-          <a:xfrm>
-            <a:off x="3474720" y="2606040"/>
-            <a:ext cx="2194560" cy="320040"/>
-          </a:xfrm>
-          <a:prstGeom prst="rect">
-            <a:avLst/>
-          </a:prstGeom>
-          <a:noFill/>
-          <a:ln/>
-        </p:spPr>
-        <p:txBody>
-          <a:bodyPr wrap="square" lIns="0" tIns="0" rIns="0" bIns="0" rtlCol="0" anchor="ctr"/>
-          <a:lstStyle/>
-          <a:p>
-            <a:pPr indent="0" marL="0">
-              <a:buNone/>
-            </a:pPr>
-            <a:r>
-              <a:rPr lang="en-US" sz="1500" b="1" dirty="0">
+          <p:cNvPr id="11" name="Shape 8"/>
+          <p:cNvSpPr/>
+          <p:nvPr/>
+        </p:nvSpPr>
+        <p:spPr>
+          <a:xfrm>
+            <a:off x="3520440" y="1828800"/>
+            <a:ext cx="457200" cy="457200"/>
+          </a:xfrm>
+          <a:prstGeom prst="ellipse">
+            <a:avLst/>
+          </a:prstGeom>
+          <a:solidFill>
+            <a:srgbClr val="F5A623"/>
+          </a:solidFill>
+          <a:ln/>
+        </p:spPr>
+      </p:sp>
+      <p:sp>
+        <p:nvSpPr>
+          <p:cNvPr id="12" name="Text 9"/>
+          <p:cNvSpPr txBox="1"/>
+          <p:nvPr/>
+        </p:nvSpPr>
+        <p:spPr>
+          <a:xfrm>
+            <a:off x="3520440" y="1828800"/>
+            <a:ext cx="457200" cy="457200"/>
+          </a:xfrm>
+          <a:prstGeom prst="rect">
+            <a:avLst/>
+          </a:prstGeom>
+          <a:noFill/>
+          <a:ln/>
+        </p:spPr>
+        <p:txBody>
+          <a:bodyPr wrap="square" lIns="0" tIns="0" rIns="0" bIns="0" rtlCol="0" anchor="ctr"/>
+          <a:lstStyle/>
+          <a:p>
+            <a:pPr algn="ctr" indent="0" marL="0">
+              <a:buNone/>
+            </a:pPr>
+            <a:r>
+              <a:rPr lang="en-US" sz="1600" b="1" dirty="0">
+                <a:solidFill>
+                  <a:srgbClr val="0F1316"/>
+                </a:solidFill>
+                <a:latin typeface="Calibri" pitchFamily="34" charset="0"/>
+                <a:ea typeface="Calibri" pitchFamily="34" charset="-122"/>
+                <a:cs typeface="Calibri" pitchFamily="34" charset="-120"/>
+              </a:rPr>
+              <a:t>~</a:t>
+            </a:r>
+            <a:endParaRPr lang="en-US" sz="1600" dirty="0"/>
+          </a:p>
+        </p:txBody>
+      </p:sp>
+      <p:sp>
+        <p:nvSpPr>
+          <p:cNvPr id="13" name="Text 10"/>
+          <p:cNvSpPr txBox="1"/>
+          <p:nvPr/>
+        </p:nvSpPr>
+        <p:spPr>
+          <a:xfrm>
+            <a:off x="3520440" y="2423160"/>
+            <a:ext cx="2103120" cy="457200"/>
+          </a:xfrm>
+          <a:prstGeom prst="rect">
+            <a:avLst/>
+          </a:prstGeom>
+          <a:noFill/>
+          <a:ln/>
+        </p:spPr>
+        <p:txBody>
+          <a:bodyPr wrap="square" lIns="0" tIns="0" rIns="0" bIns="0" rtlCol="0" anchor="t"/>
+          <a:lstStyle/>
+          <a:p>
+            <a:pPr indent="0" marL="0">
+              <a:buNone/>
+            </a:pPr>
+            <a:r>
+              <a:rPr lang="en-US" sz="1700" b="1" dirty="0">
                 <a:solidFill>
                   <a:srgbClr val="F3F5F7"/>
                 </a:solidFill>
@@ -3481,38 +3419,38 @@
                 <a:ea typeface="Cambria" pitchFamily="34" charset="-122"/>
                 <a:cs typeface="Cambria" pitchFamily="34" charset="-120"/>
               </a:rPr>
-              <a:t>Tools</a:t>
-            </a:r>
-            <a:endParaRPr lang="en-US" sz="1500" dirty="0"/>
-          </a:p>
-        </p:txBody>
-      </p:sp>
-      <p:sp>
-        <p:nvSpPr>
-          <p:cNvPr id="20" name="Text 17"/>
-          <p:cNvSpPr txBox="1"/>
-          <p:nvPr/>
-        </p:nvSpPr>
-        <p:spPr>
-          <a:xfrm>
-            <a:off x="3474720" y="2926080"/>
-            <a:ext cx="2194560" cy="365760"/>
-          </a:xfrm>
-          <a:prstGeom prst="rect">
-            <a:avLst/>
-          </a:prstGeom>
-          <a:noFill/>
-          <a:ln/>
-        </p:spPr>
-        <p:txBody>
-          <a:bodyPr wrap="square" lIns="0" tIns="0" rIns="0" bIns="0" rtlCol="0" anchor="ctr"/>
-          <a:lstStyle/>
-          <a:p>
-            <a:pPr indent="0" marL="0">
-              <a:buNone/>
-            </a:pPr>
-            <a:r>
-              <a:rPr lang="en-US" sz="1100" dirty="0">
+              <a:t>The user's token</a:t>
+            </a:r>
+            <a:endParaRPr lang="en-US" sz="1700" dirty="0"/>
+          </a:p>
+        </p:txBody>
+      </p:sp>
+      <p:sp>
+        <p:nvSpPr>
+          <p:cNvPr id="14" name="Text 11"/>
+          <p:cNvSpPr txBox="1"/>
+          <p:nvPr/>
+        </p:nvSpPr>
+        <p:spPr>
+          <a:xfrm>
+            <a:off x="3520440" y="2926080"/>
+            <a:ext cx="2103120" cy="1280160"/>
+          </a:xfrm>
+          <a:prstGeom prst="rect">
+            <a:avLst/>
+          </a:prstGeom>
+          <a:noFill/>
+          <a:ln/>
+        </p:spPr>
+        <p:txBody>
+          <a:bodyPr wrap="square" lIns="0" tIns="0" rIns="0" bIns="0" rtlCol="0" anchor="t"/>
+          <a:lstStyle/>
+          <a:p>
+            <a:pPr indent="0" marL="0">
+              <a:buNone/>
+            </a:pPr>
+            <a:r>
+              <a:rPr lang="en-US" sz="1200" dirty="0">
                 <a:solidFill>
                   <a:srgbClr val="9AA6B2"/>
                 </a:solidFill>
@@ -3520,244 +3458,26 @@
                 <a:ea typeface="Calibri" pitchFamily="34" charset="-122"/>
                 <a:cs typeface="Calibri" pitchFamily="34" charset="-120"/>
               </a:rPr>
-              <a:t>tenant-scoped credentials on every call</a:t>
-            </a:r>
-            <a:endParaRPr lang="en-US" sz="1100" dirty="0"/>
-          </a:p>
-        </p:txBody>
-      </p:sp>
-      <p:sp>
-        <p:nvSpPr>
-          <p:cNvPr id="21" name="Shape 18"/>
+              <a:t>Scoped correctly — but how do you delegate it safely to a process that runs for minutes?</a:t>
+            </a:r>
+            <a:endParaRPr lang="en-US" sz="1200" dirty="0"/>
+          </a:p>
+        </p:txBody>
+      </p:sp>
+      <p:sp>
+        <p:nvSpPr>
+          <p:cNvPr id="15" name="Shape 12"/>
           <p:cNvSpPr/>
           <p:nvPr/>
         </p:nvSpPr>
         <p:spPr>
           <a:xfrm>
-            <a:off x="5989320" y="2697480"/>
-            <a:ext cx="731520" cy="502920"/>
+            <a:off x="6035040" y="1600200"/>
+            <a:ext cx="2606040" cy="2697480"/>
           </a:xfrm>
           <a:prstGeom prst="roundRect">
             <a:avLst>
-              <a:gd name="adj" fmla="val 10909"/>
-            </a:avLst>
-          </a:prstGeom>
-          <a:solidFill>
-            <a:srgbClr val="0F1316"/>
-          </a:solidFill>
-          <a:ln w="12700">
-            <a:solidFill>
-              <a:srgbClr val="4FB3BF"/>
-            </a:solidFill>
-            <a:prstDash val="solid"/>
-          </a:ln>
-        </p:spPr>
-      </p:sp>
-      <p:sp>
-        <p:nvSpPr>
-          <p:cNvPr id="22" name="Text 19"/>
-          <p:cNvSpPr txBox="1"/>
-          <p:nvPr/>
-        </p:nvSpPr>
-        <p:spPr>
-          <a:xfrm>
-            <a:off x="5989320" y="2697480"/>
-            <a:ext cx="731520" cy="502920"/>
-          </a:xfrm>
-          <a:prstGeom prst="rect">
-            <a:avLst/>
-          </a:prstGeom>
-          <a:noFill/>
-          <a:ln/>
-        </p:spPr>
-        <p:txBody>
-          <a:bodyPr wrap="square" lIns="0" tIns="0" rIns="0" bIns="0" rtlCol="0" anchor="ctr"/>
-          <a:lstStyle/>
-          <a:p>
-            <a:pPr algn="ctr" indent="0" marL="0">
-              <a:buNone/>
-            </a:pPr>
-            <a:r>
-              <a:rPr lang="en-US" sz="1200" b="1" dirty="0">
-                <a:solidFill>
-                  <a:srgbClr val="4FB3BF"/>
-                </a:solidFill>
-                <a:latin typeface="Calibri" pitchFamily="34" charset="0"/>
-                <a:ea typeface="Calibri" pitchFamily="34" charset="-122"/>
-                <a:cs typeface="Calibri" pitchFamily="34" charset="-120"/>
-              </a:rPr>
-              <a:t>T1</a:t>
-            </a:r>
-            <a:endParaRPr lang="en-US" sz="1200" dirty="0"/>
-          </a:p>
-        </p:txBody>
-      </p:sp>
-      <p:sp>
-        <p:nvSpPr>
-          <p:cNvPr id="23" name="Shape 20"/>
-          <p:cNvSpPr/>
-          <p:nvPr/>
-        </p:nvSpPr>
-        <p:spPr>
-          <a:xfrm>
-            <a:off x="6885432" y="2697480"/>
-            <a:ext cx="731520" cy="502920"/>
-          </a:xfrm>
-          <a:prstGeom prst="roundRect">
-            <a:avLst>
-              <a:gd name="adj" fmla="val 10909"/>
-            </a:avLst>
-          </a:prstGeom>
-          <a:solidFill>
-            <a:srgbClr val="0F1316"/>
-          </a:solidFill>
-          <a:ln w="12700">
-            <a:solidFill>
-              <a:srgbClr val="4FB3BF"/>
-            </a:solidFill>
-            <a:prstDash val="solid"/>
-          </a:ln>
-        </p:spPr>
-      </p:sp>
-      <p:sp>
-        <p:nvSpPr>
-          <p:cNvPr id="24" name="Text 21"/>
-          <p:cNvSpPr txBox="1"/>
-          <p:nvPr/>
-        </p:nvSpPr>
-        <p:spPr>
-          <a:xfrm>
-            <a:off x="6885432" y="2697480"/>
-            <a:ext cx="731520" cy="502920"/>
-          </a:xfrm>
-          <a:prstGeom prst="rect">
-            <a:avLst/>
-          </a:prstGeom>
-          <a:noFill/>
-          <a:ln/>
-        </p:spPr>
-        <p:txBody>
-          <a:bodyPr wrap="square" lIns="0" tIns="0" rIns="0" bIns="0" rtlCol="0" anchor="ctr"/>
-          <a:lstStyle/>
-          <a:p>
-            <a:pPr algn="ctr" indent="0" marL="0">
-              <a:buNone/>
-            </a:pPr>
-            <a:r>
-              <a:rPr lang="en-US" sz="1200" b="1" dirty="0">
-                <a:solidFill>
-                  <a:srgbClr val="4FB3BF"/>
-                </a:solidFill>
-                <a:latin typeface="Calibri" pitchFamily="34" charset="0"/>
-                <a:ea typeface="Calibri" pitchFamily="34" charset="-122"/>
-                <a:cs typeface="Calibri" pitchFamily="34" charset="-120"/>
-              </a:rPr>
-              <a:t>T2</a:t>
-            </a:r>
-            <a:endParaRPr lang="en-US" sz="1200" dirty="0"/>
-          </a:p>
-        </p:txBody>
-      </p:sp>
-      <p:sp>
-        <p:nvSpPr>
-          <p:cNvPr id="25" name="Shape 22"/>
-          <p:cNvSpPr/>
-          <p:nvPr/>
-        </p:nvSpPr>
-        <p:spPr>
-          <a:xfrm>
-            <a:off x="7781544" y="2697480"/>
-            <a:ext cx="731520" cy="502920"/>
-          </a:xfrm>
-          <a:prstGeom prst="roundRect">
-            <a:avLst>
-              <a:gd name="adj" fmla="val 10909"/>
-            </a:avLst>
-          </a:prstGeom>
-          <a:solidFill>
-            <a:srgbClr val="0F1316"/>
-          </a:solidFill>
-          <a:ln w="12700">
-            <a:solidFill>
-              <a:srgbClr val="4FB3BF"/>
-            </a:solidFill>
-            <a:prstDash val="solid"/>
-          </a:ln>
-        </p:spPr>
-      </p:sp>
-      <p:sp>
-        <p:nvSpPr>
-          <p:cNvPr id="26" name="Text 23"/>
-          <p:cNvSpPr txBox="1"/>
-          <p:nvPr/>
-        </p:nvSpPr>
-        <p:spPr>
-          <a:xfrm>
-            <a:off x="7781544" y="2697480"/>
-            <a:ext cx="731520" cy="502920"/>
-          </a:xfrm>
-          <a:prstGeom prst="rect">
-            <a:avLst/>
-          </a:prstGeom>
-          <a:noFill/>
-          <a:ln/>
-        </p:spPr>
-        <p:txBody>
-          <a:bodyPr wrap="square" lIns="0" tIns="0" rIns="0" bIns="0" rtlCol="0" anchor="ctr"/>
-          <a:lstStyle/>
-          <a:p>
-            <a:pPr algn="ctr" indent="0" marL="0">
-              <a:buNone/>
-            </a:pPr>
-            <a:r>
-              <a:rPr lang="en-US" sz="1200" b="1" dirty="0">
-                <a:solidFill>
-                  <a:srgbClr val="4FB3BF"/>
-                </a:solidFill>
-                <a:latin typeface="Calibri" pitchFamily="34" charset="0"/>
-                <a:ea typeface="Calibri" pitchFamily="34" charset="-122"/>
-                <a:cs typeface="Calibri" pitchFamily="34" charset="-120"/>
-              </a:rPr>
-              <a:t>T3</a:t>
-            </a:r>
-            <a:endParaRPr lang="en-US" sz="1200" dirty="0"/>
-          </a:p>
-        </p:txBody>
-      </p:sp>
-      <p:sp>
-        <p:nvSpPr>
-          <p:cNvPr id="27" name="Shape 24"/>
-          <p:cNvSpPr/>
-          <p:nvPr/>
-        </p:nvSpPr>
-        <p:spPr>
-          <a:xfrm>
-            <a:off x="2606040" y="3794760"/>
-            <a:ext cx="548640" cy="201168"/>
-          </a:xfrm>
-          <a:prstGeom prst="rightArrow">
-            <a:avLst/>
-          </a:prstGeom>
-          <a:solidFill>
-            <a:srgbClr val="2E3842"/>
-          </a:solidFill>
-          <a:ln/>
-        </p:spPr>
-      </p:sp>
-      <p:sp>
-        <p:nvSpPr>
-          <p:cNvPr id="28" name="Shape 25"/>
-          <p:cNvSpPr/>
-          <p:nvPr/>
-        </p:nvSpPr>
-        <p:spPr>
-          <a:xfrm>
-            <a:off x="3291840" y="3520440"/>
-            <a:ext cx="2468880" cy="777240"/>
-          </a:xfrm>
-          <a:prstGeom prst="roundRect">
-            <a:avLst>
-              <a:gd name="adj" fmla="val 9412"/>
+              <a:gd name="adj" fmla="val 2807"/>
             </a:avLst>
           </a:prstGeom>
           <a:solidFill>
@@ -3773,30 +3493,89 @@
       </p:sp>
       <p:sp>
         <p:nvSpPr>
-          <p:cNvPr id="29" name="Text 26"/>
-          <p:cNvSpPr txBox="1"/>
-          <p:nvPr/>
-        </p:nvSpPr>
-        <p:spPr>
-          <a:xfrm>
-            <a:off x="3474720" y="3566160"/>
-            <a:ext cx="2194560" cy="320040"/>
-          </a:xfrm>
-          <a:prstGeom prst="rect">
-            <a:avLst/>
-          </a:prstGeom>
-          <a:noFill/>
-          <a:ln/>
-        </p:spPr>
-        <p:txBody>
-          <a:bodyPr wrap="square" lIns="0" tIns="0" rIns="0" bIns="0" rtlCol="0" anchor="ctr"/>
-          <a:lstStyle/>
-          <a:p>
-            <a:pPr indent="0" marL="0">
-              <a:buNone/>
-            </a:pPr>
-            <a:r>
-              <a:rPr lang="en-US" sz="1500" b="1" dirty="0">
+          <p:cNvPr id="16" name="Shape 13"/>
+          <p:cNvSpPr/>
+          <p:nvPr/>
+        </p:nvSpPr>
+        <p:spPr>
+          <a:xfrm>
+            <a:off x="6309360" y="1828800"/>
+            <a:ext cx="457200" cy="457200"/>
+          </a:xfrm>
+          <a:prstGeom prst="ellipse">
+            <a:avLst/>
+          </a:prstGeom>
+          <a:solidFill>
+            <a:srgbClr val="4FB3BF"/>
+          </a:solidFill>
+          <a:ln/>
+        </p:spPr>
+      </p:sp>
+      <p:sp>
+        <p:nvSpPr>
+          <p:cNvPr id="17" name="Text 14"/>
+          <p:cNvSpPr txBox="1"/>
+          <p:nvPr/>
+        </p:nvSpPr>
+        <p:spPr>
+          <a:xfrm>
+            <a:off x="6309360" y="1828800"/>
+            <a:ext cx="457200" cy="457200"/>
+          </a:xfrm>
+          <a:prstGeom prst="rect">
+            <a:avLst/>
+          </a:prstGeom>
+          <a:noFill/>
+          <a:ln/>
+        </p:spPr>
+        <p:txBody>
+          <a:bodyPr wrap="square" lIns="0" tIns="0" rIns="0" bIns="0" rtlCol="0" anchor="ctr"/>
+          <a:lstStyle/>
+          <a:p>
+            <a:pPr algn="ctr" indent="0" marL="0">
+              <a:buNone/>
+            </a:pPr>
+            <a:r>
+              <a:rPr lang="en-US" sz="1600" b="1" dirty="0">
+                <a:solidFill>
+                  <a:srgbClr val="0F1316"/>
+                </a:solidFill>
+                <a:latin typeface="Calibri" pitchFamily="34" charset="0"/>
+                <a:ea typeface="Calibri" pitchFamily="34" charset="-122"/>
+                <a:cs typeface="Calibri" pitchFamily="34" charset="-120"/>
+              </a:rPr>
+              <a:t>✓</a:t>
+            </a:r>
+            <a:endParaRPr lang="en-US" sz="1600" dirty="0"/>
+          </a:p>
+        </p:txBody>
+      </p:sp>
+      <p:sp>
+        <p:nvSpPr>
+          <p:cNvPr id="18" name="Text 15"/>
+          <p:cNvSpPr txBox="1"/>
+          <p:nvPr/>
+        </p:nvSpPr>
+        <p:spPr>
+          <a:xfrm>
+            <a:off x="6309360" y="2423160"/>
+            <a:ext cx="2103120" cy="457200"/>
+          </a:xfrm>
+          <a:prstGeom prst="rect">
+            <a:avLst/>
+          </a:prstGeom>
+          <a:noFill/>
+          <a:ln/>
+        </p:spPr>
+        <p:txBody>
+          <a:bodyPr wrap="square" lIns="0" tIns="0" rIns="0" bIns="0" rtlCol="0" anchor="t"/>
+          <a:lstStyle/>
+          <a:p>
+            <a:pPr indent="0" marL="0">
+              <a:buNone/>
+            </a:pPr>
+            <a:r>
+              <a:rPr lang="en-US" sz="1700" b="1" dirty="0">
                 <a:solidFill>
                   <a:srgbClr val="F3F5F7"/>
                 </a:solidFill>
@@ -3804,38 +3583,38 @@
                 <a:ea typeface="Cambria" pitchFamily="34" charset="-122"/>
                 <a:cs typeface="Cambria" pitchFamily="34" charset="-120"/>
               </a:rPr>
-              <a:t>Retrieval</a:t>
-            </a:r>
-            <a:endParaRPr lang="en-US" sz="1500" dirty="0"/>
-          </a:p>
-        </p:txBody>
-      </p:sp>
-      <p:sp>
-        <p:nvSpPr>
-          <p:cNvPr id="30" name="Text 27"/>
-          <p:cNvSpPr txBox="1"/>
-          <p:nvPr/>
-        </p:nvSpPr>
-        <p:spPr>
-          <a:xfrm>
-            <a:off x="3474720" y="3886200"/>
-            <a:ext cx="2194560" cy="365760"/>
-          </a:xfrm>
-          <a:prstGeom prst="rect">
-            <a:avLst/>
-          </a:prstGeom>
-          <a:noFill/>
-          <a:ln/>
-        </p:spPr>
-        <p:txBody>
-          <a:bodyPr wrap="square" lIns="0" tIns="0" rIns="0" bIns="0" rtlCol="0" anchor="ctr"/>
-          <a:lstStyle/>
-          <a:p>
-            <a:pPr indent="0" marL="0">
-              <a:buNone/>
-            </a:pPr>
-            <a:r>
-              <a:rPr lang="en-US" sz="1100" dirty="0">
+              <a:t>Agent identity</a:t>
+            </a:r>
+            <a:endParaRPr lang="en-US" sz="1700" dirty="0"/>
+          </a:p>
+        </p:txBody>
+      </p:sp>
+      <p:sp>
+        <p:nvSpPr>
+          <p:cNvPr id="19" name="Text 16"/>
+          <p:cNvSpPr txBox="1"/>
+          <p:nvPr/>
+        </p:nvSpPr>
+        <p:spPr>
+          <a:xfrm>
+            <a:off x="6309360" y="2926080"/>
+            <a:ext cx="2103120" cy="1280160"/>
+          </a:xfrm>
+          <a:prstGeom prst="rect">
+            <a:avLst/>
+          </a:prstGeom>
+          <a:noFill/>
+          <a:ln/>
+        </p:spPr>
+        <p:txBody>
+          <a:bodyPr wrap="square" lIns="0" tIns="0" rIns="0" bIns="0" rtlCol="0" anchor="t"/>
+          <a:lstStyle/>
+          <a:p>
+            <a:pPr indent="0" marL="0">
+              <a:buNone/>
+            </a:pPr>
+            <a:r>
+              <a:rPr lang="en-US" sz="1200" dirty="0">
                 <a:solidFill>
                   <a:srgbClr val="9AA6B2"/>
                 </a:solidFill>
@@ -3843,73 +3622,7 @@
                 <a:ea typeface="Calibri" pitchFamily="34" charset="-122"/>
                 <a:cs typeface="Calibri" pitchFamily="34" charset="-120"/>
               </a:rPr>
-              <a:t>index partitioned, filtered before ranking</a:t>
-            </a:r>
-            <a:endParaRPr lang="en-US" sz="1100" dirty="0"/>
-          </a:p>
-        </p:txBody>
-      </p:sp>
-      <p:sp>
-        <p:nvSpPr>
-          <p:cNvPr id="31" name="Shape 28"/>
-          <p:cNvSpPr/>
-          <p:nvPr/>
-        </p:nvSpPr>
-        <p:spPr>
-          <a:xfrm>
-            <a:off x="5989320" y="3657600"/>
-            <a:ext cx="731520" cy="502920"/>
-          </a:xfrm>
-          <a:prstGeom prst="roundRect">
-            <a:avLst>
-              <a:gd name="adj" fmla="val 10909"/>
-            </a:avLst>
-          </a:prstGeom>
-          <a:solidFill>
-            <a:srgbClr val="0F1316"/>
-          </a:solidFill>
-          <a:ln w="12700">
-            <a:solidFill>
-              <a:srgbClr val="4FB3BF"/>
-            </a:solidFill>
-            <a:prstDash val="solid"/>
-          </a:ln>
-        </p:spPr>
-      </p:sp>
-      <p:sp>
-        <p:nvSpPr>
-          <p:cNvPr id="32" name="Text 29"/>
-          <p:cNvSpPr txBox="1"/>
-          <p:nvPr/>
-        </p:nvSpPr>
-        <p:spPr>
-          <a:xfrm>
-            <a:off x="5989320" y="3657600"/>
-            <a:ext cx="731520" cy="502920"/>
-          </a:xfrm>
-          <a:prstGeom prst="rect">
-            <a:avLst/>
-          </a:prstGeom>
-          <a:noFill/>
-          <a:ln/>
-        </p:spPr>
-        <p:txBody>
-          <a:bodyPr wrap="square" lIns="0" tIns="0" rIns="0" bIns="0" rtlCol="0" anchor="ctr"/>
-          <a:lstStyle/>
-          <a:p>
-            <a:pPr algn="ctr" indent="0" marL="0">
-              <a:buNone/>
-            </a:pPr>
-            <a:r>
-              <a:rPr lang="en-US" sz="1200" b="1" dirty="0">
-                <a:solidFill>
-                  <a:srgbClr val="4FB3BF"/>
-                </a:solidFill>
-                <a:latin typeface="Calibri" pitchFamily="34" charset="0"/>
-                <a:ea typeface="Calibri" pitchFamily="34" charset="-122"/>
-                <a:cs typeface="Calibri" pitchFamily="34" charset="-120"/>
-              </a:rPr>
-              <a:t>T1</a:t>
+              <a:t>Its own principal, scoped per tenant, per user, per task. Least-privilege tools. Auditable.</a:t>
             </a:r>
             <a:endParaRPr lang="en-US" sz="1200" dirty="0"/>
           </a:p>
@@ -3917,178 +3630,7 @@
       </p:sp>
       <p:sp>
         <p:nvSpPr>
-          <p:cNvPr id="33" name="Shape 30"/>
-          <p:cNvSpPr/>
-          <p:nvPr/>
-        </p:nvSpPr>
-        <p:spPr>
-          <a:xfrm>
-            <a:off x="6885432" y="3657600"/>
-            <a:ext cx="731520" cy="502920"/>
-          </a:xfrm>
-          <a:prstGeom prst="roundRect">
-            <a:avLst>
-              <a:gd name="adj" fmla="val 10909"/>
-            </a:avLst>
-          </a:prstGeom>
-          <a:solidFill>
-            <a:srgbClr val="0F1316"/>
-          </a:solidFill>
-          <a:ln w="12700">
-            <a:solidFill>
-              <a:srgbClr val="4FB3BF"/>
-            </a:solidFill>
-            <a:prstDash val="solid"/>
-          </a:ln>
-        </p:spPr>
-      </p:sp>
-      <p:sp>
-        <p:nvSpPr>
-          <p:cNvPr id="34" name="Text 31"/>
-          <p:cNvSpPr txBox="1"/>
-          <p:nvPr/>
-        </p:nvSpPr>
-        <p:spPr>
-          <a:xfrm>
-            <a:off x="6885432" y="3657600"/>
-            <a:ext cx="731520" cy="502920"/>
-          </a:xfrm>
-          <a:prstGeom prst="rect">
-            <a:avLst/>
-          </a:prstGeom>
-          <a:noFill/>
-          <a:ln/>
-        </p:spPr>
-        <p:txBody>
-          <a:bodyPr wrap="square" lIns="0" tIns="0" rIns="0" bIns="0" rtlCol="0" anchor="ctr"/>
-          <a:lstStyle/>
-          <a:p>
-            <a:pPr algn="ctr" indent="0" marL="0">
-              <a:buNone/>
-            </a:pPr>
-            <a:r>
-              <a:rPr lang="en-US" sz="1200" b="1" dirty="0">
-                <a:solidFill>
-                  <a:srgbClr val="4FB3BF"/>
-                </a:solidFill>
-                <a:latin typeface="Calibri" pitchFamily="34" charset="0"/>
-                <a:ea typeface="Calibri" pitchFamily="34" charset="-122"/>
-                <a:cs typeface="Calibri" pitchFamily="34" charset="-120"/>
-              </a:rPr>
-              <a:t>T2</a:t>
-            </a:r>
-            <a:endParaRPr lang="en-US" sz="1200" dirty="0"/>
-          </a:p>
-        </p:txBody>
-      </p:sp>
-      <p:sp>
-        <p:nvSpPr>
-          <p:cNvPr id="35" name="Shape 32"/>
-          <p:cNvSpPr/>
-          <p:nvPr/>
-        </p:nvSpPr>
-        <p:spPr>
-          <a:xfrm>
-            <a:off x="7781544" y="3657600"/>
-            <a:ext cx="731520" cy="502920"/>
-          </a:xfrm>
-          <a:prstGeom prst="roundRect">
-            <a:avLst>
-              <a:gd name="adj" fmla="val 10909"/>
-            </a:avLst>
-          </a:prstGeom>
-          <a:solidFill>
-            <a:srgbClr val="0F1316"/>
-          </a:solidFill>
-          <a:ln w="12700">
-            <a:solidFill>
-              <a:srgbClr val="4FB3BF"/>
-            </a:solidFill>
-            <a:prstDash val="solid"/>
-          </a:ln>
-        </p:spPr>
-      </p:sp>
-      <p:sp>
-        <p:nvSpPr>
-          <p:cNvPr id="36" name="Text 33"/>
-          <p:cNvSpPr txBox="1"/>
-          <p:nvPr/>
-        </p:nvSpPr>
-        <p:spPr>
-          <a:xfrm>
-            <a:off x="7781544" y="3657600"/>
-            <a:ext cx="731520" cy="502920"/>
-          </a:xfrm>
-          <a:prstGeom prst="rect">
-            <a:avLst/>
-          </a:prstGeom>
-          <a:noFill/>
-          <a:ln/>
-        </p:spPr>
-        <p:txBody>
-          <a:bodyPr wrap="square" lIns="0" tIns="0" rIns="0" bIns="0" rtlCol="0" anchor="ctr"/>
-          <a:lstStyle/>
-          <a:p>
-            <a:pPr algn="ctr" indent="0" marL="0">
-              <a:buNone/>
-            </a:pPr>
-            <a:r>
-              <a:rPr lang="en-US" sz="1200" b="1" dirty="0">
-                <a:solidFill>
-                  <a:srgbClr val="4FB3BF"/>
-                </a:solidFill>
-                <a:latin typeface="Calibri" pitchFamily="34" charset="0"/>
-                <a:ea typeface="Calibri" pitchFamily="34" charset="-122"/>
-                <a:cs typeface="Calibri" pitchFamily="34" charset="-120"/>
-              </a:rPr>
-              <a:t>T3</a:t>
-            </a:r>
-            <a:endParaRPr lang="en-US" sz="1200" dirty="0"/>
-          </a:p>
-        </p:txBody>
-      </p:sp>
-      <p:sp>
-        <p:nvSpPr>
-          <p:cNvPr id="37" name="Text 34"/>
-          <p:cNvSpPr txBox="1"/>
-          <p:nvPr/>
-        </p:nvSpPr>
-        <p:spPr>
-          <a:xfrm>
-            <a:off x="5989320" y="1280160"/>
-            <a:ext cx="2743200" cy="274320"/>
-          </a:xfrm>
-          <a:prstGeom prst="rect">
-            <a:avLst/>
-          </a:prstGeom>
-          <a:noFill/>
-          <a:ln/>
-        </p:spPr>
-        <p:txBody>
-          <a:bodyPr wrap="square" lIns="0" tIns="0" rIns="0" bIns="0" rtlCol="0" anchor="ctr"/>
-          <a:lstStyle/>
-          <a:p>
-            <a:pPr indent="0" marL="0">
-              <a:buNone/>
-            </a:pPr>
-            <a:r>
-              <a:rPr lang="en-US" sz="1000" spc="200" kern="0" dirty="0">
-                <a:solidFill>
-                  <a:srgbClr val="4FB3BF"/>
-                </a:solidFill>
-                <a:latin typeface="Calibri" pitchFamily="34" charset="0"/>
-                <a:ea typeface="Calibri" pitchFamily="34" charset="-122"/>
-                <a:cs typeface="Calibri" pitchFamily="34" charset="-120"/>
-              </a:rPr>
-              <a:t>ISOLATED TENANTS</a:t>
-            </a:r>
-            <a:endParaRPr lang="en-US" sz="1000" dirty="0"/>
-          </a:p>
-        </p:txBody>
-      </p:sp>
-      <p:sp>
-        <p:nvSpPr>
-          <p:cNvPr id="38" name="Text 35"/>
+          <p:cNvPr id="20" name="Text 17"/>
           <p:cNvSpPr txBox="1"/>
           <p:nvPr/>
         </p:nvSpPr>
@@ -4119,7 +3661,7 @@
                 <a:ea typeface="Calibri" pitchFamily="34" charset="-122"/>
                 <a:cs typeface="Calibri" pitchFamily="34" charset="-120"/>
               </a:rPr>
-              <a:t>Get one lane wrong and you've built a data leak with a chat window.</a:t>
+              <a:t>Episode 15 goes deep on delegated auth and least-privilege tools</a:t>
             </a:r>
             <a:endParaRPr lang="en-US" sz="1000" dirty="0"/>
           </a:p>
@@ -4190,7 +3732,7 @@
                 <a:ea typeface="Calibri" pitchFamily="34" charset="-122"/>
                 <a:cs typeface="Calibri" pitchFamily="34" charset="-120"/>
               </a:rPr>
-              <a:t>WHAT BREAKS IN THE ENTERPRISE · 3 OF 3</a:t>
+              <a:t>WHAT BREAKS IN THE ENTERPRISE · 2 OF 3</a:t>
             </a:r>
             <a:endParaRPr lang="en-US" sz="1100" dirty="0"/>
           </a:p>
@@ -4229,7 +3771,7 @@
                 <a:ea typeface="Cambria" pitchFamily="34" charset="-122"/>
                 <a:cs typeface="Cambria" pitchFamily="34" charset="-120"/>
               </a:rPr>
-              <a:t>Accountability: who answers for step 7 of 12?</a:t>
+              <a:t>Tenancy: one agent, many customers</a:t>
             </a:r>
             <a:endParaRPr lang="en-US" sz="2800" dirty="0"/>
           </a:p>
@@ -4243,12 +3785,115 @@
         </p:nvSpPr>
         <p:spPr>
           <a:xfrm>
-            <a:off x="457200" y="1600200"/>
-            <a:ext cx="4023360" cy="1234440"/>
+            <a:off x="457200" y="2103120"/>
+            <a:ext cx="2011680" cy="1371600"/>
           </a:xfrm>
           <a:prstGeom prst="roundRect">
             <a:avLst>
-              <a:gd name="adj" fmla="val 5926"/>
+              <a:gd name="adj" fmla="val 6667"/>
+            </a:avLst>
+          </a:prstGeom>
+          <a:solidFill>
+            <a:srgbClr val="232B33"/>
+          </a:solidFill>
+          <a:ln w="19050">
+            <a:solidFill>
+              <a:srgbClr val="F5A623"/>
+            </a:solidFill>
+            <a:prstDash val="solid"/>
+          </a:ln>
+        </p:spPr>
+      </p:sp>
+      <p:sp>
+        <p:nvSpPr>
+          <p:cNvPr id="6" name="Text 3"/>
+          <p:cNvSpPr txBox="1"/>
+          <p:nvPr/>
+        </p:nvSpPr>
+        <p:spPr>
+          <a:xfrm>
+            <a:off x="457200" y="2103120"/>
+            <a:ext cx="2011680" cy="1371600"/>
+          </a:xfrm>
+          <a:prstGeom prst="rect">
+            <a:avLst/>
+          </a:prstGeom>
+          <a:noFill/>
+          <a:ln/>
+        </p:spPr>
+        <p:txBody>
+          <a:bodyPr wrap="square" lIns="0" tIns="0" rIns="0" bIns="0" rtlCol="0" anchor="ctr"/>
+          <a:lstStyle/>
+          <a:p>
+            <a:pPr algn="ctr" indent="0" marL="0">
+              <a:buNone/>
+            </a:pPr>
+            <a:r>
+              <a:rPr lang="en-US" sz="1600" b="1" dirty="0">
+                <a:solidFill>
+                  <a:srgbClr val="F5A623"/>
+                </a:solidFill>
+                <a:latin typeface="Cambria" pitchFamily="34" charset="0"/>
+                <a:ea typeface="Cambria" pitchFamily="34" charset="-122"/>
+                <a:cs typeface="Cambria" pitchFamily="34" charset="-120"/>
+              </a:rPr>
+              <a:t>Agent</a:t>
+            </a:r>
+            <a:endParaRPr lang="en-US" sz="1600" dirty="0"/>
+          </a:p>
+          <a:p>
+            <a:pPr algn="ctr" indent="0" marL="0">
+              <a:buNone/>
+            </a:pPr>
+            <a:r>
+              <a:rPr lang="en-US" sz="1600" b="1" dirty="0">
+                <a:solidFill>
+                  <a:srgbClr val="F5A623"/>
+                </a:solidFill>
+                <a:latin typeface="Cambria" pitchFamily="34" charset="0"/>
+                <a:ea typeface="Cambria" pitchFamily="34" charset="-122"/>
+                <a:cs typeface="Cambria" pitchFamily="34" charset="-120"/>
+              </a:rPr>
+              <a:t>(model + loop)</a:t>
+            </a:r>
+            <a:endParaRPr lang="en-US" sz="1600" dirty="0"/>
+          </a:p>
+        </p:txBody>
+      </p:sp>
+      <p:sp>
+        <p:nvSpPr>
+          <p:cNvPr id="7" name="Shape 4"/>
+          <p:cNvSpPr/>
+          <p:nvPr/>
+        </p:nvSpPr>
+        <p:spPr>
+          <a:xfrm>
+            <a:off x="2606040" y="1874520"/>
+            <a:ext cx="548640" cy="201168"/>
+          </a:xfrm>
+          <a:prstGeom prst="rightArrow">
+            <a:avLst/>
+          </a:prstGeom>
+          <a:solidFill>
+            <a:srgbClr val="2E3842"/>
+          </a:solidFill>
+          <a:ln/>
+        </p:spPr>
+      </p:sp>
+      <p:sp>
+        <p:nvSpPr>
+          <p:cNvPr id="8" name="Shape 5"/>
+          <p:cNvSpPr/>
+          <p:nvPr/>
+        </p:nvSpPr>
+        <p:spPr>
+          <a:xfrm>
+            <a:off x="3291840" y="1600200"/>
+            <a:ext cx="2468880" cy="777240"/>
+          </a:xfrm>
+          <a:prstGeom prst="roundRect">
+            <a:avLst>
+              <a:gd name="adj" fmla="val 9412"/>
             </a:avLst>
           </a:prstGeom>
           <a:solidFill>
@@ -4264,89 +3909,30 @@
       </p:sp>
       <p:sp>
         <p:nvSpPr>
-          <p:cNvPr id="6" name="Shape 3"/>
-          <p:cNvSpPr/>
-          <p:nvPr/>
-        </p:nvSpPr>
-        <p:spPr>
-          <a:xfrm>
-            <a:off x="685800" y="1828800"/>
-            <a:ext cx="384048" cy="384048"/>
-          </a:xfrm>
-          <a:prstGeom prst="ellipse">
-            <a:avLst/>
-          </a:prstGeom>
-          <a:solidFill>
-            <a:srgbClr val="F5A623"/>
-          </a:solidFill>
-          <a:ln/>
-        </p:spPr>
-      </p:sp>
-      <p:sp>
-        <p:nvSpPr>
-          <p:cNvPr id="7" name="Text 4"/>
-          <p:cNvSpPr txBox="1"/>
-          <p:nvPr/>
-        </p:nvSpPr>
-        <p:spPr>
-          <a:xfrm>
-            <a:off x="685800" y="1828800"/>
-            <a:ext cx="384048" cy="384048"/>
-          </a:xfrm>
-          <a:prstGeom prst="rect">
-            <a:avLst/>
-          </a:prstGeom>
-          <a:noFill/>
-          <a:ln/>
-        </p:spPr>
-        <p:txBody>
-          <a:bodyPr wrap="square" lIns="0" tIns="0" rIns="0" bIns="0" rtlCol="0" anchor="ctr"/>
-          <a:lstStyle/>
-          <a:p>
-            <a:pPr algn="ctr" indent="0" marL="0">
-              <a:buNone/>
-            </a:pPr>
-            <a:r>
-              <a:rPr lang="en-US" sz="1400" b="1" dirty="0">
-                <a:solidFill>
-                  <a:srgbClr val="0F1316"/>
-                </a:solidFill>
-                <a:latin typeface="Calibri" pitchFamily="34" charset="0"/>
-                <a:ea typeface="Calibri" pitchFamily="34" charset="-122"/>
-                <a:cs typeface="Calibri" pitchFamily="34" charset="-120"/>
-              </a:rPr>
-              <a:t>1</a:t>
-            </a:r>
-            <a:endParaRPr lang="en-US" sz="1400" dirty="0"/>
-          </a:p>
-        </p:txBody>
-      </p:sp>
-      <p:sp>
-        <p:nvSpPr>
-          <p:cNvPr id="8" name="Text 5"/>
-          <p:cNvSpPr txBox="1"/>
-          <p:nvPr/>
-        </p:nvSpPr>
-        <p:spPr>
-          <a:xfrm>
-            <a:off x="1234440" y="1737360"/>
-            <a:ext cx="3108960" cy="411480"/>
-          </a:xfrm>
-          <a:prstGeom prst="rect">
-            <a:avLst/>
-          </a:prstGeom>
-          <a:noFill/>
-          <a:ln/>
-        </p:spPr>
-        <p:txBody>
-          <a:bodyPr wrap="square" lIns="0" tIns="0" rIns="0" bIns="0" rtlCol="0" anchor="ctr"/>
-          <a:lstStyle/>
-          <a:p>
-            <a:pPr indent="0" marL="0">
-              <a:buNone/>
-            </a:pPr>
-            <a:r>
-              <a:rPr lang="en-US" sz="1600" b="1" dirty="0">
+          <p:cNvPr id="9" name="Text 6"/>
+          <p:cNvSpPr txBox="1"/>
+          <p:nvPr/>
+        </p:nvSpPr>
+        <p:spPr>
+          <a:xfrm>
+            <a:off x="3474720" y="1645920"/>
+            <a:ext cx="2194560" cy="320040"/>
+          </a:xfrm>
+          <a:prstGeom prst="rect">
+            <a:avLst/>
+          </a:prstGeom>
+          <a:noFill/>
+          <a:ln/>
+        </p:spPr>
+        <p:txBody>
+          <a:bodyPr wrap="square" lIns="0" tIns="0" rIns="0" bIns="0" rtlCol="0" anchor="ctr"/>
+          <a:lstStyle/>
+          <a:p>
+            <a:pPr indent="0" marL="0">
+              <a:buNone/>
+            </a:pPr>
+            <a:r>
+              <a:rPr lang="en-US" sz="1500" b="1" dirty="0">
                 <a:solidFill>
                   <a:srgbClr val="F3F5F7"/>
                 </a:solidFill>
@@ -4354,38 +3940,38 @@
                 <a:ea typeface="Cambria" pitchFamily="34" charset="-122"/>
                 <a:cs typeface="Cambria" pitchFamily="34" charset="-120"/>
               </a:rPr>
-              <a:t>Trace every step</a:t>
-            </a:r>
-            <a:endParaRPr lang="en-US" sz="1600" dirty="0"/>
-          </a:p>
-        </p:txBody>
-      </p:sp>
-      <p:sp>
-        <p:nvSpPr>
-          <p:cNvPr id="9" name="Text 6"/>
-          <p:cNvSpPr txBox="1"/>
-          <p:nvPr/>
-        </p:nvSpPr>
-        <p:spPr>
-          <a:xfrm>
-            <a:off x="1234440" y="2148840"/>
-            <a:ext cx="3108960" cy="640080"/>
-          </a:xfrm>
-          <a:prstGeom prst="rect">
-            <a:avLst/>
-          </a:prstGeom>
-          <a:noFill/>
-          <a:ln/>
-        </p:spPr>
-        <p:txBody>
-          <a:bodyPr wrap="square" lIns="0" tIns="0" rIns="0" bIns="0" rtlCol="0" anchor="t"/>
-          <a:lstStyle/>
-          <a:p>
-            <a:pPr indent="0" marL="0">
-              <a:buNone/>
-            </a:pPr>
-            <a:r>
-              <a:rPr lang="en-US" sz="1200" dirty="0">
+              <a:t>Memory</a:t>
+            </a:r>
+            <a:endParaRPr lang="en-US" sz="1500" dirty="0"/>
+          </a:p>
+        </p:txBody>
+      </p:sp>
+      <p:sp>
+        <p:nvSpPr>
+          <p:cNvPr id="10" name="Text 7"/>
+          <p:cNvSpPr txBox="1"/>
+          <p:nvPr/>
+        </p:nvSpPr>
+        <p:spPr>
+          <a:xfrm>
+            <a:off x="3474720" y="1965960"/>
+            <a:ext cx="2194560" cy="365760"/>
+          </a:xfrm>
+          <a:prstGeom prst="rect">
+            <a:avLst/>
+          </a:prstGeom>
+          <a:noFill/>
+          <a:ln/>
+        </p:spPr>
+        <p:txBody>
+          <a:bodyPr wrap="square" lIns="0" tIns="0" rIns="0" bIns="0" rtlCol="0" anchor="ctr"/>
+          <a:lstStyle/>
+          <a:p>
+            <a:pPr indent="0" marL="0">
+              <a:buNone/>
+            </a:pPr>
+            <a:r>
+              <a:rPr lang="en-US" sz="1100" dirty="0">
                 <a:solidFill>
                   <a:srgbClr val="9AA6B2"/>
                 </a:solidFill>
@@ -4393,26 +3979,244 @@
                 <a:ea typeface="Calibri" pitchFamily="34" charset="-122"/>
                 <a:cs typeface="Calibri" pitchFamily="34" charset="-120"/>
               </a:rPr>
-              <a:t>every model call, tool call and result, tied to a user and a tenant</a:t>
-            </a:r>
-            <a:endParaRPr lang="en-US" sz="1200" dirty="0"/>
-          </a:p>
-        </p:txBody>
-      </p:sp>
-      <p:sp>
-        <p:nvSpPr>
-          <p:cNvPr id="10" name="Shape 7"/>
+              <a:t>per-tenant store, never shared context</a:t>
+            </a:r>
+            <a:endParaRPr lang="en-US" sz="1100" dirty="0"/>
+          </a:p>
+        </p:txBody>
+      </p:sp>
+      <p:sp>
+        <p:nvSpPr>
+          <p:cNvPr id="11" name="Shape 8"/>
           <p:cNvSpPr/>
           <p:nvPr/>
         </p:nvSpPr>
         <p:spPr>
           <a:xfrm>
-            <a:off x="4663440" y="1600200"/>
-            <a:ext cx="4023360" cy="1234440"/>
+            <a:off x="5989320" y="1737360"/>
+            <a:ext cx="731520" cy="502920"/>
           </a:xfrm>
           <a:prstGeom prst="roundRect">
             <a:avLst>
-              <a:gd name="adj" fmla="val 5926"/>
+              <a:gd name="adj" fmla="val 10909"/>
+            </a:avLst>
+          </a:prstGeom>
+          <a:solidFill>
+            <a:srgbClr val="0F1316"/>
+          </a:solidFill>
+          <a:ln w="12700">
+            <a:solidFill>
+              <a:srgbClr val="4FB3BF"/>
+            </a:solidFill>
+            <a:prstDash val="solid"/>
+          </a:ln>
+        </p:spPr>
+      </p:sp>
+      <p:sp>
+        <p:nvSpPr>
+          <p:cNvPr id="12" name="Text 9"/>
+          <p:cNvSpPr txBox="1"/>
+          <p:nvPr/>
+        </p:nvSpPr>
+        <p:spPr>
+          <a:xfrm>
+            <a:off x="5989320" y="1737360"/>
+            <a:ext cx="731520" cy="502920"/>
+          </a:xfrm>
+          <a:prstGeom prst="rect">
+            <a:avLst/>
+          </a:prstGeom>
+          <a:noFill/>
+          <a:ln/>
+        </p:spPr>
+        <p:txBody>
+          <a:bodyPr wrap="square" lIns="0" tIns="0" rIns="0" bIns="0" rtlCol="0" anchor="ctr"/>
+          <a:lstStyle/>
+          <a:p>
+            <a:pPr algn="ctr" indent="0" marL="0">
+              <a:buNone/>
+            </a:pPr>
+            <a:r>
+              <a:rPr lang="en-US" sz="1200" b="1" dirty="0">
+                <a:solidFill>
+                  <a:srgbClr val="4FB3BF"/>
+                </a:solidFill>
+                <a:latin typeface="Calibri" pitchFamily="34" charset="0"/>
+                <a:ea typeface="Calibri" pitchFamily="34" charset="-122"/>
+                <a:cs typeface="Calibri" pitchFamily="34" charset="-120"/>
+              </a:rPr>
+              <a:t>T1</a:t>
+            </a:r>
+            <a:endParaRPr lang="en-US" sz="1200" dirty="0"/>
+          </a:p>
+        </p:txBody>
+      </p:sp>
+      <p:sp>
+        <p:nvSpPr>
+          <p:cNvPr id="13" name="Shape 10"/>
+          <p:cNvSpPr/>
+          <p:nvPr/>
+        </p:nvSpPr>
+        <p:spPr>
+          <a:xfrm>
+            <a:off x="6885432" y="1737360"/>
+            <a:ext cx="731520" cy="502920"/>
+          </a:xfrm>
+          <a:prstGeom prst="roundRect">
+            <a:avLst>
+              <a:gd name="adj" fmla="val 10909"/>
+            </a:avLst>
+          </a:prstGeom>
+          <a:solidFill>
+            <a:srgbClr val="0F1316"/>
+          </a:solidFill>
+          <a:ln w="12700">
+            <a:solidFill>
+              <a:srgbClr val="4FB3BF"/>
+            </a:solidFill>
+            <a:prstDash val="solid"/>
+          </a:ln>
+        </p:spPr>
+      </p:sp>
+      <p:sp>
+        <p:nvSpPr>
+          <p:cNvPr id="14" name="Text 11"/>
+          <p:cNvSpPr txBox="1"/>
+          <p:nvPr/>
+        </p:nvSpPr>
+        <p:spPr>
+          <a:xfrm>
+            <a:off x="6885432" y="1737360"/>
+            <a:ext cx="731520" cy="502920"/>
+          </a:xfrm>
+          <a:prstGeom prst="rect">
+            <a:avLst/>
+          </a:prstGeom>
+          <a:noFill/>
+          <a:ln/>
+        </p:spPr>
+        <p:txBody>
+          <a:bodyPr wrap="square" lIns="0" tIns="0" rIns="0" bIns="0" rtlCol="0" anchor="ctr"/>
+          <a:lstStyle/>
+          <a:p>
+            <a:pPr algn="ctr" indent="0" marL="0">
+              <a:buNone/>
+            </a:pPr>
+            <a:r>
+              <a:rPr lang="en-US" sz="1200" b="1" dirty="0">
+                <a:solidFill>
+                  <a:srgbClr val="4FB3BF"/>
+                </a:solidFill>
+                <a:latin typeface="Calibri" pitchFamily="34" charset="0"/>
+                <a:ea typeface="Calibri" pitchFamily="34" charset="-122"/>
+                <a:cs typeface="Calibri" pitchFamily="34" charset="-120"/>
+              </a:rPr>
+              <a:t>T2</a:t>
+            </a:r>
+            <a:endParaRPr lang="en-US" sz="1200" dirty="0"/>
+          </a:p>
+        </p:txBody>
+      </p:sp>
+      <p:sp>
+        <p:nvSpPr>
+          <p:cNvPr id="15" name="Shape 12"/>
+          <p:cNvSpPr/>
+          <p:nvPr/>
+        </p:nvSpPr>
+        <p:spPr>
+          <a:xfrm>
+            <a:off x="7781544" y="1737360"/>
+            <a:ext cx="731520" cy="502920"/>
+          </a:xfrm>
+          <a:prstGeom prst="roundRect">
+            <a:avLst>
+              <a:gd name="adj" fmla="val 10909"/>
+            </a:avLst>
+          </a:prstGeom>
+          <a:solidFill>
+            <a:srgbClr val="0F1316"/>
+          </a:solidFill>
+          <a:ln w="12700">
+            <a:solidFill>
+              <a:srgbClr val="4FB3BF"/>
+            </a:solidFill>
+            <a:prstDash val="solid"/>
+          </a:ln>
+        </p:spPr>
+      </p:sp>
+      <p:sp>
+        <p:nvSpPr>
+          <p:cNvPr id="16" name="Text 13"/>
+          <p:cNvSpPr txBox="1"/>
+          <p:nvPr/>
+        </p:nvSpPr>
+        <p:spPr>
+          <a:xfrm>
+            <a:off x="7781544" y="1737360"/>
+            <a:ext cx="731520" cy="502920"/>
+          </a:xfrm>
+          <a:prstGeom prst="rect">
+            <a:avLst/>
+          </a:prstGeom>
+          <a:noFill/>
+          <a:ln/>
+        </p:spPr>
+        <p:txBody>
+          <a:bodyPr wrap="square" lIns="0" tIns="0" rIns="0" bIns="0" rtlCol="0" anchor="ctr"/>
+          <a:lstStyle/>
+          <a:p>
+            <a:pPr algn="ctr" indent="0" marL="0">
+              <a:buNone/>
+            </a:pPr>
+            <a:r>
+              <a:rPr lang="en-US" sz="1200" b="1" dirty="0">
+                <a:solidFill>
+                  <a:srgbClr val="4FB3BF"/>
+                </a:solidFill>
+                <a:latin typeface="Calibri" pitchFamily="34" charset="0"/>
+                <a:ea typeface="Calibri" pitchFamily="34" charset="-122"/>
+                <a:cs typeface="Calibri" pitchFamily="34" charset="-120"/>
+              </a:rPr>
+              <a:t>T3</a:t>
+            </a:r>
+            <a:endParaRPr lang="en-US" sz="1200" dirty="0"/>
+          </a:p>
+        </p:txBody>
+      </p:sp>
+      <p:sp>
+        <p:nvSpPr>
+          <p:cNvPr id="17" name="Shape 14"/>
+          <p:cNvSpPr/>
+          <p:nvPr/>
+        </p:nvSpPr>
+        <p:spPr>
+          <a:xfrm>
+            <a:off x="2606040" y="2834640"/>
+            <a:ext cx="548640" cy="201168"/>
+          </a:xfrm>
+          <a:prstGeom prst="rightArrow">
+            <a:avLst/>
+          </a:prstGeom>
+          <a:solidFill>
+            <a:srgbClr val="2E3842"/>
+          </a:solidFill>
+          <a:ln/>
+        </p:spPr>
+      </p:sp>
+      <p:sp>
+        <p:nvSpPr>
+          <p:cNvPr id="18" name="Shape 15"/>
+          <p:cNvSpPr/>
+          <p:nvPr/>
+        </p:nvSpPr>
+        <p:spPr>
+          <a:xfrm>
+            <a:off x="3291840" y="2560320"/>
+            <a:ext cx="2468880" cy="777240"/>
+          </a:xfrm>
+          <a:prstGeom prst="roundRect">
+            <a:avLst>
+              <a:gd name="adj" fmla="val 9412"/>
             </a:avLst>
           </a:prstGeom>
           <a:solidFill>
@@ -4428,89 +4232,30 @@
       </p:sp>
       <p:sp>
         <p:nvSpPr>
-          <p:cNvPr id="11" name="Shape 8"/>
-          <p:cNvSpPr/>
-          <p:nvPr/>
-        </p:nvSpPr>
-        <p:spPr>
-          <a:xfrm>
-            <a:off x="4892040" y="1828800"/>
-            <a:ext cx="384048" cy="384048"/>
-          </a:xfrm>
-          <a:prstGeom prst="ellipse">
-            <a:avLst/>
-          </a:prstGeom>
-          <a:solidFill>
-            <a:srgbClr val="F5A623"/>
-          </a:solidFill>
-          <a:ln/>
-        </p:spPr>
-      </p:sp>
-      <p:sp>
-        <p:nvSpPr>
-          <p:cNvPr id="12" name="Text 9"/>
-          <p:cNvSpPr txBox="1"/>
-          <p:nvPr/>
-        </p:nvSpPr>
-        <p:spPr>
-          <a:xfrm>
-            <a:off x="4892040" y="1828800"/>
-            <a:ext cx="384048" cy="384048"/>
-          </a:xfrm>
-          <a:prstGeom prst="rect">
-            <a:avLst/>
-          </a:prstGeom>
-          <a:noFill/>
-          <a:ln/>
-        </p:spPr>
-        <p:txBody>
-          <a:bodyPr wrap="square" lIns="0" tIns="0" rIns="0" bIns="0" rtlCol="0" anchor="ctr"/>
-          <a:lstStyle/>
-          <a:p>
-            <a:pPr algn="ctr" indent="0" marL="0">
-              <a:buNone/>
-            </a:pPr>
-            <a:r>
-              <a:rPr lang="en-US" sz="1400" b="1" dirty="0">
-                <a:solidFill>
-                  <a:srgbClr val="0F1316"/>
-                </a:solidFill>
-                <a:latin typeface="Calibri" pitchFamily="34" charset="0"/>
-                <a:ea typeface="Calibri" pitchFamily="34" charset="-122"/>
-                <a:cs typeface="Calibri" pitchFamily="34" charset="-120"/>
-              </a:rPr>
-              <a:t>2</a:t>
-            </a:r>
-            <a:endParaRPr lang="en-US" sz="1400" dirty="0"/>
-          </a:p>
-        </p:txBody>
-      </p:sp>
-      <p:sp>
-        <p:nvSpPr>
-          <p:cNvPr id="13" name="Text 10"/>
-          <p:cNvSpPr txBox="1"/>
-          <p:nvPr/>
-        </p:nvSpPr>
-        <p:spPr>
-          <a:xfrm>
-            <a:off x="5440680" y="1737360"/>
-            <a:ext cx="3108960" cy="411480"/>
-          </a:xfrm>
-          <a:prstGeom prst="rect">
-            <a:avLst/>
-          </a:prstGeom>
-          <a:noFill/>
-          <a:ln/>
-        </p:spPr>
-        <p:txBody>
-          <a:bodyPr wrap="square" lIns="0" tIns="0" rIns="0" bIns="0" rtlCol="0" anchor="ctr"/>
-          <a:lstStyle/>
-          <a:p>
-            <a:pPr indent="0" marL="0">
-              <a:buNone/>
-            </a:pPr>
-            <a:r>
-              <a:rPr lang="en-US" sz="1600" b="1" dirty="0">
+          <p:cNvPr id="19" name="Text 16"/>
+          <p:cNvSpPr txBox="1"/>
+          <p:nvPr/>
+        </p:nvSpPr>
+        <p:spPr>
+          <a:xfrm>
+            <a:off x="3474720" y="2606040"/>
+            <a:ext cx="2194560" cy="320040"/>
+          </a:xfrm>
+          <a:prstGeom prst="rect">
+            <a:avLst/>
+          </a:prstGeom>
+          <a:noFill/>
+          <a:ln/>
+        </p:spPr>
+        <p:txBody>
+          <a:bodyPr wrap="square" lIns="0" tIns="0" rIns="0" bIns="0" rtlCol="0" anchor="ctr"/>
+          <a:lstStyle/>
+          <a:p>
+            <a:pPr indent="0" marL="0">
+              <a:buNone/>
+            </a:pPr>
+            <a:r>
+              <a:rPr lang="en-US" sz="1500" b="1" dirty="0">
                 <a:solidFill>
                   <a:srgbClr val="F3F5F7"/>
                 </a:solidFill>
@@ -4518,38 +4263,38 @@
                 <a:ea typeface="Cambria" pitchFamily="34" charset="-122"/>
                 <a:cs typeface="Cambria" pitchFamily="34" charset="-120"/>
               </a:rPr>
-              <a:t>Human-in-the-loop</a:t>
-            </a:r>
-            <a:endParaRPr lang="en-US" sz="1600" dirty="0"/>
-          </a:p>
-        </p:txBody>
-      </p:sp>
-      <p:sp>
-        <p:nvSpPr>
-          <p:cNvPr id="14" name="Text 11"/>
-          <p:cNvSpPr txBox="1"/>
-          <p:nvPr/>
-        </p:nvSpPr>
-        <p:spPr>
-          <a:xfrm>
-            <a:off x="5440680" y="2148840"/>
-            <a:ext cx="3108960" cy="640080"/>
-          </a:xfrm>
-          <a:prstGeom prst="rect">
-            <a:avLst/>
-          </a:prstGeom>
-          <a:noFill/>
-          <a:ln/>
-        </p:spPr>
-        <p:txBody>
-          <a:bodyPr wrap="square" lIns="0" tIns="0" rIns="0" bIns="0" rtlCol="0" anchor="t"/>
-          <a:lstStyle/>
-          <a:p>
-            <a:pPr indent="0" marL="0">
-              <a:buNone/>
-            </a:pPr>
-            <a:r>
-              <a:rPr lang="en-US" sz="1200" dirty="0">
+              <a:t>Tools</a:t>
+            </a:r>
+            <a:endParaRPr lang="en-US" sz="1500" dirty="0"/>
+          </a:p>
+        </p:txBody>
+      </p:sp>
+      <p:sp>
+        <p:nvSpPr>
+          <p:cNvPr id="20" name="Text 17"/>
+          <p:cNvSpPr txBox="1"/>
+          <p:nvPr/>
+        </p:nvSpPr>
+        <p:spPr>
+          <a:xfrm>
+            <a:off x="3474720" y="2926080"/>
+            <a:ext cx="2194560" cy="365760"/>
+          </a:xfrm>
+          <a:prstGeom prst="rect">
+            <a:avLst/>
+          </a:prstGeom>
+          <a:noFill/>
+          <a:ln/>
+        </p:spPr>
+        <p:txBody>
+          <a:bodyPr wrap="square" lIns="0" tIns="0" rIns="0" bIns="0" rtlCol="0" anchor="ctr"/>
+          <a:lstStyle/>
+          <a:p>
+            <a:pPr indent="0" marL="0">
+              <a:buNone/>
+            </a:pPr>
+            <a:r>
+              <a:rPr lang="en-US" sz="1100" dirty="0">
                 <a:solidFill>
                   <a:srgbClr val="9AA6B2"/>
                 </a:solidFill>
@@ -4557,26 +4302,244 @@
                 <a:ea typeface="Calibri" pitchFamily="34" charset="-122"/>
                 <a:cs typeface="Calibri" pitchFamily="34" charset="-120"/>
               </a:rPr>
-              <a:t>irreversible or high-value actions pause for a person — by design, not by prompt</a:t>
-            </a:r>
-            <a:endParaRPr lang="en-US" sz="1200" dirty="0"/>
-          </a:p>
-        </p:txBody>
-      </p:sp>
-      <p:sp>
-        <p:nvSpPr>
-          <p:cNvPr id="15" name="Shape 12"/>
+              <a:t>tenant-scoped credentials on every call</a:t>
+            </a:r>
+            <a:endParaRPr lang="en-US" sz="1100" dirty="0"/>
+          </a:p>
+        </p:txBody>
+      </p:sp>
+      <p:sp>
+        <p:nvSpPr>
+          <p:cNvPr id="21" name="Shape 18"/>
           <p:cNvSpPr/>
           <p:nvPr/>
         </p:nvSpPr>
         <p:spPr>
           <a:xfrm>
-            <a:off x="457200" y="3017520"/>
-            <a:ext cx="4023360" cy="1234440"/>
+            <a:off x="5989320" y="2697480"/>
+            <a:ext cx="731520" cy="502920"/>
           </a:xfrm>
           <a:prstGeom prst="roundRect">
             <a:avLst>
-              <a:gd name="adj" fmla="val 5926"/>
+              <a:gd name="adj" fmla="val 10909"/>
+            </a:avLst>
+          </a:prstGeom>
+          <a:solidFill>
+            <a:srgbClr val="0F1316"/>
+          </a:solidFill>
+          <a:ln w="12700">
+            <a:solidFill>
+              <a:srgbClr val="4FB3BF"/>
+            </a:solidFill>
+            <a:prstDash val="solid"/>
+          </a:ln>
+        </p:spPr>
+      </p:sp>
+      <p:sp>
+        <p:nvSpPr>
+          <p:cNvPr id="22" name="Text 19"/>
+          <p:cNvSpPr txBox="1"/>
+          <p:nvPr/>
+        </p:nvSpPr>
+        <p:spPr>
+          <a:xfrm>
+            <a:off x="5989320" y="2697480"/>
+            <a:ext cx="731520" cy="502920"/>
+          </a:xfrm>
+          <a:prstGeom prst="rect">
+            <a:avLst/>
+          </a:prstGeom>
+          <a:noFill/>
+          <a:ln/>
+        </p:spPr>
+        <p:txBody>
+          <a:bodyPr wrap="square" lIns="0" tIns="0" rIns="0" bIns="0" rtlCol="0" anchor="ctr"/>
+          <a:lstStyle/>
+          <a:p>
+            <a:pPr algn="ctr" indent="0" marL="0">
+              <a:buNone/>
+            </a:pPr>
+            <a:r>
+              <a:rPr lang="en-US" sz="1200" b="1" dirty="0">
+                <a:solidFill>
+                  <a:srgbClr val="4FB3BF"/>
+                </a:solidFill>
+                <a:latin typeface="Calibri" pitchFamily="34" charset="0"/>
+                <a:ea typeface="Calibri" pitchFamily="34" charset="-122"/>
+                <a:cs typeface="Calibri" pitchFamily="34" charset="-120"/>
+              </a:rPr>
+              <a:t>T1</a:t>
+            </a:r>
+            <a:endParaRPr lang="en-US" sz="1200" dirty="0"/>
+          </a:p>
+        </p:txBody>
+      </p:sp>
+      <p:sp>
+        <p:nvSpPr>
+          <p:cNvPr id="23" name="Shape 20"/>
+          <p:cNvSpPr/>
+          <p:nvPr/>
+        </p:nvSpPr>
+        <p:spPr>
+          <a:xfrm>
+            <a:off x="6885432" y="2697480"/>
+            <a:ext cx="731520" cy="502920"/>
+          </a:xfrm>
+          <a:prstGeom prst="roundRect">
+            <a:avLst>
+              <a:gd name="adj" fmla="val 10909"/>
+            </a:avLst>
+          </a:prstGeom>
+          <a:solidFill>
+            <a:srgbClr val="0F1316"/>
+          </a:solidFill>
+          <a:ln w="12700">
+            <a:solidFill>
+              <a:srgbClr val="4FB3BF"/>
+            </a:solidFill>
+            <a:prstDash val="solid"/>
+          </a:ln>
+        </p:spPr>
+      </p:sp>
+      <p:sp>
+        <p:nvSpPr>
+          <p:cNvPr id="24" name="Text 21"/>
+          <p:cNvSpPr txBox="1"/>
+          <p:nvPr/>
+        </p:nvSpPr>
+        <p:spPr>
+          <a:xfrm>
+            <a:off x="6885432" y="2697480"/>
+            <a:ext cx="731520" cy="502920"/>
+          </a:xfrm>
+          <a:prstGeom prst="rect">
+            <a:avLst/>
+          </a:prstGeom>
+          <a:noFill/>
+          <a:ln/>
+        </p:spPr>
+        <p:txBody>
+          <a:bodyPr wrap="square" lIns="0" tIns="0" rIns="0" bIns="0" rtlCol="0" anchor="ctr"/>
+          <a:lstStyle/>
+          <a:p>
+            <a:pPr algn="ctr" indent="0" marL="0">
+              <a:buNone/>
+            </a:pPr>
+            <a:r>
+              <a:rPr lang="en-US" sz="1200" b="1" dirty="0">
+                <a:solidFill>
+                  <a:srgbClr val="4FB3BF"/>
+                </a:solidFill>
+                <a:latin typeface="Calibri" pitchFamily="34" charset="0"/>
+                <a:ea typeface="Calibri" pitchFamily="34" charset="-122"/>
+                <a:cs typeface="Calibri" pitchFamily="34" charset="-120"/>
+              </a:rPr>
+              <a:t>T2</a:t>
+            </a:r>
+            <a:endParaRPr lang="en-US" sz="1200" dirty="0"/>
+          </a:p>
+        </p:txBody>
+      </p:sp>
+      <p:sp>
+        <p:nvSpPr>
+          <p:cNvPr id="25" name="Shape 22"/>
+          <p:cNvSpPr/>
+          <p:nvPr/>
+        </p:nvSpPr>
+        <p:spPr>
+          <a:xfrm>
+            <a:off x="7781544" y="2697480"/>
+            <a:ext cx="731520" cy="502920"/>
+          </a:xfrm>
+          <a:prstGeom prst="roundRect">
+            <a:avLst>
+              <a:gd name="adj" fmla="val 10909"/>
+            </a:avLst>
+          </a:prstGeom>
+          <a:solidFill>
+            <a:srgbClr val="0F1316"/>
+          </a:solidFill>
+          <a:ln w="12700">
+            <a:solidFill>
+              <a:srgbClr val="4FB3BF"/>
+            </a:solidFill>
+            <a:prstDash val="solid"/>
+          </a:ln>
+        </p:spPr>
+      </p:sp>
+      <p:sp>
+        <p:nvSpPr>
+          <p:cNvPr id="26" name="Text 23"/>
+          <p:cNvSpPr txBox="1"/>
+          <p:nvPr/>
+        </p:nvSpPr>
+        <p:spPr>
+          <a:xfrm>
+            <a:off x="7781544" y="2697480"/>
+            <a:ext cx="731520" cy="502920"/>
+          </a:xfrm>
+          <a:prstGeom prst="rect">
+            <a:avLst/>
+          </a:prstGeom>
+          <a:noFill/>
+          <a:ln/>
+        </p:spPr>
+        <p:txBody>
+          <a:bodyPr wrap="square" lIns="0" tIns="0" rIns="0" bIns="0" rtlCol="0" anchor="ctr"/>
+          <a:lstStyle/>
+          <a:p>
+            <a:pPr algn="ctr" indent="0" marL="0">
+              <a:buNone/>
+            </a:pPr>
+            <a:r>
+              <a:rPr lang="en-US" sz="1200" b="1" dirty="0">
+                <a:solidFill>
+                  <a:srgbClr val="4FB3BF"/>
+                </a:solidFill>
+                <a:latin typeface="Calibri" pitchFamily="34" charset="0"/>
+                <a:ea typeface="Calibri" pitchFamily="34" charset="-122"/>
+                <a:cs typeface="Calibri" pitchFamily="34" charset="-120"/>
+              </a:rPr>
+              <a:t>T3</a:t>
+            </a:r>
+            <a:endParaRPr lang="en-US" sz="1200" dirty="0"/>
+          </a:p>
+        </p:txBody>
+      </p:sp>
+      <p:sp>
+        <p:nvSpPr>
+          <p:cNvPr id="27" name="Shape 24"/>
+          <p:cNvSpPr/>
+          <p:nvPr/>
+        </p:nvSpPr>
+        <p:spPr>
+          <a:xfrm>
+            <a:off x="2606040" y="3794760"/>
+            <a:ext cx="548640" cy="201168"/>
+          </a:xfrm>
+          <a:prstGeom prst="rightArrow">
+            <a:avLst/>
+          </a:prstGeom>
+          <a:solidFill>
+            <a:srgbClr val="2E3842"/>
+          </a:solidFill>
+          <a:ln/>
+        </p:spPr>
+      </p:sp>
+      <p:sp>
+        <p:nvSpPr>
+          <p:cNvPr id="28" name="Shape 25"/>
+          <p:cNvSpPr/>
+          <p:nvPr/>
+        </p:nvSpPr>
+        <p:spPr>
+          <a:xfrm>
+            <a:off x="3291840" y="3520440"/>
+            <a:ext cx="2468880" cy="777240"/>
+          </a:xfrm>
+          <a:prstGeom prst="roundRect">
+            <a:avLst>
+              <a:gd name="adj" fmla="val 9412"/>
             </a:avLst>
           </a:prstGeom>
           <a:solidFill>
@@ -4592,89 +4555,30 @@
       </p:sp>
       <p:sp>
         <p:nvSpPr>
-          <p:cNvPr id="16" name="Shape 13"/>
-          <p:cNvSpPr/>
-          <p:nvPr/>
-        </p:nvSpPr>
-        <p:spPr>
-          <a:xfrm>
-            <a:off x="685800" y="3246120"/>
-            <a:ext cx="384048" cy="384048"/>
-          </a:xfrm>
-          <a:prstGeom prst="ellipse">
-            <a:avLst/>
-          </a:prstGeom>
-          <a:solidFill>
-            <a:srgbClr val="F5A623"/>
-          </a:solidFill>
-          <a:ln/>
-        </p:spPr>
-      </p:sp>
-      <p:sp>
-        <p:nvSpPr>
-          <p:cNvPr id="17" name="Text 14"/>
-          <p:cNvSpPr txBox="1"/>
-          <p:nvPr/>
-        </p:nvSpPr>
-        <p:spPr>
-          <a:xfrm>
-            <a:off x="685800" y="3246120"/>
-            <a:ext cx="384048" cy="384048"/>
-          </a:xfrm>
-          <a:prstGeom prst="rect">
-            <a:avLst/>
-          </a:prstGeom>
-          <a:noFill/>
-          <a:ln/>
-        </p:spPr>
-        <p:txBody>
-          <a:bodyPr wrap="square" lIns="0" tIns="0" rIns="0" bIns="0" rtlCol="0" anchor="ctr"/>
-          <a:lstStyle/>
-          <a:p>
-            <a:pPr algn="ctr" indent="0" marL="0">
-              <a:buNone/>
-            </a:pPr>
-            <a:r>
-              <a:rPr lang="en-US" sz="1400" b="1" dirty="0">
-                <a:solidFill>
-                  <a:srgbClr val="0F1316"/>
-                </a:solidFill>
-                <a:latin typeface="Calibri" pitchFamily="34" charset="0"/>
-                <a:ea typeface="Calibri" pitchFamily="34" charset="-122"/>
-                <a:cs typeface="Calibri" pitchFamily="34" charset="-120"/>
-              </a:rPr>
-              <a:t>3</a:t>
-            </a:r>
-            <a:endParaRPr lang="en-US" sz="1400" dirty="0"/>
-          </a:p>
-        </p:txBody>
-      </p:sp>
-      <p:sp>
-        <p:nvSpPr>
-          <p:cNvPr id="18" name="Text 15"/>
-          <p:cNvSpPr txBox="1"/>
-          <p:nvPr/>
-        </p:nvSpPr>
-        <p:spPr>
-          <a:xfrm>
-            <a:off x="1234440" y="3154680"/>
-            <a:ext cx="3108960" cy="411480"/>
-          </a:xfrm>
-          <a:prstGeom prst="rect">
-            <a:avLst/>
-          </a:prstGeom>
-          <a:noFill/>
-          <a:ln/>
-        </p:spPr>
-        <p:txBody>
-          <a:bodyPr wrap="square" lIns="0" tIns="0" rIns="0" bIns="0" rtlCol="0" anchor="ctr"/>
-          <a:lstStyle/>
-          <a:p>
-            <a:pPr indent="0" marL="0">
-              <a:buNone/>
-            </a:pPr>
-            <a:r>
-              <a:rPr lang="en-US" sz="1600" b="1" dirty="0">
+          <p:cNvPr id="29" name="Text 26"/>
+          <p:cNvSpPr txBox="1"/>
+          <p:nvPr/>
+        </p:nvSpPr>
+        <p:spPr>
+          <a:xfrm>
+            <a:off x="3474720" y="3566160"/>
+            <a:ext cx="2194560" cy="320040"/>
+          </a:xfrm>
+          <a:prstGeom prst="rect">
+            <a:avLst/>
+          </a:prstGeom>
+          <a:noFill/>
+          <a:ln/>
+        </p:spPr>
+        <p:txBody>
+          <a:bodyPr wrap="square" lIns="0" tIns="0" rIns="0" bIns="0" rtlCol="0" anchor="ctr"/>
+          <a:lstStyle/>
+          <a:p>
+            <a:pPr indent="0" marL="0">
+              <a:buNone/>
+            </a:pPr>
+            <a:r>
+              <a:rPr lang="en-US" sz="1500" b="1" dirty="0">
                 <a:solidFill>
                   <a:srgbClr val="F3F5F7"/>
                 </a:solidFill>
@@ -4682,38 +4586,38 @@
                 <a:ea typeface="Cambria" pitchFamily="34" charset="-122"/>
                 <a:cs typeface="Cambria" pitchFamily="34" charset="-120"/>
               </a:rPr>
-              <a:t>Caps on steps, cost, time</a:t>
-            </a:r>
-            <a:endParaRPr lang="en-US" sz="1600" dirty="0"/>
-          </a:p>
-        </p:txBody>
-      </p:sp>
-      <p:sp>
-        <p:nvSpPr>
-          <p:cNvPr id="19" name="Text 16"/>
-          <p:cNvSpPr txBox="1"/>
-          <p:nvPr/>
-        </p:nvSpPr>
-        <p:spPr>
-          <a:xfrm>
-            <a:off x="1234440" y="3566160"/>
-            <a:ext cx="3108960" cy="640080"/>
-          </a:xfrm>
-          <a:prstGeom prst="rect">
-            <a:avLst/>
-          </a:prstGeom>
-          <a:noFill/>
-          <a:ln/>
-        </p:spPr>
-        <p:txBody>
-          <a:bodyPr wrap="square" lIns="0" tIns="0" rIns="0" bIns="0" rtlCol="0" anchor="t"/>
-          <a:lstStyle/>
-          <a:p>
-            <a:pPr indent="0" marL="0">
-              <a:buNone/>
-            </a:pPr>
-            <a:r>
-              <a:rPr lang="en-US" sz="1200" dirty="0">
+              <a:t>Retrieval</a:t>
+            </a:r>
+            <a:endParaRPr lang="en-US" sz="1500" dirty="0"/>
+          </a:p>
+        </p:txBody>
+      </p:sp>
+      <p:sp>
+        <p:nvSpPr>
+          <p:cNvPr id="30" name="Text 27"/>
+          <p:cNvSpPr txBox="1"/>
+          <p:nvPr/>
+        </p:nvSpPr>
+        <p:spPr>
+          <a:xfrm>
+            <a:off x="3474720" y="3886200"/>
+            <a:ext cx="2194560" cy="365760"/>
+          </a:xfrm>
+          <a:prstGeom prst="rect">
+            <a:avLst/>
+          </a:prstGeom>
+          <a:noFill/>
+          <a:ln/>
+        </p:spPr>
+        <p:txBody>
+          <a:bodyPr wrap="square" lIns="0" tIns="0" rIns="0" bIns="0" rtlCol="0" anchor="ctr"/>
+          <a:lstStyle/>
+          <a:p>
+            <a:pPr indent="0" marL="0">
+              <a:buNone/>
+            </a:pPr>
+            <a:r>
+              <a:rPr lang="en-US" sz="1100" dirty="0">
                 <a:solidFill>
                   <a:srgbClr val="9AA6B2"/>
                 </a:solidFill>
@@ -4721,34 +4625,34 @@
                 <a:ea typeface="Calibri" pitchFamily="34" charset="-122"/>
                 <a:cs typeface="Calibri" pitchFamily="34" charset="-120"/>
               </a:rPr>
-              <a:t>a runaway loop is a budget incident; the cap is the circuit breaker</a:t>
-            </a:r>
-            <a:endParaRPr lang="en-US" sz="1200" dirty="0"/>
-          </a:p>
-        </p:txBody>
-      </p:sp>
-      <p:sp>
-        <p:nvSpPr>
-          <p:cNvPr id="20" name="Shape 17"/>
+              <a:t>index partitioned, filtered before ranking</a:t>
+            </a:r>
+            <a:endParaRPr lang="en-US" sz="1100" dirty="0"/>
+          </a:p>
+        </p:txBody>
+      </p:sp>
+      <p:sp>
+        <p:nvSpPr>
+          <p:cNvPr id="31" name="Shape 28"/>
           <p:cNvSpPr/>
           <p:nvPr/>
         </p:nvSpPr>
         <p:spPr>
           <a:xfrm>
-            <a:off x="4663440" y="3017520"/>
-            <a:ext cx="4023360" cy="1234440"/>
+            <a:off x="5989320" y="3657600"/>
+            <a:ext cx="731520" cy="502920"/>
           </a:xfrm>
           <a:prstGeom prst="roundRect">
             <a:avLst>
-              <a:gd name="adj" fmla="val 5926"/>
+              <a:gd name="adj" fmla="val 10909"/>
             </a:avLst>
           </a:prstGeom>
           <a:solidFill>
-            <a:srgbClr val="1B2127"/>
+            <a:srgbClr val="0F1316"/>
           </a:solidFill>
-          <a:ln w="9525">
+          <a:ln w="12700">
             <a:solidFill>
-              <a:srgbClr val="2E3842"/>
+              <a:srgbClr val="4FB3BF"/>
             </a:solidFill>
             <a:prstDash val="solid"/>
           </a:ln>
@@ -4756,34 +4660,80 @@
       </p:sp>
       <p:sp>
         <p:nvSpPr>
-          <p:cNvPr id="21" name="Shape 18"/>
+          <p:cNvPr id="32" name="Text 29"/>
+          <p:cNvSpPr txBox="1"/>
+          <p:nvPr/>
+        </p:nvSpPr>
+        <p:spPr>
+          <a:xfrm>
+            <a:off x="5989320" y="3657600"/>
+            <a:ext cx="731520" cy="502920"/>
+          </a:xfrm>
+          <a:prstGeom prst="rect">
+            <a:avLst/>
+          </a:prstGeom>
+          <a:noFill/>
+          <a:ln/>
+        </p:spPr>
+        <p:txBody>
+          <a:bodyPr wrap="square" lIns="0" tIns="0" rIns="0" bIns="0" rtlCol="0" anchor="ctr"/>
+          <a:lstStyle/>
+          <a:p>
+            <a:pPr algn="ctr" indent="0" marL="0">
+              <a:buNone/>
+            </a:pPr>
+            <a:r>
+              <a:rPr lang="en-US" sz="1200" b="1" dirty="0">
+                <a:solidFill>
+                  <a:srgbClr val="4FB3BF"/>
+                </a:solidFill>
+                <a:latin typeface="Calibri" pitchFamily="34" charset="0"/>
+                <a:ea typeface="Calibri" pitchFamily="34" charset="-122"/>
+                <a:cs typeface="Calibri" pitchFamily="34" charset="-120"/>
+              </a:rPr>
+              <a:t>T1</a:t>
+            </a:r>
+            <a:endParaRPr lang="en-US" sz="1200" dirty="0"/>
+          </a:p>
+        </p:txBody>
+      </p:sp>
+      <p:sp>
+        <p:nvSpPr>
+          <p:cNvPr id="33" name="Shape 30"/>
           <p:cNvSpPr/>
           <p:nvPr/>
         </p:nvSpPr>
         <p:spPr>
           <a:xfrm>
-            <a:off x="4892040" y="3246120"/>
-            <a:ext cx="384048" cy="384048"/>
-          </a:xfrm>
-          <a:prstGeom prst="ellipse">
-            <a:avLst/>
+            <a:off x="6885432" y="3657600"/>
+            <a:ext cx="731520" cy="502920"/>
+          </a:xfrm>
+          <a:prstGeom prst="roundRect">
+            <a:avLst>
+              <a:gd name="adj" fmla="val 10909"/>
+            </a:avLst>
           </a:prstGeom>
           <a:solidFill>
-            <a:srgbClr val="F5A623"/>
+            <a:srgbClr val="0F1316"/>
           </a:solidFill>
-          <a:ln/>
-        </p:spPr>
-      </p:sp>
-      <p:sp>
-        <p:nvSpPr>
-          <p:cNvPr id="22" name="Text 19"/>
-          <p:cNvSpPr txBox="1"/>
-          <p:nvPr/>
-        </p:nvSpPr>
-        <p:spPr>
-          <a:xfrm>
-            <a:off x="4892040" y="3246120"/>
-            <a:ext cx="384048" cy="384048"/>
+          <a:ln w="12700">
+            <a:solidFill>
+              <a:srgbClr val="4FB3BF"/>
+            </a:solidFill>
+            <a:prstDash val="solid"/>
+          </a:ln>
+        </p:spPr>
+      </p:sp>
+      <p:sp>
+        <p:nvSpPr>
+          <p:cNvPr id="34" name="Text 31"/>
+          <p:cNvSpPr txBox="1"/>
+          <p:nvPr/>
+        </p:nvSpPr>
+        <p:spPr>
+          <a:xfrm>
+            <a:off x="6885432" y="3657600"/>
+            <a:ext cx="731520" cy="502920"/>
           </a:xfrm>
           <a:prstGeom prst="rect">
             <a:avLst/>
@@ -4799,93 +4749,15 @@
               <a:buNone/>
             </a:pPr>
             <a:r>
-              <a:rPr lang="en-US" sz="1400" b="1" dirty="0">
-                <a:solidFill>
-                  <a:srgbClr val="0F1316"/>
-                </a:solidFill>
-                <a:latin typeface="Calibri" pitchFamily="34" charset="0"/>
-                <a:ea typeface="Calibri" pitchFamily="34" charset="-122"/>
-                <a:cs typeface="Calibri" pitchFamily="34" charset="-120"/>
-              </a:rPr>
-              <a:t>4</a:t>
-            </a:r>
-            <a:endParaRPr lang="en-US" sz="1400" dirty="0"/>
-          </a:p>
-        </p:txBody>
-      </p:sp>
-      <p:sp>
-        <p:nvSpPr>
-          <p:cNvPr id="23" name="Text 20"/>
-          <p:cNvSpPr txBox="1"/>
-          <p:nvPr/>
-        </p:nvSpPr>
-        <p:spPr>
-          <a:xfrm>
-            <a:off x="5440680" y="3154680"/>
-            <a:ext cx="3108960" cy="411480"/>
-          </a:xfrm>
-          <a:prstGeom prst="rect">
-            <a:avLst/>
-          </a:prstGeom>
-          <a:noFill/>
-          <a:ln/>
-        </p:spPr>
-        <p:txBody>
-          <a:bodyPr wrap="square" lIns="0" tIns="0" rIns="0" bIns="0" rtlCol="0" anchor="ctr"/>
-          <a:lstStyle/>
-          <a:p>
-            <a:pPr indent="0" marL="0">
-              <a:buNone/>
-            </a:pPr>
-            <a:r>
-              <a:rPr lang="en-US" sz="1600" b="1" dirty="0">
-                <a:solidFill>
-                  <a:srgbClr val="F3F5F7"/>
-                </a:solidFill>
-                <a:latin typeface="Cambria" pitchFamily="34" charset="0"/>
-                <a:ea typeface="Cambria" pitchFamily="34" charset="-122"/>
-                <a:cs typeface="Cambria" pitchFamily="34" charset="-120"/>
-              </a:rPr>
-              <a:t>Evals before release</a:t>
-            </a:r>
-            <a:endParaRPr lang="en-US" sz="1600" dirty="0"/>
-          </a:p>
-        </p:txBody>
-      </p:sp>
-      <p:sp>
-        <p:nvSpPr>
-          <p:cNvPr id="24" name="Text 21"/>
-          <p:cNvSpPr txBox="1"/>
-          <p:nvPr/>
-        </p:nvSpPr>
-        <p:spPr>
-          <a:xfrm>
-            <a:off x="5440680" y="3566160"/>
-            <a:ext cx="3108960" cy="640080"/>
-          </a:xfrm>
-          <a:prstGeom prst="rect">
-            <a:avLst/>
-          </a:prstGeom>
-          <a:noFill/>
-          <a:ln/>
-        </p:spPr>
-        <p:txBody>
-          <a:bodyPr wrap="square" lIns="0" tIns="0" rIns="0" bIns="0" rtlCol="0" anchor="t"/>
-          <a:lstStyle/>
-          <a:p>
-            <a:pPr indent="0" marL="0">
-              <a:buNone/>
-            </a:pPr>
-            <a:r>
-              <a:rPr lang="en-US" sz="1200" dirty="0">
-                <a:solidFill>
-                  <a:srgbClr val="9AA6B2"/>
-                </a:solidFill>
-                <a:latin typeface="Calibri" pitchFamily="34" charset="0"/>
-                <a:ea typeface="Calibri" pitchFamily="34" charset="-122"/>
-                <a:cs typeface="Calibri" pitchFamily="34" charset="-120"/>
-              </a:rPr>
-              <a:t>a test set of real tasks, scored, run on every change — like any other software</a:t>
+              <a:rPr lang="en-US" sz="1200" b="1" dirty="0">
+                <a:solidFill>
+                  <a:srgbClr val="4FB3BF"/>
+                </a:solidFill>
+                <a:latin typeface="Calibri" pitchFamily="34" charset="0"/>
+                <a:ea typeface="Calibri" pitchFamily="34" charset="-122"/>
+                <a:cs typeface="Calibri" pitchFamily="34" charset="-120"/>
+              </a:rPr>
+              <a:t>T2</a:t>
             </a:r>
             <a:endParaRPr lang="en-US" sz="1200" dirty="0"/>
           </a:p>
@@ -4893,7 +4765,112 @@
       </p:sp>
       <p:sp>
         <p:nvSpPr>
-          <p:cNvPr id="25" name="Text 22"/>
+          <p:cNvPr id="35" name="Shape 32"/>
+          <p:cNvSpPr/>
+          <p:nvPr/>
+        </p:nvSpPr>
+        <p:spPr>
+          <a:xfrm>
+            <a:off x="7781544" y="3657600"/>
+            <a:ext cx="731520" cy="502920"/>
+          </a:xfrm>
+          <a:prstGeom prst="roundRect">
+            <a:avLst>
+              <a:gd name="adj" fmla="val 10909"/>
+            </a:avLst>
+          </a:prstGeom>
+          <a:solidFill>
+            <a:srgbClr val="0F1316"/>
+          </a:solidFill>
+          <a:ln w="12700">
+            <a:solidFill>
+              <a:srgbClr val="4FB3BF"/>
+            </a:solidFill>
+            <a:prstDash val="solid"/>
+          </a:ln>
+        </p:spPr>
+      </p:sp>
+      <p:sp>
+        <p:nvSpPr>
+          <p:cNvPr id="36" name="Text 33"/>
+          <p:cNvSpPr txBox="1"/>
+          <p:nvPr/>
+        </p:nvSpPr>
+        <p:spPr>
+          <a:xfrm>
+            <a:off x="7781544" y="3657600"/>
+            <a:ext cx="731520" cy="502920"/>
+          </a:xfrm>
+          <a:prstGeom prst="rect">
+            <a:avLst/>
+          </a:prstGeom>
+          <a:noFill/>
+          <a:ln/>
+        </p:spPr>
+        <p:txBody>
+          <a:bodyPr wrap="square" lIns="0" tIns="0" rIns="0" bIns="0" rtlCol="0" anchor="ctr"/>
+          <a:lstStyle/>
+          <a:p>
+            <a:pPr algn="ctr" indent="0" marL="0">
+              <a:buNone/>
+            </a:pPr>
+            <a:r>
+              <a:rPr lang="en-US" sz="1200" b="1" dirty="0">
+                <a:solidFill>
+                  <a:srgbClr val="4FB3BF"/>
+                </a:solidFill>
+                <a:latin typeface="Calibri" pitchFamily="34" charset="0"/>
+                <a:ea typeface="Calibri" pitchFamily="34" charset="-122"/>
+                <a:cs typeface="Calibri" pitchFamily="34" charset="-120"/>
+              </a:rPr>
+              <a:t>T3</a:t>
+            </a:r>
+            <a:endParaRPr lang="en-US" sz="1200" dirty="0"/>
+          </a:p>
+        </p:txBody>
+      </p:sp>
+      <p:sp>
+        <p:nvSpPr>
+          <p:cNvPr id="37" name="Text 34"/>
+          <p:cNvSpPr txBox="1"/>
+          <p:nvPr/>
+        </p:nvSpPr>
+        <p:spPr>
+          <a:xfrm>
+            <a:off x="5989320" y="1280160"/>
+            <a:ext cx="2743200" cy="274320"/>
+          </a:xfrm>
+          <a:prstGeom prst="rect">
+            <a:avLst/>
+          </a:prstGeom>
+          <a:noFill/>
+          <a:ln/>
+        </p:spPr>
+        <p:txBody>
+          <a:bodyPr wrap="square" lIns="0" tIns="0" rIns="0" bIns="0" rtlCol="0" anchor="ctr"/>
+          <a:lstStyle/>
+          <a:p>
+            <a:pPr indent="0" marL="0">
+              <a:buNone/>
+            </a:pPr>
+            <a:r>
+              <a:rPr lang="en-US" sz="1000" spc="200" kern="0" dirty="0">
+                <a:solidFill>
+                  <a:srgbClr val="4FB3BF"/>
+                </a:solidFill>
+                <a:latin typeface="Calibri" pitchFamily="34" charset="0"/>
+                <a:ea typeface="Calibri" pitchFamily="34" charset="-122"/>
+                <a:cs typeface="Calibri" pitchFamily="34" charset="-120"/>
+              </a:rPr>
+              <a:t>ISOLATED TENANTS</a:t>
+            </a:r>
+            <a:endParaRPr lang="en-US" sz="1000" dirty="0"/>
+          </a:p>
+        </p:txBody>
+      </p:sp>
+      <p:sp>
+        <p:nvSpPr>
+          <p:cNvPr id="38" name="Text 35"/>
           <p:cNvSpPr txBox="1"/>
           <p:nvPr/>
         </p:nvSpPr>
@@ -4924,7 +4901,7 @@
                 <a:ea typeface="Calibri" pitchFamily="34" charset="-122"/>
                 <a:cs typeface="Calibri" pitchFamily="34" charset="-120"/>
               </a:rPr>
-              <a:t>Episodes 9, 10, 18 and 25 cover each of these in depth</a:t>
+              <a:t>Get one lane wrong and you've built a data leak with a chat window.</a:t>
             </a:r>
             <a:endParaRPr lang="en-US" sz="1000" dirty="0"/>
           </a:p>
@@ -4970,24 +4947,63 @@
         </p:nvSpPr>
         <p:spPr>
           <a:xfrm>
-            <a:off x="457200" y="320040"/>
-            <a:ext cx="8229600" cy="731520"/>
-          </a:xfrm>
-          <a:prstGeom prst="rect">
-            <a:avLst/>
-          </a:prstGeom>
-          <a:noFill/>
-          <a:ln/>
-        </p:spPr>
-        <p:txBody>
-          <a:bodyPr wrap="square" lIns="0" tIns="0" rIns="0" bIns="0" rtlCol="0" anchor="ctr"/>
-          <a:lstStyle/>
-          <a:p>
-            <a:pPr indent="0" marL="0">
-              <a:buNone/>
-            </a:pPr>
-            <a:r>
-              <a:rPr lang="en-US" sz="3000" b="1" dirty="0">
+            <a:off x="457200" y="411480"/>
+            <a:ext cx="5486400" cy="274320"/>
+          </a:xfrm>
+          <a:prstGeom prst="rect">
+            <a:avLst/>
+          </a:prstGeom>
+          <a:noFill/>
+          <a:ln/>
+        </p:spPr>
+        <p:txBody>
+          <a:bodyPr wrap="square" lIns="0" tIns="0" rIns="0" bIns="0" rtlCol="0" anchor="ctr"/>
+          <a:lstStyle/>
+          <a:p>
+            <a:pPr indent="0" marL="0">
+              <a:buNone/>
+            </a:pPr>
+            <a:r>
+              <a:rPr lang="en-US" sz="1100" spc="300" kern="0" dirty="0">
+                <a:solidFill>
+                  <a:srgbClr val="F5A623"/>
+                </a:solidFill>
+                <a:latin typeface="Calibri" pitchFamily="34" charset="0"/>
+                <a:ea typeface="Calibri" pitchFamily="34" charset="-122"/>
+                <a:cs typeface="Calibri" pitchFamily="34" charset="-120"/>
+              </a:rPr>
+              <a:t>WHAT BREAKS IN THE ENTERPRISE · 3 OF 3</a:t>
+            </a:r>
+            <a:endParaRPr lang="en-US" sz="1100" dirty="0"/>
+          </a:p>
+        </p:txBody>
+      </p:sp>
+      <p:sp>
+        <p:nvSpPr>
+          <p:cNvPr id="4" name="Text 1"/>
+          <p:cNvSpPr txBox="1"/>
+          <p:nvPr/>
+        </p:nvSpPr>
+        <p:spPr>
+          <a:xfrm>
+            <a:off x="457200" y="731520"/>
+            <a:ext cx="8229600" cy="640080"/>
+          </a:xfrm>
+          <a:prstGeom prst="rect">
+            <a:avLst/>
+          </a:prstGeom>
+          <a:noFill/>
+          <a:ln/>
+        </p:spPr>
+        <p:txBody>
+          <a:bodyPr wrap="square" lIns="0" tIns="0" rIns="0" bIns="0" rtlCol="0" anchor="ctr"/>
+          <a:lstStyle/>
+          <a:p>
+            <a:pPr indent="0" marL="0">
+              <a:buNone/>
+            </a:pPr>
+            <a:r>
+              <a:rPr lang="en-US" sz="2800" b="1" dirty="0">
                 <a:solidFill>
                   <a:srgbClr val="F3F5F7"/>
                 </a:solidFill>
@@ -4995,264 +5011,30 @@
                 <a:ea typeface="Cambria" pitchFamily="34" charset="-122"/>
                 <a:cs typeface="Cambria" pitchFamily="34" charset="-120"/>
               </a:rPr>
-              <a:t>Recap</a:t>
-            </a:r>
-            <a:endParaRPr lang="en-US" sz="3000" dirty="0"/>
-          </a:p>
-        </p:txBody>
-      </p:sp>
-      <p:sp>
-        <p:nvSpPr>
-          <p:cNvPr id="4" name="Text 1"/>
-          <p:cNvSpPr txBox="1"/>
-          <p:nvPr/>
-        </p:nvSpPr>
-        <p:spPr>
-          <a:xfrm>
-            <a:off x="457200" y="1234440"/>
-            <a:ext cx="2011680" cy="548640"/>
-          </a:xfrm>
-          <a:prstGeom prst="rect">
-            <a:avLst/>
-          </a:prstGeom>
-          <a:noFill/>
-          <a:ln/>
-        </p:spPr>
-        <p:txBody>
-          <a:bodyPr wrap="square" lIns="0" tIns="0" rIns="0" bIns="0" rtlCol="0" anchor="ctr"/>
-          <a:lstStyle/>
-          <a:p>
-            <a:pPr indent="0" marL="0">
-              <a:buNone/>
-            </a:pPr>
-            <a:r>
-              <a:rPr lang="en-US" sz="2000" b="1" dirty="0">
-                <a:solidFill>
-                  <a:srgbClr val="F5A623"/>
-                </a:solidFill>
-                <a:latin typeface="Cambria" pitchFamily="34" charset="0"/>
-                <a:ea typeface="Cambria" pitchFamily="34" charset="-122"/>
-                <a:cs typeface="Cambria" pitchFamily="34" charset="-120"/>
-              </a:rPr>
-              <a:t>Agent =</a:t>
-            </a:r>
-            <a:endParaRPr lang="en-US" sz="2000" dirty="0"/>
-          </a:p>
-        </p:txBody>
-      </p:sp>
-      <p:sp>
-        <p:nvSpPr>
-          <p:cNvPr id="5" name="Text 2"/>
-          <p:cNvSpPr txBox="1"/>
-          <p:nvPr/>
-        </p:nvSpPr>
-        <p:spPr>
-          <a:xfrm>
-            <a:off x="2468880" y="1234440"/>
-            <a:ext cx="6217920" cy="548640"/>
-          </a:xfrm>
-          <a:prstGeom prst="rect">
-            <a:avLst/>
-          </a:prstGeom>
-          <a:noFill/>
-          <a:ln/>
-        </p:spPr>
-        <p:txBody>
-          <a:bodyPr wrap="square" lIns="0" tIns="0" rIns="0" bIns="0" rtlCol="0" anchor="ctr"/>
-          <a:lstStyle/>
-          <a:p>
-            <a:pPr indent="0" marL="0">
-              <a:buNone/>
-            </a:pPr>
-            <a:r>
-              <a:rPr lang="en-US" sz="1600" dirty="0">
-                <a:solidFill>
-                  <a:srgbClr val="F3F5F7"/>
-                </a:solidFill>
-                <a:latin typeface="Calibri" pitchFamily="34" charset="0"/>
-                <a:ea typeface="Calibri" pitchFamily="34" charset="-122"/>
-                <a:cs typeface="Calibri" pitchFamily="34" charset="-120"/>
-              </a:rPr>
-              <a:t>decides + loop + tools</a:t>
-            </a:r>
-            <a:endParaRPr lang="en-US" sz="1600" dirty="0"/>
-          </a:p>
-        </p:txBody>
-      </p:sp>
-      <p:sp>
-        <p:nvSpPr>
-          <p:cNvPr id="6" name="Text 3"/>
-          <p:cNvSpPr txBox="1"/>
-          <p:nvPr/>
-        </p:nvSpPr>
-        <p:spPr>
-          <a:xfrm>
-            <a:off x="457200" y="2011680"/>
-            <a:ext cx="2011680" cy="548640"/>
-          </a:xfrm>
-          <a:prstGeom prst="rect">
-            <a:avLst/>
-          </a:prstGeom>
-          <a:noFill/>
-          <a:ln/>
-        </p:spPr>
-        <p:txBody>
-          <a:bodyPr wrap="square" lIns="0" tIns="0" rIns="0" bIns="0" rtlCol="0" anchor="ctr"/>
-          <a:lstStyle/>
-          <a:p>
-            <a:pPr indent="0" marL="0">
-              <a:buNone/>
-            </a:pPr>
-            <a:r>
-              <a:rPr lang="en-US" sz="2000" b="1" dirty="0">
-                <a:solidFill>
-                  <a:srgbClr val="F5A623"/>
-                </a:solidFill>
-                <a:latin typeface="Cambria" pitchFamily="34" charset="0"/>
-                <a:ea typeface="Cambria" pitchFamily="34" charset="-122"/>
-                <a:cs typeface="Cambria" pitchFamily="34" charset="-120"/>
-              </a:rPr>
-              <a:t>5 parts</a:t>
-            </a:r>
-            <a:endParaRPr lang="en-US" sz="2000" dirty="0"/>
-          </a:p>
-        </p:txBody>
-      </p:sp>
-      <p:sp>
-        <p:nvSpPr>
-          <p:cNvPr id="7" name="Text 4"/>
-          <p:cNvSpPr txBox="1"/>
-          <p:nvPr/>
-        </p:nvSpPr>
-        <p:spPr>
-          <a:xfrm>
-            <a:off x="2468880" y="2011680"/>
-            <a:ext cx="6217920" cy="548640"/>
-          </a:xfrm>
-          <a:prstGeom prst="rect">
-            <a:avLst/>
-          </a:prstGeom>
-          <a:noFill/>
-          <a:ln/>
-        </p:spPr>
-        <p:txBody>
-          <a:bodyPr wrap="square" lIns="0" tIns="0" rIns="0" bIns="0" rtlCol="0" anchor="ctr"/>
-          <a:lstStyle/>
-          <a:p>
-            <a:pPr indent="0" marL="0">
-              <a:buNone/>
-            </a:pPr>
-            <a:r>
-              <a:rPr lang="en-US" sz="1600" dirty="0">
-                <a:solidFill>
-                  <a:srgbClr val="F3F5F7"/>
-                </a:solidFill>
-                <a:latin typeface="Calibri" pitchFamily="34" charset="0"/>
-                <a:ea typeface="Calibri" pitchFamily="34" charset="-122"/>
-                <a:cs typeface="Calibri" pitchFamily="34" charset="-120"/>
-              </a:rPr>
-              <a:t>model · instructions · tools · memory · loop + limits</a:t>
-            </a:r>
-            <a:endParaRPr lang="en-US" sz="1600" dirty="0"/>
-          </a:p>
-        </p:txBody>
-      </p:sp>
-      <p:sp>
-        <p:nvSpPr>
-          <p:cNvPr id="8" name="Text 5"/>
-          <p:cNvSpPr txBox="1"/>
-          <p:nvPr/>
-        </p:nvSpPr>
-        <p:spPr>
-          <a:xfrm>
-            <a:off x="457200" y="2788920"/>
-            <a:ext cx="2011680" cy="548640"/>
-          </a:xfrm>
-          <a:prstGeom prst="rect">
-            <a:avLst/>
-          </a:prstGeom>
-          <a:noFill/>
-          <a:ln/>
-        </p:spPr>
-        <p:txBody>
-          <a:bodyPr wrap="square" lIns="0" tIns="0" rIns="0" bIns="0" rtlCol="0" anchor="ctr"/>
-          <a:lstStyle/>
-          <a:p>
-            <a:pPr indent="0" marL="0">
-              <a:buNone/>
-            </a:pPr>
-            <a:r>
-              <a:rPr lang="en-US" sz="2000" b="1" dirty="0">
-                <a:solidFill>
-                  <a:srgbClr val="F5A623"/>
-                </a:solidFill>
-                <a:latin typeface="Cambria" pitchFamily="34" charset="0"/>
-                <a:ea typeface="Cambria" pitchFamily="34" charset="-122"/>
-                <a:cs typeface="Cambria" pitchFamily="34" charset="-120"/>
-              </a:rPr>
-              <a:t>3 breakpoints</a:t>
-            </a:r>
-            <a:endParaRPr lang="en-US" sz="2000" dirty="0"/>
-          </a:p>
-        </p:txBody>
-      </p:sp>
-      <p:sp>
-        <p:nvSpPr>
-          <p:cNvPr id="9" name="Text 6"/>
-          <p:cNvSpPr txBox="1"/>
-          <p:nvPr/>
-        </p:nvSpPr>
-        <p:spPr>
-          <a:xfrm>
-            <a:off x="2468880" y="2788920"/>
-            <a:ext cx="6217920" cy="548640"/>
-          </a:xfrm>
-          <a:prstGeom prst="rect">
-            <a:avLst/>
-          </a:prstGeom>
-          <a:noFill/>
-          <a:ln/>
-        </p:spPr>
-        <p:txBody>
-          <a:bodyPr wrap="square" lIns="0" tIns="0" rIns="0" bIns="0" rtlCol="0" anchor="ctr"/>
-          <a:lstStyle/>
-          <a:p>
-            <a:pPr indent="0" marL="0">
-              <a:buNone/>
-            </a:pPr>
-            <a:r>
-              <a:rPr lang="en-US" sz="1600" dirty="0">
-                <a:solidFill>
-                  <a:srgbClr val="F3F5F7"/>
-                </a:solidFill>
-                <a:latin typeface="Calibri" pitchFamily="34" charset="0"/>
-                <a:ea typeface="Calibri" pitchFamily="34" charset="-122"/>
-                <a:cs typeface="Calibri" pitchFamily="34" charset="-120"/>
-              </a:rPr>
-              <a:t>identity · tenancy · accountability</a:t>
-            </a:r>
-            <a:endParaRPr lang="en-US" sz="1600" dirty="0"/>
-          </a:p>
-        </p:txBody>
-      </p:sp>
-      <p:sp>
-        <p:nvSpPr>
-          <p:cNvPr id="10" name="Shape 7"/>
+              <a:t>Accountability: who answers for step 7 of 12?</a:t>
+            </a:r>
+            <a:endParaRPr lang="en-US" sz="2800" dirty="0"/>
+          </a:p>
+        </p:txBody>
+      </p:sp>
+      <p:sp>
+        <p:nvSpPr>
+          <p:cNvPr id="5" name="Shape 2"/>
           <p:cNvSpPr/>
           <p:nvPr/>
         </p:nvSpPr>
         <p:spPr>
           <a:xfrm>
-            <a:off x="457200" y="3657600"/>
-            <a:ext cx="8229600" cy="868680"/>
+            <a:off x="457200" y="1600200"/>
+            <a:ext cx="4023360" cy="1234440"/>
           </a:xfrm>
           <a:prstGeom prst="roundRect">
             <a:avLst>
-              <a:gd name="adj" fmla="val 8421"/>
+              <a:gd name="adj" fmla="val 5926"/>
             </a:avLst>
           </a:prstGeom>
           <a:solidFill>
-            <a:srgbClr val="232B33"/>
+            <a:srgbClr val="1B2127"/>
           </a:solidFill>
           <a:ln w="9525">
             <a:solidFill>
@@ -5264,60 +5046,636 @@
       </p:sp>
       <p:sp>
         <p:nvSpPr>
-          <p:cNvPr id="11" name="Text 8"/>
-          <p:cNvSpPr txBox="1"/>
-          <p:nvPr/>
-        </p:nvSpPr>
-        <p:spPr>
-          <a:xfrm>
-            <a:off x="685800" y="3657600"/>
-            <a:ext cx="7772400" cy="868680"/>
-          </a:xfrm>
-          <a:prstGeom prst="rect">
-            <a:avLst/>
-          </a:prstGeom>
-          <a:noFill/>
-          <a:ln/>
-        </p:spPr>
-        <p:txBody>
-          <a:bodyPr wrap="square" lIns="0" tIns="0" rIns="0" bIns="0" rtlCol="0" anchor="ctr"/>
-          <a:lstStyle/>
-          <a:p>
-            <a:pPr indent="0" marL="0">
-              <a:buNone/>
-            </a:pPr>
-            <a:r>
-              <a:rPr lang="en-US" sz="1100" b="1" spc="200" kern="0" dirty="0">
-                <a:solidFill>
-                  <a:srgbClr val="4FB3BF"/>
-                </a:solidFill>
-                <a:latin typeface="Calibri" pitchFamily="34" charset="0"/>
-                <a:ea typeface="Calibri" pitchFamily="34" charset="-122"/>
-                <a:cs typeface="Calibri" pitchFamily="34" charset="-120"/>
-              </a:rPr>
-              <a:t>NEXT EPISODE  </a:t>
-            </a:r>
-            <a:pPr indent="0" marL="0">
-              <a:buNone/>
-            </a:pPr>
-            <a:r>
-              <a:rPr lang="en-US" sz="1400" dirty="0">
+          <p:cNvPr id="6" name="Shape 3"/>
+          <p:cNvSpPr/>
+          <p:nvPr/>
+        </p:nvSpPr>
+        <p:spPr>
+          <a:xfrm>
+            <a:off x="685800" y="1828800"/>
+            <a:ext cx="384048" cy="384048"/>
+          </a:xfrm>
+          <a:prstGeom prst="ellipse">
+            <a:avLst/>
+          </a:prstGeom>
+          <a:solidFill>
+            <a:srgbClr val="F5A623"/>
+          </a:solidFill>
+          <a:ln/>
+        </p:spPr>
+      </p:sp>
+      <p:sp>
+        <p:nvSpPr>
+          <p:cNvPr id="7" name="Text 4"/>
+          <p:cNvSpPr txBox="1"/>
+          <p:nvPr/>
+        </p:nvSpPr>
+        <p:spPr>
+          <a:xfrm>
+            <a:off x="685800" y="1828800"/>
+            <a:ext cx="384048" cy="384048"/>
+          </a:xfrm>
+          <a:prstGeom prst="rect">
+            <a:avLst/>
+          </a:prstGeom>
+          <a:noFill/>
+          <a:ln/>
+        </p:spPr>
+        <p:txBody>
+          <a:bodyPr wrap="square" lIns="0" tIns="0" rIns="0" bIns="0" rtlCol="0" anchor="ctr"/>
+          <a:lstStyle/>
+          <a:p>
+            <a:pPr algn="ctr" indent="0" marL="0">
+              <a:buNone/>
+            </a:pPr>
+            <a:r>
+              <a:rPr lang="en-US" sz="1400" b="1" dirty="0">
+                <a:solidFill>
+                  <a:srgbClr val="0F1316"/>
+                </a:solidFill>
+                <a:latin typeface="Calibri" pitchFamily="34" charset="0"/>
+                <a:ea typeface="Calibri" pitchFamily="34" charset="-122"/>
+                <a:cs typeface="Calibri" pitchFamily="34" charset="-120"/>
+              </a:rPr>
+              <a:t>1</a:t>
+            </a:r>
+            <a:endParaRPr lang="en-US" sz="1400" dirty="0"/>
+          </a:p>
+        </p:txBody>
+      </p:sp>
+      <p:sp>
+        <p:nvSpPr>
+          <p:cNvPr id="8" name="Text 5"/>
+          <p:cNvSpPr txBox="1"/>
+          <p:nvPr/>
+        </p:nvSpPr>
+        <p:spPr>
+          <a:xfrm>
+            <a:off x="1234440" y="1737360"/>
+            <a:ext cx="3108960" cy="411480"/>
+          </a:xfrm>
+          <a:prstGeom prst="rect">
+            <a:avLst/>
+          </a:prstGeom>
+          <a:noFill/>
+          <a:ln/>
+        </p:spPr>
+        <p:txBody>
+          <a:bodyPr wrap="square" lIns="0" tIns="0" rIns="0" bIns="0" rtlCol="0" anchor="ctr"/>
+          <a:lstStyle/>
+          <a:p>
+            <a:pPr indent="0" marL="0">
+              <a:buNone/>
+            </a:pPr>
+            <a:r>
+              <a:rPr lang="en-US" sz="1600" b="1" dirty="0">
                 <a:solidFill>
                   <a:srgbClr val="F3F5F7"/>
                 </a:solidFill>
-                <a:latin typeface="Calibri" pitchFamily="34" charset="0"/>
-                <a:ea typeface="Calibri" pitchFamily="34" charset="-122"/>
-                <a:cs typeface="Calibri" pitchFamily="34" charset="-120"/>
-              </a:rPr>
-              <a:t>Build your first MCP server for an enterprise data source — the moment tools stop being mocks.</a:t>
-            </a:r>
-            <a:endParaRPr lang="en-US" sz="1100" dirty="0"/>
-          </a:p>
-        </p:txBody>
+                <a:latin typeface="Cambria" pitchFamily="34" charset="0"/>
+                <a:ea typeface="Cambria" pitchFamily="34" charset="-122"/>
+                <a:cs typeface="Cambria" pitchFamily="34" charset="-120"/>
+              </a:rPr>
+              <a:t>Trace every step</a:t>
+            </a:r>
+            <a:endParaRPr lang="en-US" sz="1600" dirty="0"/>
+          </a:p>
+        </p:txBody>
+      </p:sp>
+      <p:sp>
+        <p:nvSpPr>
+          <p:cNvPr id="9" name="Text 6"/>
+          <p:cNvSpPr txBox="1"/>
+          <p:nvPr/>
+        </p:nvSpPr>
+        <p:spPr>
+          <a:xfrm>
+            <a:off x="1234440" y="2148840"/>
+            <a:ext cx="3108960" cy="640080"/>
+          </a:xfrm>
+          <a:prstGeom prst="rect">
+            <a:avLst/>
+          </a:prstGeom>
+          <a:noFill/>
+          <a:ln/>
+        </p:spPr>
+        <p:txBody>
+          <a:bodyPr wrap="square" lIns="0" tIns="0" rIns="0" bIns="0" rtlCol="0" anchor="t"/>
+          <a:lstStyle/>
+          <a:p>
+            <a:pPr indent="0" marL="0">
+              <a:buNone/>
+            </a:pPr>
+            <a:r>
+              <a:rPr lang="en-US" sz="1200" dirty="0">
+                <a:solidFill>
+                  <a:srgbClr val="9AA6B2"/>
+                </a:solidFill>
+                <a:latin typeface="Calibri" pitchFamily="34" charset="0"/>
+                <a:ea typeface="Calibri" pitchFamily="34" charset="-122"/>
+                <a:cs typeface="Calibri" pitchFamily="34" charset="-120"/>
+              </a:rPr>
+              <a:t>every model call, tool call and result, tied to a user and a tenant</a:t>
+            </a:r>
+            <a:endParaRPr lang="en-US" sz="1200" dirty="0"/>
+          </a:p>
+        </p:txBody>
+      </p:sp>
+      <p:sp>
+        <p:nvSpPr>
+          <p:cNvPr id="10" name="Shape 7"/>
+          <p:cNvSpPr/>
+          <p:nvPr/>
+        </p:nvSpPr>
+        <p:spPr>
+          <a:xfrm>
+            <a:off x="4663440" y="1600200"/>
+            <a:ext cx="4023360" cy="1234440"/>
+          </a:xfrm>
+          <a:prstGeom prst="roundRect">
+            <a:avLst>
+              <a:gd name="adj" fmla="val 5926"/>
+            </a:avLst>
+          </a:prstGeom>
+          <a:solidFill>
+            <a:srgbClr val="1B2127"/>
+          </a:solidFill>
+          <a:ln w="9525">
+            <a:solidFill>
+              <a:srgbClr val="2E3842"/>
+            </a:solidFill>
+            <a:prstDash val="solid"/>
+          </a:ln>
+        </p:spPr>
+      </p:sp>
+      <p:sp>
+        <p:nvSpPr>
+          <p:cNvPr id="11" name="Shape 8"/>
+          <p:cNvSpPr/>
+          <p:nvPr/>
+        </p:nvSpPr>
+        <p:spPr>
+          <a:xfrm>
+            <a:off x="4892040" y="1828800"/>
+            <a:ext cx="384048" cy="384048"/>
+          </a:xfrm>
+          <a:prstGeom prst="ellipse">
+            <a:avLst/>
+          </a:prstGeom>
+          <a:solidFill>
+            <a:srgbClr val="F5A623"/>
+          </a:solidFill>
+          <a:ln/>
+        </p:spPr>
       </p:sp>
       <p:sp>
         <p:nvSpPr>
           <p:cNvPr id="12" name="Text 9"/>
+          <p:cNvSpPr txBox="1"/>
+          <p:nvPr/>
+        </p:nvSpPr>
+        <p:spPr>
+          <a:xfrm>
+            <a:off x="4892040" y="1828800"/>
+            <a:ext cx="384048" cy="384048"/>
+          </a:xfrm>
+          <a:prstGeom prst="rect">
+            <a:avLst/>
+          </a:prstGeom>
+          <a:noFill/>
+          <a:ln/>
+        </p:spPr>
+        <p:txBody>
+          <a:bodyPr wrap="square" lIns="0" tIns="0" rIns="0" bIns="0" rtlCol="0" anchor="ctr"/>
+          <a:lstStyle/>
+          <a:p>
+            <a:pPr algn="ctr" indent="0" marL="0">
+              <a:buNone/>
+            </a:pPr>
+            <a:r>
+              <a:rPr lang="en-US" sz="1400" b="1" dirty="0">
+                <a:solidFill>
+                  <a:srgbClr val="0F1316"/>
+                </a:solidFill>
+                <a:latin typeface="Calibri" pitchFamily="34" charset="0"/>
+                <a:ea typeface="Calibri" pitchFamily="34" charset="-122"/>
+                <a:cs typeface="Calibri" pitchFamily="34" charset="-120"/>
+              </a:rPr>
+              <a:t>2</a:t>
+            </a:r>
+            <a:endParaRPr lang="en-US" sz="1400" dirty="0"/>
+          </a:p>
+        </p:txBody>
+      </p:sp>
+      <p:sp>
+        <p:nvSpPr>
+          <p:cNvPr id="13" name="Text 10"/>
+          <p:cNvSpPr txBox="1"/>
+          <p:nvPr/>
+        </p:nvSpPr>
+        <p:spPr>
+          <a:xfrm>
+            <a:off x="5440680" y="1737360"/>
+            <a:ext cx="3108960" cy="411480"/>
+          </a:xfrm>
+          <a:prstGeom prst="rect">
+            <a:avLst/>
+          </a:prstGeom>
+          <a:noFill/>
+          <a:ln/>
+        </p:spPr>
+        <p:txBody>
+          <a:bodyPr wrap="square" lIns="0" tIns="0" rIns="0" bIns="0" rtlCol="0" anchor="ctr"/>
+          <a:lstStyle/>
+          <a:p>
+            <a:pPr indent="0" marL="0">
+              <a:buNone/>
+            </a:pPr>
+            <a:r>
+              <a:rPr lang="en-US" sz="1600" b="1" dirty="0">
+                <a:solidFill>
+                  <a:srgbClr val="F3F5F7"/>
+                </a:solidFill>
+                <a:latin typeface="Cambria" pitchFamily="34" charset="0"/>
+                <a:ea typeface="Cambria" pitchFamily="34" charset="-122"/>
+                <a:cs typeface="Cambria" pitchFamily="34" charset="-120"/>
+              </a:rPr>
+              <a:t>Human-in-the-loop</a:t>
+            </a:r>
+            <a:endParaRPr lang="en-US" sz="1600" dirty="0"/>
+          </a:p>
+        </p:txBody>
+      </p:sp>
+      <p:sp>
+        <p:nvSpPr>
+          <p:cNvPr id="14" name="Text 11"/>
+          <p:cNvSpPr txBox="1"/>
+          <p:nvPr/>
+        </p:nvSpPr>
+        <p:spPr>
+          <a:xfrm>
+            <a:off x="5440680" y="2148840"/>
+            <a:ext cx="3108960" cy="640080"/>
+          </a:xfrm>
+          <a:prstGeom prst="rect">
+            <a:avLst/>
+          </a:prstGeom>
+          <a:noFill/>
+          <a:ln/>
+        </p:spPr>
+        <p:txBody>
+          <a:bodyPr wrap="square" lIns="0" tIns="0" rIns="0" bIns="0" rtlCol="0" anchor="t"/>
+          <a:lstStyle/>
+          <a:p>
+            <a:pPr indent="0" marL="0">
+              <a:buNone/>
+            </a:pPr>
+            <a:r>
+              <a:rPr lang="en-US" sz="1200" dirty="0">
+                <a:solidFill>
+                  <a:srgbClr val="9AA6B2"/>
+                </a:solidFill>
+                <a:latin typeface="Calibri" pitchFamily="34" charset="0"/>
+                <a:ea typeface="Calibri" pitchFamily="34" charset="-122"/>
+                <a:cs typeface="Calibri" pitchFamily="34" charset="-120"/>
+              </a:rPr>
+              <a:t>irreversible or high-value actions pause for a person — by design, not by prompt</a:t>
+            </a:r>
+            <a:endParaRPr lang="en-US" sz="1200" dirty="0"/>
+          </a:p>
+        </p:txBody>
+      </p:sp>
+      <p:sp>
+        <p:nvSpPr>
+          <p:cNvPr id="15" name="Shape 12"/>
+          <p:cNvSpPr/>
+          <p:nvPr/>
+        </p:nvSpPr>
+        <p:spPr>
+          <a:xfrm>
+            <a:off x="457200" y="3017520"/>
+            <a:ext cx="4023360" cy="1234440"/>
+          </a:xfrm>
+          <a:prstGeom prst="roundRect">
+            <a:avLst>
+              <a:gd name="adj" fmla="val 5926"/>
+            </a:avLst>
+          </a:prstGeom>
+          <a:solidFill>
+            <a:srgbClr val="1B2127"/>
+          </a:solidFill>
+          <a:ln w="9525">
+            <a:solidFill>
+              <a:srgbClr val="2E3842"/>
+            </a:solidFill>
+            <a:prstDash val="solid"/>
+          </a:ln>
+        </p:spPr>
+      </p:sp>
+      <p:sp>
+        <p:nvSpPr>
+          <p:cNvPr id="16" name="Shape 13"/>
+          <p:cNvSpPr/>
+          <p:nvPr/>
+        </p:nvSpPr>
+        <p:spPr>
+          <a:xfrm>
+            <a:off x="685800" y="3246120"/>
+            <a:ext cx="384048" cy="384048"/>
+          </a:xfrm>
+          <a:prstGeom prst="ellipse">
+            <a:avLst/>
+          </a:prstGeom>
+          <a:solidFill>
+            <a:srgbClr val="F5A623"/>
+          </a:solidFill>
+          <a:ln/>
+        </p:spPr>
+      </p:sp>
+      <p:sp>
+        <p:nvSpPr>
+          <p:cNvPr id="17" name="Text 14"/>
+          <p:cNvSpPr txBox="1"/>
+          <p:nvPr/>
+        </p:nvSpPr>
+        <p:spPr>
+          <a:xfrm>
+            <a:off x="685800" y="3246120"/>
+            <a:ext cx="384048" cy="384048"/>
+          </a:xfrm>
+          <a:prstGeom prst="rect">
+            <a:avLst/>
+          </a:prstGeom>
+          <a:noFill/>
+          <a:ln/>
+        </p:spPr>
+        <p:txBody>
+          <a:bodyPr wrap="square" lIns="0" tIns="0" rIns="0" bIns="0" rtlCol="0" anchor="ctr"/>
+          <a:lstStyle/>
+          <a:p>
+            <a:pPr algn="ctr" indent="0" marL="0">
+              <a:buNone/>
+            </a:pPr>
+            <a:r>
+              <a:rPr lang="en-US" sz="1400" b="1" dirty="0">
+                <a:solidFill>
+                  <a:srgbClr val="0F1316"/>
+                </a:solidFill>
+                <a:latin typeface="Calibri" pitchFamily="34" charset="0"/>
+                <a:ea typeface="Calibri" pitchFamily="34" charset="-122"/>
+                <a:cs typeface="Calibri" pitchFamily="34" charset="-120"/>
+              </a:rPr>
+              <a:t>3</a:t>
+            </a:r>
+            <a:endParaRPr lang="en-US" sz="1400" dirty="0"/>
+          </a:p>
+        </p:txBody>
+      </p:sp>
+      <p:sp>
+        <p:nvSpPr>
+          <p:cNvPr id="18" name="Text 15"/>
+          <p:cNvSpPr txBox="1"/>
+          <p:nvPr/>
+        </p:nvSpPr>
+        <p:spPr>
+          <a:xfrm>
+            <a:off x="1234440" y="3154680"/>
+            <a:ext cx="3108960" cy="411480"/>
+          </a:xfrm>
+          <a:prstGeom prst="rect">
+            <a:avLst/>
+          </a:prstGeom>
+          <a:noFill/>
+          <a:ln/>
+        </p:spPr>
+        <p:txBody>
+          <a:bodyPr wrap="square" lIns="0" tIns="0" rIns="0" bIns="0" rtlCol="0" anchor="ctr"/>
+          <a:lstStyle/>
+          <a:p>
+            <a:pPr indent="0" marL="0">
+              <a:buNone/>
+            </a:pPr>
+            <a:r>
+              <a:rPr lang="en-US" sz="1600" b="1" dirty="0">
+                <a:solidFill>
+                  <a:srgbClr val="F3F5F7"/>
+                </a:solidFill>
+                <a:latin typeface="Cambria" pitchFamily="34" charset="0"/>
+                <a:ea typeface="Cambria" pitchFamily="34" charset="-122"/>
+                <a:cs typeface="Cambria" pitchFamily="34" charset="-120"/>
+              </a:rPr>
+              <a:t>Caps on steps, cost, time</a:t>
+            </a:r>
+            <a:endParaRPr lang="en-US" sz="1600" dirty="0"/>
+          </a:p>
+        </p:txBody>
+      </p:sp>
+      <p:sp>
+        <p:nvSpPr>
+          <p:cNvPr id="19" name="Text 16"/>
+          <p:cNvSpPr txBox="1"/>
+          <p:nvPr/>
+        </p:nvSpPr>
+        <p:spPr>
+          <a:xfrm>
+            <a:off x="1234440" y="3566160"/>
+            <a:ext cx="3108960" cy="640080"/>
+          </a:xfrm>
+          <a:prstGeom prst="rect">
+            <a:avLst/>
+          </a:prstGeom>
+          <a:noFill/>
+          <a:ln/>
+        </p:spPr>
+        <p:txBody>
+          <a:bodyPr wrap="square" lIns="0" tIns="0" rIns="0" bIns="0" rtlCol="0" anchor="t"/>
+          <a:lstStyle/>
+          <a:p>
+            <a:pPr indent="0" marL="0">
+              <a:buNone/>
+            </a:pPr>
+            <a:r>
+              <a:rPr lang="en-US" sz="1200" dirty="0">
+                <a:solidFill>
+                  <a:srgbClr val="9AA6B2"/>
+                </a:solidFill>
+                <a:latin typeface="Calibri" pitchFamily="34" charset="0"/>
+                <a:ea typeface="Calibri" pitchFamily="34" charset="-122"/>
+                <a:cs typeface="Calibri" pitchFamily="34" charset="-120"/>
+              </a:rPr>
+              <a:t>a runaway loop is a budget incident; the cap is the circuit breaker</a:t>
+            </a:r>
+            <a:endParaRPr lang="en-US" sz="1200" dirty="0"/>
+          </a:p>
+        </p:txBody>
+      </p:sp>
+      <p:sp>
+        <p:nvSpPr>
+          <p:cNvPr id="20" name="Shape 17"/>
+          <p:cNvSpPr/>
+          <p:nvPr/>
+        </p:nvSpPr>
+        <p:spPr>
+          <a:xfrm>
+            <a:off x="4663440" y="3017520"/>
+            <a:ext cx="4023360" cy="1234440"/>
+          </a:xfrm>
+          <a:prstGeom prst="roundRect">
+            <a:avLst>
+              <a:gd name="adj" fmla="val 5926"/>
+            </a:avLst>
+          </a:prstGeom>
+          <a:solidFill>
+            <a:srgbClr val="1B2127"/>
+          </a:solidFill>
+          <a:ln w="9525">
+            <a:solidFill>
+              <a:srgbClr val="2E3842"/>
+            </a:solidFill>
+            <a:prstDash val="solid"/>
+          </a:ln>
+        </p:spPr>
+      </p:sp>
+      <p:sp>
+        <p:nvSpPr>
+          <p:cNvPr id="21" name="Shape 18"/>
+          <p:cNvSpPr/>
+          <p:nvPr/>
+        </p:nvSpPr>
+        <p:spPr>
+          <a:xfrm>
+            <a:off x="4892040" y="3246120"/>
+            <a:ext cx="384048" cy="384048"/>
+          </a:xfrm>
+          <a:prstGeom prst="ellipse">
+            <a:avLst/>
+          </a:prstGeom>
+          <a:solidFill>
+            <a:srgbClr val="F5A623"/>
+          </a:solidFill>
+          <a:ln/>
+        </p:spPr>
+      </p:sp>
+      <p:sp>
+        <p:nvSpPr>
+          <p:cNvPr id="22" name="Text 19"/>
+          <p:cNvSpPr txBox="1"/>
+          <p:nvPr/>
+        </p:nvSpPr>
+        <p:spPr>
+          <a:xfrm>
+            <a:off x="4892040" y="3246120"/>
+            <a:ext cx="384048" cy="384048"/>
+          </a:xfrm>
+          <a:prstGeom prst="rect">
+            <a:avLst/>
+          </a:prstGeom>
+          <a:noFill/>
+          <a:ln/>
+        </p:spPr>
+        <p:txBody>
+          <a:bodyPr wrap="square" lIns="0" tIns="0" rIns="0" bIns="0" rtlCol="0" anchor="ctr"/>
+          <a:lstStyle/>
+          <a:p>
+            <a:pPr algn="ctr" indent="0" marL="0">
+              <a:buNone/>
+            </a:pPr>
+            <a:r>
+              <a:rPr lang="en-US" sz="1400" b="1" dirty="0">
+                <a:solidFill>
+                  <a:srgbClr val="0F1316"/>
+                </a:solidFill>
+                <a:latin typeface="Calibri" pitchFamily="34" charset="0"/>
+                <a:ea typeface="Calibri" pitchFamily="34" charset="-122"/>
+                <a:cs typeface="Calibri" pitchFamily="34" charset="-120"/>
+              </a:rPr>
+              <a:t>4</a:t>
+            </a:r>
+            <a:endParaRPr lang="en-US" sz="1400" dirty="0"/>
+          </a:p>
+        </p:txBody>
+      </p:sp>
+      <p:sp>
+        <p:nvSpPr>
+          <p:cNvPr id="23" name="Text 20"/>
+          <p:cNvSpPr txBox="1"/>
+          <p:nvPr/>
+        </p:nvSpPr>
+        <p:spPr>
+          <a:xfrm>
+            <a:off x="5440680" y="3154680"/>
+            <a:ext cx="3108960" cy="411480"/>
+          </a:xfrm>
+          <a:prstGeom prst="rect">
+            <a:avLst/>
+          </a:prstGeom>
+          <a:noFill/>
+          <a:ln/>
+        </p:spPr>
+        <p:txBody>
+          <a:bodyPr wrap="square" lIns="0" tIns="0" rIns="0" bIns="0" rtlCol="0" anchor="ctr"/>
+          <a:lstStyle/>
+          <a:p>
+            <a:pPr indent="0" marL="0">
+              <a:buNone/>
+            </a:pPr>
+            <a:r>
+              <a:rPr lang="en-US" sz="1600" b="1" dirty="0">
+                <a:solidFill>
+                  <a:srgbClr val="F3F5F7"/>
+                </a:solidFill>
+                <a:latin typeface="Cambria" pitchFamily="34" charset="0"/>
+                <a:ea typeface="Cambria" pitchFamily="34" charset="-122"/>
+                <a:cs typeface="Cambria" pitchFamily="34" charset="-120"/>
+              </a:rPr>
+              <a:t>Evals before release</a:t>
+            </a:r>
+            <a:endParaRPr lang="en-US" sz="1600" dirty="0"/>
+          </a:p>
+        </p:txBody>
+      </p:sp>
+      <p:sp>
+        <p:nvSpPr>
+          <p:cNvPr id="24" name="Text 21"/>
+          <p:cNvSpPr txBox="1"/>
+          <p:nvPr/>
+        </p:nvSpPr>
+        <p:spPr>
+          <a:xfrm>
+            <a:off x="5440680" y="3566160"/>
+            <a:ext cx="3108960" cy="640080"/>
+          </a:xfrm>
+          <a:prstGeom prst="rect">
+            <a:avLst/>
+          </a:prstGeom>
+          <a:noFill/>
+          <a:ln/>
+        </p:spPr>
+        <p:txBody>
+          <a:bodyPr wrap="square" lIns="0" tIns="0" rIns="0" bIns="0" rtlCol="0" anchor="t"/>
+          <a:lstStyle/>
+          <a:p>
+            <a:pPr indent="0" marL="0">
+              <a:buNone/>
+            </a:pPr>
+            <a:r>
+              <a:rPr lang="en-US" sz="1200" dirty="0">
+                <a:solidFill>
+                  <a:srgbClr val="9AA6B2"/>
+                </a:solidFill>
+                <a:latin typeface="Calibri" pitchFamily="34" charset="0"/>
+                <a:ea typeface="Calibri" pitchFamily="34" charset="-122"/>
+                <a:cs typeface="Calibri" pitchFamily="34" charset="-120"/>
+              </a:rPr>
+              <a:t>a test set of real tasks, scored, run on every change — like any other software</a:t>
+            </a:r>
+            <a:endParaRPr lang="en-US" sz="1200" dirty="0"/>
+          </a:p>
+        </p:txBody>
+      </p:sp>
+      <p:sp>
+        <p:nvSpPr>
+          <p:cNvPr id="25" name="Text 22"/>
           <p:cNvSpPr txBox="1"/>
           <p:nvPr/>
         </p:nvSpPr>
@@ -5348,7 +5706,7 @@
                 <a:ea typeface="Calibri" pitchFamily="34" charset="-122"/>
                 <a:cs typeface="Calibri" pitchFamily="34" charset="-120"/>
               </a:rPr>
-              <a:t>Arthashastra Learning · one episode a week</a:t>
+              <a:t>Episodes 9, 10, 18 and 25 cover each of these in depth</a:t>
             </a:r>
             <a:endParaRPr lang="en-US" sz="1000" dirty="0"/>
           </a:p>
@@ -5419,6 +5777,430 @@
                 <a:ea typeface="Cambria" pitchFamily="34" charset="-122"/>
                 <a:cs typeface="Cambria" pitchFamily="34" charset="-120"/>
               </a:rPr>
+              <a:t>Recap</a:t>
+            </a:r>
+            <a:endParaRPr lang="en-US" sz="3000" dirty="0"/>
+          </a:p>
+        </p:txBody>
+      </p:sp>
+      <p:sp>
+        <p:nvSpPr>
+          <p:cNvPr id="4" name="Text 1"/>
+          <p:cNvSpPr txBox="1"/>
+          <p:nvPr/>
+        </p:nvSpPr>
+        <p:spPr>
+          <a:xfrm>
+            <a:off x="457200" y="1234440"/>
+            <a:ext cx="2011680" cy="548640"/>
+          </a:xfrm>
+          <a:prstGeom prst="rect">
+            <a:avLst/>
+          </a:prstGeom>
+          <a:noFill/>
+          <a:ln/>
+        </p:spPr>
+        <p:txBody>
+          <a:bodyPr wrap="square" lIns="0" tIns="0" rIns="0" bIns="0" rtlCol="0" anchor="ctr"/>
+          <a:lstStyle/>
+          <a:p>
+            <a:pPr indent="0" marL="0">
+              <a:buNone/>
+            </a:pPr>
+            <a:r>
+              <a:rPr lang="en-US" sz="2000" b="1" dirty="0">
+                <a:solidFill>
+                  <a:srgbClr val="F5A623"/>
+                </a:solidFill>
+                <a:latin typeface="Cambria" pitchFamily="34" charset="0"/>
+                <a:ea typeface="Cambria" pitchFamily="34" charset="-122"/>
+                <a:cs typeface="Cambria" pitchFamily="34" charset="-120"/>
+              </a:rPr>
+              <a:t>Agent =</a:t>
+            </a:r>
+            <a:endParaRPr lang="en-US" sz="2000" dirty="0"/>
+          </a:p>
+        </p:txBody>
+      </p:sp>
+      <p:sp>
+        <p:nvSpPr>
+          <p:cNvPr id="5" name="Text 2"/>
+          <p:cNvSpPr txBox="1"/>
+          <p:nvPr/>
+        </p:nvSpPr>
+        <p:spPr>
+          <a:xfrm>
+            <a:off x="2468880" y="1234440"/>
+            <a:ext cx="6217920" cy="548640"/>
+          </a:xfrm>
+          <a:prstGeom prst="rect">
+            <a:avLst/>
+          </a:prstGeom>
+          <a:noFill/>
+          <a:ln/>
+        </p:spPr>
+        <p:txBody>
+          <a:bodyPr wrap="square" lIns="0" tIns="0" rIns="0" bIns="0" rtlCol="0" anchor="ctr"/>
+          <a:lstStyle/>
+          <a:p>
+            <a:pPr indent="0" marL="0">
+              <a:buNone/>
+            </a:pPr>
+            <a:r>
+              <a:rPr lang="en-US" sz="1600" dirty="0">
+                <a:solidFill>
+                  <a:srgbClr val="F3F5F7"/>
+                </a:solidFill>
+                <a:latin typeface="Calibri" pitchFamily="34" charset="0"/>
+                <a:ea typeface="Calibri" pitchFamily="34" charset="-122"/>
+                <a:cs typeface="Calibri" pitchFamily="34" charset="-120"/>
+              </a:rPr>
+              <a:t>decides + loop + tools</a:t>
+            </a:r>
+            <a:endParaRPr lang="en-US" sz="1600" dirty="0"/>
+          </a:p>
+        </p:txBody>
+      </p:sp>
+      <p:sp>
+        <p:nvSpPr>
+          <p:cNvPr id="6" name="Text 3"/>
+          <p:cNvSpPr txBox="1"/>
+          <p:nvPr/>
+        </p:nvSpPr>
+        <p:spPr>
+          <a:xfrm>
+            <a:off x="457200" y="2011680"/>
+            <a:ext cx="2011680" cy="548640"/>
+          </a:xfrm>
+          <a:prstGeom prst="rect">
+            <a:avLst/>
+          </a:prstGeom>
+          <a:noFill/>
+          <a:ln/>
+        </p:spPr>
+        <p:txBody>
+          <a:bodyPr wrap="square" lIns="0" tIns="0" rIns="0" bIns="0" rtlCol="0" anchor="ctr"/>
+          <a:lstStyle/>
+          <a:p>
+            <a:pPr indent="0" marL="0">
+              <a:buNone/>
+            </a:pPr>
+            <a:r>
+              <a:rPr lang="en-US" sz="2000" b="1" dirty="0">
+                <a:solidFill>
+                  <a:srgbClr val="F5A623"/>
+                </a:solidFill>
+                <a:latin typeface="Cambria" pitchFamily="34" charset="0"/>
+                <a:ea typeface="Cambria" pitchFamily="34" charset="-122"/>
+                <a:cs typeface="Cambria" pitchFamily="34" charset="-120"/>
+              </a:rPr>
+              <a:t>5 parts</a:t>
+            </a:r>
+            <a:endParaRPr lang="en-US" sz="2000" dirty="0"/>
+          </a:p>
+        </p:txBody>
+      </p:sp>
+      <p:sp>
+        <p:nvSpPr>
+          <p:cNvPr id="7" name="Text 4"/>
+          <p:cNvSpPr txBox="1"/>
+          <p:nvPr/>
+        </p:nvSpPr>
+        <p:spPr>
+          <a:xfrm>
+            <a:off x="2468880" y="2011680"/>
+            <a:ext cx="6217920" cy="548640"/>
+          </a:xfrm>
+          <a:prstGeom prst="rect">
+            <a:avLst/>
+          </a:prstGeom>
+          <a:noFill/>
+          <a:ln/>
+        </p:spPr>
+        <p:txBody>
+          <a:bodyPr wrap="square" lIns="0" tIns="0" rIns="0" bIns="0" rtlCol="0" anchor="ctr"/>
+          <a:lstStyle/>
+          <a:p>
+            <a:pPr indent="0" marL="0">
+              <a:buNone/>
+            </a:pPr>
+            <a:r>
+              <a:rPr lang="en-US" sz="1600" dirty="0">
+                <a:solidFill>
+                  <a:srgbClr val="F3F5F7"/>
+                </a:solidFill>
+                <a:latin typeface="Calibri" pitchFamily="34" charset="0"/>
+                <a:ea typeface="Calibri" pitchFamily="34" charset="-122"/>
+                <a:cs typeface="Calibri" pitchFamily="34" charset="-120"/>
+              </a:rPr>
+              <a:t>model · instructions · tools · memory · loop + limits</a:t>
+            </a:r>
+            <a:endParaRPr lang="en-US" sz="1600" dirty="0"/>
+          </a:p>
+        </p:txBody>
+      </p:sp>
+      <p:sp>
+        <p:nvSpPr>
+          <p:cNvPr id="8" name="Text 5"/>
+          <p:cNvSpPr txBox="1"/>
+          <p:nvPr/>
+        </p:nvSpPr>
+        <p:spPr>
+          <a:xfrm>
+            <a:off x="457200" y="2788920"/>
+            <a:ext cx="2011680" cy="548640"/>
+          </a:xfrm>
+          <a:prstGeom prst="rect">
+            <a:avLst/>
+          </a:prstGeom>
+          <a:noFill/>
+          <a:ln/>
+        </p:spPr>
+        <p:txBody>
+          <a:bodyPr wrap="square" lIns="0" tIns="0" rIns="0" bIns="0" rtlCol="0" anchor="ctr"/>
+          <a:lstStyle/>
+          <a:p>
+            <a:pPr indent="0" marL="0">
+              <a:buNone/>
+            </a:pPr>
+            <a:r>
+              <a:rPr lang="en-US" sz="2000" b="1" dirty="0">
+                <a:solidFill>
+                  <a:srgbClr val="F5A623"/>
+                </a:solidFill>
+                <a:latin typeface="Cambria" pitchFamily="34" charset="0"/>
+                <a:ea typeface="Cambria" pitchFamily="34" charset="-122"/>
+                <a:cs typeface="Cambria" pitchFamily="34" charset="-120"/>
+              </a:rPr>
+              <a:t>3 breakpoints</a:t>
+            </a:r>
+            <a:endParaRPr lang="en-US" sz="2000" dirty="0"/>
+          </a:p>
+        </p:txBody>
+      </p:sp>
+      <p:sp>
+        <p:nvSpPr>
+          <p:cNvPr id="9" name="Text 6"/>
+          <p:cNvSpPr txBox="1"/>
+          <p:nvPr/>
+        </p:nvSpPr>
+        <p:spPr>
+          <a:xfrm>
+            <a:off x="2468880" y="2788920"/>
+            <a:ext cx="6217920" cy="548640"/>
+          </a:xfrm>
+          <a:prstGeom prst="rect">
+            <a:avLst/>
+          </a:prstGeom>
+          <a:noFill/>
+          <a:ln/>
+        </p:spPr>
+        <p:txBody>
+          <a:bodyPr wrap="square" lIns="0" tIns="0" rIns="0" bIns="0" rtlCol="0" anchor="ctr"/>
+          <a:lstStyle/>
+          <a:p>
+            <a:pPr indent="0" marL="0">
+              <a:buNone/>
+            </a:pPr>
+            <a:r>
+              <a:rPr lang="en-US" sz="1600" dirty="0">
+                <a:solidFill>
+                  <a:srgbClr val="F3F5F7"/>
+                </a:solidFill>
+                <a:latin typeface="Calibri" pitchFamily="34" charset="0"/>
+                <a:ea typeface="Calibri" pitchFamily="34" charset="-122"/>
+                <a:cs typeface="Calibri" pitchFamily="34" charset="-120"/>
+              </a:rPr>
+              <a:t>identity · tenancy · accountability</a:t>
+            </a:r>
+            <a:endParaRPr lang="en-US" sz="1600" dirty="0"/>
+          </a:p>
+        </p:txBody>
+      </p:sp>
+      <p:sp>
+        <p:nvSpPr>
+          <p:cNvPr id="10" name="Shape 7"/>
+          <p:cNvSpPr/>
+          <p:nvPr/>
+        </p:nvSpPr>
+        <p:spPr>
+          <a:xfrm>
+            <a:off x="457200" y="3657600"/>
+            <a:ext cx="8229600" cy="868680"/>
+          </a:xfrm>
+          <a:prstGeom prst="roundRect">
+            <a:avLst>
+              <a:gd name="adj" fmla="val 8421"/>
+            </a:avLst>
+          </a:prstGeom>
+          <a:solidFill>
+            <a:srgbClr val="232B33"/>
+          </a:solidFill>
+          <a:ln w="9525">
+            <a:solidFill>
+              <a:srgbClr val="2E3842"/>
+            </a:solidFill>
+            <a:prstDash val="solid"/>
+          </a:ln>
+        </p:spPr>
+      </p:sp>
+      <p:sp>
+        <p:nvSpPr>
+          <p:cNvPr id="11" name="Text 8"/>
+          <p:cNvSpPr txBox="1"/>
+          <p:nvPr/>
+        </p:nvSpPr>
+        <p:spPr>
+          <a:xfrm>
+            <a:off x="685800" y="3657600"/>
+            <a:ext cx="7772400" cy="868680"/>
+          </a:xfrm>
+          <a:prstGeom prst="rect">
+            <a:avLst/>
+          </a:prstGeom>
+          <a:noFill/>
+          <a:ln/>
+        </p:spPr>
+        <p:txBody>
+          <a:bodyPr wrap="square" lIns="0" tIns="0" rIns="0" bIns="0" rtlCol="0" anchor="ctr"/>
+          <a:lstStyle/>
+          <a:p>
+            <a:pPr indent="0" marL="0">
+              <a:buNone/>
+            </a:pPr>
+            <a:r>
+              <a:rPr lang="en-US" sz="1100" b="1" spc="200" kern="0" dirty="0">
+                <a:solidFill>
+                  <a:srgbClr val="4FB3BF"/>
+                </a:solidFill>
+                <a:latin typeface="Calibri" pitchFamily="34" charset="0"/>
+                <a:ea typeface="Calibri" pitchFamily="34" charset="-122"/>
+                <a:cs typeface="Calibri" pitchFamily="34" charset="-120"/>
+              </a:rPr>
+              <a:t>NEXT EPISODE  </a:t>
+            </a:r>
+            <a:pPr indent="0" marL="0">
+              <a:buNone/>
+            </a:pPr>
+            <a:r>
+              <a:rPr lang="en-US" sz="1400" dirty="0">
+                <a:solidFill>
+                  <a:srgbClr val="F3F5F7"/>
+                </a:solidFill>
+                <a:latin typeface="Calibri" pitchFamily="34" charset="0"/>
+                <a:ea typeface="Calibri" pitchFamily="34" charset="-122"/>
+                <a:cs typeface="Calibri" pitchFamily="34" charset="-120"/>
+              </a:rPr>
+              <a:t>Build your first MCP server for an enterprise data source — the moment tools stop being mocks.</a:t>
+            </a:r>
+            <a:endParaRPr lang="en-US" sz="1100" dirty="0"/>
+          </a:p>
+        </p:txBody>
+      </p:sp>
+      <p:sp>
+        <p:nvSpPr>
+          <p:cNvPr id="12" name="Text 9"/>
+          <p:cNvSpPr txBox="1"/>
+          <p:nvPr/>
+        </p:nvSpPr>
+        <p:spPr>
+          <a:xfrm>
+            <a:off x="457200" y="4709160"/>
+            <a:ext cx="5486400" cy="274320"/>
+          </a:xfrm>
+          <a:prstGeom prst="rect">
+            <a:avLst/>
+          </a:prstGeom>
+          <a:noFill/>
+          <a:ln/>
+        </p:spPr>
+        <p:txBody>
+          <a:bodyPr wrap="square" lIns="0" tIns="0" rIns="0" bIns="0" rtlCol="0" anchor="ctr"/>
+          <a:lstStyle/>
+          <a:p>
+            <a:pPr indent="0" marL="0">
+              <a:buNone/>
+            </a:pPr>
+            <a:r>
+              <a:rPr lang="en-US" sz="1000" dirty="0">
+                <a:solidFill>
+                  <a:srgbClr val="9AA6B2"/>
+                </a:solidFill>
+                <a:latin typeface="Calibri" pitchFamily="34" charset="0"/>
+                <a:ea typeface="Calibri" pitchFamily="34" charset="-122"/>
+                <a:cs typeface="Calibri" pitchFamily="34" charset="-120"/>
+              </a:rPr>
+              <a:t>Arthashastra Learning · one episode a week</a:t>
+            </a:r>
+            <a:endParaRPr lang="en-US" sz="1000" dirty="0"/>
+          </a:p>
+        </p:txBody>
+      </p:sp>
+    </p:spTree>
+  </p:cSld>
+  <p:clrMapOvr>
+    <a:masterClrMapping/>
+  </p:clrMapOvr>
+</p:sld>
+</file>
+
+<file path=ppt/slides/slide15.xml><?xml version="1.0" encoding="utf-8"?>
+<p:sld xmlns:a="http://schemas.openxmlformats.org/drawingml/2006/main" xmlns:r="http://schemas.openxmlformats.org/officeDocument/2006/relationships" xmlns:p="http://schemas.openxmlformats.org/presentationml/2006/main">
+  <p:cSld name="Slide 15">
+    <p:bg>
+      <p:bgPr>
+        <a:solidFill>
+          <a:srgbClr val="0F1316"/>
+        </a:solidFill>
+      </p:bgPr>
+    </p:bg>
+    <p:spTree>
+      <p:nvGrpSpPr>
+        <p:cNvPr id="1" name=""/>
+        <p:cNvGrpSpPr/>
+        <p:nvPr/>
+      </p:nvGrpSpPr>
+      <p:grpSpPr>
+        <a:xfrm>
+          <a:off x="0" y="0"/>
+          <a:ext cx="0" cy="0"/>
+          <a:chOff x="0" y="0"/>
+          <a:chExt cx="0" cy="0"/>
+        </a:xfrm>
+      </p:grpSpPr>
+      <p:sp>
+        <p:nvSpPr>
+          <p:cNvPr id="3" name="Text 0"/>
+          <p:cNvSpPr txBox="1"/>
+          <p:nvPr/>
+        </p:nvSpPr>
+        <p:spPr>
+          <a:xfrm>
+            <a:off x="457200" y="320040"/>
+            <a:ext cx="8229600" cy="731520"/>
+          </a:xfrm>
+          <a:prstGeom prst="rect">
+            <a:avLst/>
+          </a:prstGeom>
+          <a:noFill/>
+          <a:ln/>
+        </p:spPr>
+        <p:txBody>
+          <a:bodyPr wrap="square" lIns="0" tIns="0" rIns="0" bIns="0" rtlCol="0" anchor="ctr"/>
+          <a:lstStyle/>
+          <a:p>
+            <a:pPr indent="0" marL="0">
+              <a:buNone/>
+            </a:pPr>
+            <a:r>
+              <a:rPr lang="en-US" sz="3000" b="1" dirty="0">
+                <a:solidFill>
+                  <a:srgbClr val="F3F5F7"/>
+                </a:solidFill>
+                <a:latin typeface="Cambria" pitchFamily="34" charset="0"/>
+                <a:ea typeface="Cambria" pitchFamily="34" charset="-122"/>
+                <a:cs typeface="Cambria" pitchFamily="34" charset="-120"/>
+              </a:rPr>
               <a:t>Code, slides and the roadmap</a:t>
             </a:r>
             <a:endParaRPr lang="en-US" sz="3000" dirty="0"/>
@@ -11097,7 +11879,7 @@
                 <a:ea typeface="Cambria" pitchFamily="34" charset="-122"/>
                 <a:cs typeface="Cambria" pitchFamily="34" charset="-120"/>
               </a:rPr>
-              <a:t>The whole agent is one loop</a:t>
+              <a:t>Building your first agent</a:t>
             </a:r>
             <a:endParaRPr lang="en-US" sz="3000" dirty="0"/>
           </a:p>
@@ -11105,26 +11887,202 @@
       </p:sp>
       <p:sp>
         <p:nvSpPr>
-          <p:cNvPr id="4" name="Shape 1"/>
+          <p:cNvPr id="4" name="Text 1"/>
+          <p:cNvSpPr txBox="1"/>
+          <p:nvPr/>
+        </p:nvSpPr>
+        <p:spPr>
+          <a:xfrm>
+            <a:off x="457200" y="1097280"/>
+            <a:ext cx="8229600" cy="365760"/>
+          </a:xfrm>
+          <a:prstGeom prst="rect">
+            <a:avLst/>
+          </a:prstGeom>
+          <a:noFill/>
+          <a:ln/>
+        </p:spPr>
+        <p:txBody>
+          <a:bodyPr wrap="square" lIns="0" tIns="0" rIns="0" bIns="0" rtlCol="0" anchor="ctr"/>
+          <a:lstStyle/>
+          <a:p>
+            <a:pPr indent="0" marL="0">
+              <a:buNone/>
+            </a:pPr>
+            <a:r>
+              <a:rPr lang="en-US" sz="1600" dirty="0">
+                <a:solidFill>
+                  <a:srgbClr val="9AA6B2"/>
+                </a:solidFill>
+                <a:latin typeface="Calibri" pitchFamily="34" charset="0"/>
+                <a:ea typeface="Calibri" pitchFamily="34" charset="-122"/>
+                <a:cs typeface="Calibri" pitchFamily="34" charset="-120"/>
+              </a:rPr>
+              <a:t>One Python file. One API key. Four steps.</a:t>
+            </a:r>
+            <a:endParaRPr lang="en-US" sz="1600" dirty="0"/>
+          </a:p>
+        </p:txBody>
+      </p:sp>
+      <p:sp>
+        <p:nvSpPr>
+          <p:cNvPr id="5" name="Shape 2"/>
           <p:cNvSpPr/>
           <p:nvPr/>
         </p:nvSpPr>
         <p:spPr>
           <a:xfrm>
-            <a:off x="457200" y="1143000"/>
-            <a:ext cx="5394960" cy="3337560"/>
+            <a:off x="502920" y="1709928"/>
+            <a:ext cx="411480" cy="411480"/>
+          </a:xfrm>
+          <a:prstGeom prst="ellipse">
+            <a:avLst/>
+          </a:prstGeom>
+          <a:solidFill>
+            <a:srgbClr val="4FB3BF"/>
+          </a:solidFill>
+          <a:ln/>
+        </p:spPr>
+      </p:sp>
+      <p:sp>
+        <p:nvSpPr>
+          <p:cNvPr id="6" name="Text 3"/>
+          <p:cNvSpPr txBox="1"/>
+          <p:nvPr/>
+        </p:nvSpPr>
+        <p:spPr>
+          <a:xfrm>
+            <a:off x="502920" y="1709928"/>
+            <a:ext cx="411480" cy="411480"/>
+          </a:xfrm>
+          <a:prstGeom prst="rect">
+            <a:avLst/>
+          </a:prstGeom>
+          <a:noFill/>
+          <a:ln/>
+        </p:spPr>
+        <p:txBody>
+          <a:bodyPr wrap="square" lIns="0" tIns="0" rIns="0" bIns="0" rtlCol="0" anchor="ctr"/>
+          <a:lstStyle/>
+          <a:p>
+            <a:pPr algn="ctr" indent="0" marL="0">
+              <a:buNone/>
+            </a:pPr>
+            <a:r>
+              <a:rPr lang="en-US" sz="1400" b="1" dirty="0">
+                <a:solidFill>
+                  <a:srgbClr val="0F1316"/>
+                </a:solidFill>
+                <a:latin typeface="Calibri" pitchFamily="34" charset="0"/>
+                <a:ea typeface="Calibri" pitchFamily="34" charset="-122"/>
+                <a:cs typeface="Calibri" pitchFamily="34" charset="-120"/>
+              </a:rPr>
+              <a:t>1</a:t>
+            </a:r>
+            <a:endParaRPr lang="en-US" sz="1400" dirty="0"/>
+          </a:p>
+        </p:txBody>
+      </p:sp>
+      <p:sp>
+        <p:nvSpPr>
+          <p:cNvPr id="7" name="Text 4"/>
+          <p:cNvSpPr txBox="1"/>
+          <p:nvPr/>
+        </p:nvSpPr>
+        <p:spPr>
+          <a:xfrm>
+            <a:off x="1097280" y="1600200"/>
+            <a:ext cx="2103120" cy="621792"/>
+          </a:xfrm>
+          <a:prstGeom prst="rect">
+            <a:avLst/>
+          </a:prstGeom>
+          <a:noFill/>
+          <a:ln/>
+        </p:spPr>
+        <p:txBody>
+          <a:bodyPr wrap="square" lIns="0" tIns="0" rIns="0" bIns="0" rtlCol="0" anchor="ctr"/>
+          <a:lstStyle/>
+          <a:p>
+            <a:pPr indent="0" marL="0">
+              <a:buNone/>
+            </a:pPr>
+            <a:r>
+              <a:rPr lang="en-US" sz="1700" b="1" dirty="0">
+                <a:solidFill>
+                  <a:srgbClr val="F3F5F7"/>
+                </a:solidFill>
+                <a:latin typeface="Cambria" pitchFamily="34" charset="0"/>
+                <a:ea typeface="Cambria" pitchFamily="34" charset="-122"/>
+                <a:cs typeface="Cambria" pitchFamily="34" charset="-120"/>
+              </a:rPr>
+              <a:t>Set up</a:t>
+            </a:r>
+            <a:endParaRPr lang="en-US" sz="1700" dirty="0"/>
+          </a:p>
+        </p:txBody>
+      </p:sp>
+      <p:sp>
+        <p:nvSpPr>
+          <p:cNvPr id="8" name="Text 5"/>
+          <p:cNvSpPr txBox="1"/>
+          <p:nvPr/>
+        </p:nvSpPr>
+        <p:spPr>
+          <a:xfrm>
+            <a:off x="3200400" y="1600200"/>
+            <a:ext cx="4206240" cy="621792"/>
+          </a:xfrm>
+          <a:prstGeom prst="rect">
+            <a:avLst/>
+          </a:prstGeom>
+          <a:noFill/>
+          <a:ln/>
+        </p:spPr>
+        <p:txBody>
+          <a:bodyPr wrap="square" lIns="0" tIns="0" rIns="0" bIns="0" rtlCol="0" anchor="ctr"/>
+          <a:lstStyle/>
+          <a:p>
+            <a:pPr indent="0" marL="0">
+              <a:buNone/>
+            </a:pPr>
+            <a:r>
+              <a:rPr lang="en-US" sz="1200" dirty="0">
+                <a:solidFill>
+                  <a:srgbClr val="9AA6B2"/>
+                </a:solidFill>
+                <a:latin typeface="Calibri" pitchFamily="34" charset="0"/>
+                <a:ea typeface="Calibri" pitchFamily="34" charset="-122"/>
+                <a:cs typeface="Calibri" pitchFamily="34" charset="-120"/>
+              </a:rPr>
+              <a:t>pip install anthropic · export ANTHROPIC_API_KEY</a:t>
+            </a:r>
+            <a:endParaRPr lang="en-US" sz="1200" dirty="0"/>
+          </a:p>
+        </p:txBody>
+      </p:sp>
+      <p:sp>
+        <p:nvSpPr>
+          <p:cNvPr id="9" name="Shape 6"/>
+          <p:cNvSpPr/>
+          <p:nvPr/>
+        </p:nvSpPr>
+        <p:spPr>
+          <a:xfrm>
+            <a:off x="7543800" y="1755648"/>
+            <a:ext cx="1143000" cy="310896"/>
           </a:xfrm>
           <a:prstGeom prst="roundRect">
             <a:avLst>
-              <a:gd name="adj" fmla="val 2192"/>
+              <a:gd name="adj" fmla="val 17647"/>
             </a:avLst>
           </a:prstGeom>
           <a:solidFill>
-            <a:srgbClr val="0B0E11"/>
+            <a:srgbClr val="232B33"/>
           </a:solidFill>
-          <a:ln w="9525">
+          <a:ln w="12700">
             <a:solidFill>
-              <a:srgbClr val="2E3842"/>
+              <a:srgbClr val="4FB3BF"/>
             </a:solidFill>
             <a:prstDash val="solid"/>
           </a:ln>
@@ -11132,563 +12090,655 @@
       </p:sp>
       <p:sp>
         <p:nvSpPr>
-          <p:cNvPr id="5" name="Text 2"/>
-          <p:cNvSpPr txBox="1"/>
-          <p:nvPr/>
-        </p:nvSpPr>
-        <p:spPr>
-          <a:xfrm>
-            <a:off x="640080" y="1280160"/>
-            <a:ext cx="5120640" cy="3108960"/>
-          </a:xfrm>
-          <a:prstGeom prst="rect">
-            <a:avLst/>
-          </a:prstGeom>
-          <a:noFill/>
-          <a:ln/>
-        </p:spPr>
-        <p:txBody>
-          <a:bodyPr wrap="square" lIns="0" tIns="0" rIns="0" bIns="0" rtlCol="0" anchor="t"/>
-          <a:lstStyle/>
-          <a:p>
-            <a:pPr indent="0" marL="0">
-              <a:buNone/>
-            </a:pPr>
-            <a:r>
-              <a:rPr lang="en-US" sz="1100" dirty="0">
+          <p:cNvPr id="10" name="Text 7"/>
+          <p:cNvSpPr txBox="1"/>
+          <p:nvPr/>
+        </p:nvSpPr>
+        <p:spPr>
+          <a:xfrm>
+            <a:off x="7543800" y="1755648"/>
+            <a:ext cx="1143000" cy="310896"/>
+          </a:xfrm>
+          <a:prstGeom prst="rect">
+            <a:avLst/>
+          </a:prstGeom>
+          <a:noFill/>
+          <a:ln/>
+        </p:spPr>
+        <p:txBody>
+          <a:bodyPr wrap="square" lIns="0" tIns="0" rIns="0" bIns="0" rtlCol="0" anchor="ctr"/>
+          <a:lstStyle/>
+          <a:p>
+            <a:pPr algn="ctr" indent="0" marL="0">
+              <a:buNone/>
+            </a:pPr>
+            <a:r>
+              <a:rPr lang="en-US" sz="1000" b="1" dirty="0">
+                <a:solidFill>
+                  <a:srgbClr val="4FB3BF"/>
+                </a:solidFill>
+                <a:latin typeface="Calibri" pitchFamily="34" charset="0"/>
+                <a:ea typeface="Calibri" pitchFamily="34" charset="-122"/>
+                <a:cs typeface="Calibri" pitchFamily="34" charset="-120"/>
+              </a:rPr>
+              <a:t>30 sec</a:t>
+            </a:r>
+            <a:endParaRPr lang="en-US" sz="1000" dirty="0"/>
+          </a:p>
+        </p:txBody>
+      </p:sp>
+      <p:sp>
+        <p:nvSpPr>
+          <p:cNvPr id="11" name="Shape 8"/>
+          <p:cNvSpPr/>
+          <p:nvPr/>
+        </p:nvSpPr>
+        <p:spPr>
+          <a:xfrm>
+            <a:off x="502920" y="2423160"/>
+            <a:ext cx="411480" cy="411480"/>
+          </a:xfrm>
+          <a:prstGeom prst="ellipse">
+            <a:avLst/>
+          </a:prstGeom>
+          <a:solidFill>
+            <a:srgbClr val="4FB3BF"/>
+          </a:solidFill>
+          <a:ln/>
+        </p:spPr>
+      </p:sp>
+      <p:sp>
+        <p:nvSpPr>
+          <p:cNvPr id="12" name="Text 9"/>
+          <p:cNvSpPr txBox="1"/>
+          <p:nvPr/>
+        </p:nvSpPr>
+        <p:spPr>
+          <a:xfrm>
+            <a:off x="502920" y="2423160"/>
+            <a:ext cx="411480" cy="411480"/>
+          </a:xfrm>
+          <a:prstGeom prst="rect">
+            <a:avLst/>
+          </a:prstGeom>
+          <a:noFill/>
+          <a:ln/>
+        </p:spPr>
+        <p:txBody>
+          <a:bodyPr wrap="square" lIns="0" tIns="0" rIns="0" bIns="0" rtlCol="0" anchor="ctr"/>
+          <a:lstStyle/>
+          <a:p>
+            <a:pPr algn="ctr" indent="0" marL="0">
+              <a:buNone/>
+            </a:pPr>
+            <a:r>
+              <a:rPr lang="en-US" sz="1400" b="1" dirty="0">
+                <a:solidFill>
+                  <a:srgbClr val="0F1316"/>
+                </a:solidFill>
+                <a:latin typeface="Calibri" pitchFamily="34" charset="0"/>
+                <a:ea typeface="Calibri" pitchFamily="34" charset="-122"/>
+                <a:cs typeface="Calibri" pitchFamily="34" charset="-120"/>
+              </a:rPr>
+              <a:t>2</a:t>
+            </a:r>
+            <a:endParaRPr lang="en-US" sz="1400" dirty="0"/>
+          </a:p>
+        </p:txBody>
+      </p:sp>
+      <p:sp>
+        <p:nvSpPr>
+          <p:cNvPr id="13" name="Text 10"/>
+          <p:cNvSpPr txBox="1"/>
+          <p:nvPr/>
+        </p:nvSpPr>
+        <p:spPr>
+          <a:xfrm>
+            <a:off x="1097280" y="2313432"/>
+            <a:ext cx="2103120" cy="621792"/>
+          </a:xfrm>
+          <a:prstGeom prst="rect">
+            <a:avLst/>
+          </a:prstGeom>
+          <a:noFill/>
+          <a:ln/>
+        </p:spPr>
+        <p:txBody>
+          <a:bodyPr wrap="square" lIns="0" tIns="0" rIns="0" bIns="0" rtlCol="0" anchor="ctr"/>
+          <a:lstStyle/>
+          <a:p>
+            <a:pPr indent="0" marL="0">
+              <a:buNone/>
+            </a:pPr>
+            <a:r>
+              <a:rPr lang="en-US" sz="1700" b="1" dirty="0">
                 <a:solidFill>
                   <a:srgbClr val="F3F5F7"/>
                 </a:solidFill>
-                <a:latin typeface="Courier New" pitchFamily="34" charset="0"/>
-                <a:ea typeface="Courier New" pitchFamily="34" charset="-122"/>
-                <a:cs typeface="Courier New" pitchFamily="34" charset="-120"/>
-              </a:rPr>
-              <a:t>for step in range(MAX_STEPS):</a:t>
-            </a:r>
-            <a:endParaRPr lang="en-US" sz="1100" dirty="0"/>
-          </a:p>
-          <a:p>
-            <a:pPr indent="0" marL="0">
-              <a:buNone/>
-            </a:pPr>
-            <a:r>
-              <a:rPr lang="en-US" sz="1100" dirty="0">
+                <a:latin typeface="Cambria" pitchFamily="34" charset="0"/>
+                <a:ea typeface="Cambria" pitchFamily="34" charset="-122"/>
+                <a:cs typeface="Cambria" pitchFamily="34" charset="-120"/>
+              </a:rPr>
+              <a:t>Define the tools</a:t>
+            </a:r>
+            <a:endParaRPr lang="en-US" sz="1700" dirty="0"/>
+          </a:p>
+        </p:txBody>
+      </p:sp>
+      <p:sp>
+        <p:nvSpPr>
+          <p:cNvPr id="14" name="Text 11"/>
+          <p:cNvSpPr txBox="1"/>
+          <p:nvPr/>
+        </p:nvSpPr>
+        <p:spPr>
+          <a:xfrm>
+            <a:off x="3200400" y="2313432"/>
+            <a:ext cx="4206240" cy="621792"/>
+          </a:xfrm>
+          <a:prstGeom prst="rect">
+            <a:avLst/>
+          </a:prstGeom>
+          <a:noFill/>
+          <a:ln/>
+        </p:spPr>
+        <p:txBody>
+          <a:bodyPr wrap="square" lIns="0" tIns="0" rIns="0" bIns="0" rtlCol="0" anchor="ctr"/>
+          <a:lstStyle/>
+          <a:p>
+            <a:pPr indent="0" marL="0">
+              <a:buNone/>
+            </a:pPr>
+            <a:r>
+              <a:rPr lang="en-US" sz="1200" dirty="0">
+                <a:solidFill>
+                  <a:srgbClr val="9AA6B2"/>
+                </a:solidFill>
+                <a:latin typeface="Calibri" pitchFamily="34" charset="0"/>
+                <a:ea typeface="Calibri" pitchFamily="34" charset="-122"/>
+                <a:cs typeface="Calibri" pitchFamily="34" charset="-120"/>
+              </a:rPr>
+              <a:t>4 functions + their JSON schemas: lookup_order, check_refund_policy, request_human_approval, issue_refund</a:t>
+            </a:r>
+            <a:endParaRPr lang="en-US" sz="1200" dirty="0"/>
+          </a:p>
+        </p:txBody>
+      </p:sp>
+      <p:sp>
+        <p:nvSpPr>
+          <p:cNvPr id="15" name="Shape 12"/>
+          <p:cNvSpPr/>
+          <p:nvPr/>
+        </p:nvSpPr>
+        <p:spPr>
+          <a:xfrm>
+            <a:off x="7543800" y="2468880"/>
+            <a:ext cx="1143000" cy="310896"/>
+          </a:xfrm>
+          <a:prstGeom prst="roundRect">
+            <a:avLst>
+              <a:gd name="adj" fmla="val 17647"/>
+            </a:avLst>
+          </a:prstGeom>
+          <a:solidFill>
+            <a:srgbClr val="232B33"/>
+          </a:solidFill>
+          <a:ln w="12700">
+            <a:solidFill>
+              <a:srgbClr val="4FB3BF"/>
+            </a:solidFill>
+            <a:prstDash val="solid"/>
+          </a:ln>
+        </p:spPr>
+      </p:sp>
+      <p:sp>
+        <p:nvSpPr>
+          <p:cNvPr id="16" name="Text 13"/>
+          <p:cNvSpPr txBox="1"/>
+          <p:nvPr/>
+        </p:nvSpPr>
+        <p:spPr>
+          <a:xfrm>
+            <a:off x="7543800" y="2468880"/>
+            <a:ext cx="1143000" cy="310896"/>
+          </a:xfrm>
+          <a:prstGeom prst="rect">
+            <a:avLst/>
+          </a:prstGeom>
+          <a:noFill/>
+          <a:ln/>
+        </p:spPr>
+        <p:txBody>
+          <a:bodyPr wrap="square" lIns="0" tIns="0" rIns="0" bIns="0" rtlCol="0" anchor="ctr"/>
+          <a:lstStyle/>
+          <a:p>
+            <a:pPr algn="ctr" indent="0" marL="0">
+              <a:buNone/>
+            </a:pPr>
+            <a:r>
+              <a:rPr lang="en-US" sz="1000" b="1" dirty="0">
+                <a:solidFill>
+                  <a:srgbClr val="4FB3BF"/>
+                </a:solidFill>
+                <a:latin typeface="Calibri" pitchFamily="34" charset="0"/>
+                <a:ea typeface="Calibri" pitchFamily="34" charset="-122"/>
+                <a:cs typeface="Calibri" pitchFamily="34" charset="-120"/>
+              </a:rPr>
+              <a:t>pre-written</a:t>
+            </a:r>
+            <a:endParaRPr lang="en-US" sz="1000" dirty="0"/>
+          </a:p>
+        </p:txBody>
+      </p:sp>
+      <p:sp>
+        <p:nvSpPr>
+          <p:cNvPr id="17" name="Shape 14"/>
+          <p:cNvSpPr/>
+          <p:nvPr/>
+        </p:nvSpPr>
+        <p:spPr>
+          <a:xfrm>
+            <a:off x="502920" y="3136392"/>
+            <a:ext cx="411480" cy="411480"/>
+          </a:xfrm>
+          <a:prstGeom prst="ellipse">
+            <a:avLst/>
+          </a:prstGeom>
+          <a:solidFill>
+            <a:srgbClr val="F5A623"/>
+          </a:solidFill>
+          <a:ln/>
+        </p:spPr>
+      </p:sp>
+      <p:sp>
+        <p:nvSpPr>
+          <p:cNvPr id="18" name="Text 15"/>
+          <p:cNvSpPr txBox="1"/>
+          <p:nvPr/>
+        </p:nvSpPr>
+        <p:spPr>
+          <a:xfrm>
+            <a:off x="502920" y="3136392"/>
+            <a:ext cx="411480" cy="411480"/>
+          </a:xfrm>
+          <a:prstGeom prst="rect">
+            <a:avLst/>
+          </a:prstGeom>
+          <a:noFill/>
+          <a:ln/>
+        </p:spPr>
+        <p:txBody>
+          <a:bodyPr wrap="square" lIns="0" tIns="0" rIns="0" bIns="0" rtlCol="0" anchor="ctr"/>
+          <a:lstStyle/>
+          <a:p>
+            <a:pPr algn="ctr" indent="0" marL="0">
+              <a:buNone/>
+            </a:pPr>
+            <a:r>
+              <a:rPr lang="en-US" sz="1400" b="1" dirty="0">
+                <a:solidFill>
+                  <a:srgbClr val="0F1316"/>
+                </a:solidFill>
+                <a:latin typeface="Calibri" pitchFamily="34" charset="0"/>
+                <a:ea typeface="Calibri" pitchFamily="34" charset="-122"/>
+                <a:cs typeface="Calibri" pitchFamily="34" charset="-120"/>
+              </a:rPr>
+              <a:t>3</a:t>
+            </a:r>
+            <a:endParaRPr lang="en-US" sz="1400" dirty="0"/>
+          </a:p>
+        </p:txBody>
+      </p:sp>
+      <p:sp>
+        <p:nvSpPr>
+          <p:cNvPr id="19" name="Text 16"/>
+          <p:cNvSpPr txBox="1"/>
+          <p:nvPr/>
+        </p:nvSpPr>
+        <p:spPr>
+          <a:xfrm>
+            <a:off x="1097280" y="3026664"/>
+            <a:ext cx="2103120" cy="621792"/>
+          </a:xfrm>
+          <a:prstGeom prst="rect">
+            <a:avLst/>
+          </a:prstGeom>
+          <a:noFill/>
+          <a:ln/>
+        </p:spPr>
+        <p:txBody>
+          <a:bodyPr wrap="square" lIns="0" tIns="0" rIns="0" bIns="0" rtlCol="0" anchor="ctr"/>
+          <a:lstStyle/>
+          <a:p>
+            <a:pPr indent="0" marL="0">
+              <a:buNone/>
+            </a:pPr>
+            <a:r>
+              <a:rPr lang="en-US" sz="1700" b="1" dirty="0">
                 <a:solidFill>
                   <a:srgbClr val="F3F5F7"/>
                 </a:solidFill>
-                <a:latin typeface="Courier New" pitchFamily="34" charset="0"/>
-                <a:ea typeface="Courier New" pitchFamily="34" charset="-122"/>
-                <a:cs typeface="Courier New" pitchFamily="34" charset="-120"/>
-              </a:rPr>
-              <a:t>    resp = client.messages.create(</a:t>
-            </a:r>
-            <a:endParaRPr lang="en-US" sz="1100" dirty="0"/>
-          </a:p>
-          <a:p>
-            <a:pPr indent="0" marL="0">
-              <a:buNone/>
-            </a:pPr>
-            <a:r>
-              <a:rPr lang="en-US" sz="1100" dirty="0">
+                <a:latin typeface="Cambria" pitchFamily="34" charset="0"/>
+                <a:ea typeface="Cambria" pitchFamily="34" charset="-122"/>
+                <a:cs typeface="Cambria" pitchFamily="34" charset="-120"/>
+              </a:rPr>
+              <a:t>Write the loop</a:t>
+            </a:r>
+            <a:endParaRPr lang="en-US" sz="1700" dirty="0"/>
+          </a:p>
+        </p:txBody>
+      </p:sp>
+      <p:sp>
+        <p:nvSpPr>
+          <p:cNvPr id="20" name="Text 17"/>
+          <p:cNvSpPr txBox="1"/>
+          <p:nvPr/>
+        </p:nvSpPr>
+        <p:spPr>
+          <a:xfrm>
+            <a:off x="3200400" y="3026664"/>
+            <a:ext cx="4206240" cy="621792"/>
+          </a:xfrm>
+          <a:prstGeom prst="rect">
+            <a:avLst/>
+          </a:prstGeom>
+          <a:noFill/>
+          <a:ln/>
+        </p:spPr>
+        <p:txBody>
+          <a:bodyPr wrap="square" lIns="0" tIns="0" rIns="0" bIns="0" rtlCol="0" anchor="ctr"/>
+          <a:lstStyle/>
+          <a:p>
+            <a:pPr indent="0" marL="0">
+              <a:buNone/>
+            </a:pPr>
+            <a:r>
+              <a:rPr lang="en-US" sz="1200" dirty="0">
+                <a:solidFill>
+                  <a:srgbClr val="9AA6B2"/>
+                </a:solidFill>
+                <a:latin typeface="Calibri" pitchFamily="34" charset="0"/>
+                <a:ea typeface="Calibri" pitchFamily="34" charset="-122"/>
+                <a:cs typeface="Calibri" pitchFamily="34" charset="-120"/>
+              </a:rPr>
+              <a:t>plan → done? → act + observe → repeat, capped by MAX_STEPS</a:t>
+            </a:r>
+            <a:endParaRPr lang="en-US" sz="1200" dirty="0"/>
+          </a:p>
+        </p:txBody>
+      </p:sp>
+      <p:sp>
+        <p:nvSpPr>
+          <p:cNvPr id="21" name="Shape 18"/>
+          <p:cNvSpPr/>
+          <p:nvPr/>
+        </p:nvSpPr>
+        <p:spPr>
+          <a:xfrm>
+            <a:off x="7543800" y="3182112"/>
+            <a:ext cx="1143000" cy="310896"/>
+          </a:xfrm>
+          <a:prstGeom prst="roundRect">
+            <a:avLst>
+              <a:gd name="adj" fmla="val 17647"/>
+            </a:avLst>
+          </a:prstGeom>
+          <a:solidFill>
+            <a:srgbClr val="232B33"/>
+          </a:solidFill>
+          <a:ln w="12700">
+            <a:solidFill>
+              <a:srgbClr val="F5A623"/>
+            </a:solidFill>
+            <a:prstDash val="solid"/>
+          </a:ln>
+        </p:spPr>
+      </p:sp>
+      <p:sp>
+        <p:nvSpPr>
+          <p:cNvPr id="22" name="Text 19"/>
+          <p:cNvSpPr txBox="1"/>
+          <p:nvPr/>
+        </p:nvSpPr>
+        <p:spPr>
+          <a:xfrm>
+            <a:off x="7543800" y="3182112"/>
+            <a:ext cx="1143000" cy="310896"/>
+          </a:xfrm>
+          <a:prstGeom prst="rect">
+            <a:avLst/>
+          </a:prstGeom>
+          <a:noFill/>
+          <a:ln/>
+        </p:spPr>
+        <p:txBody>
+          <a:bodyPr wrap="square" lIns="0" tIns="0" rIns="0" bIns="0" rtlCol="0" anchor="ctr"/>
+          <a:lstStyle/>
+          <a:p>
+            <a:pPr algn="ctr" indent="0" marL="0">
+              <a:buNone/>
+            </a:pPr>
+            <a:r>
+              <a:rPr lang="en-US" sz="1000" b="1" dirty="0">
+                <a:solidFill>
+                  <a:srgbClr val="F5A623"/>
+                </a:solidFill>
+                <a:latin typeface="Calibri" pitchFamily="34" charset="0"/>
+                <a:ea typeface="Calibri" pitchFamily="34" charset="-122"/>
+                <a:cs typeface="Calibri" pitchFamily="34" charset="-120"/>
+              </a:rPr>
+              <a:t>we type this</a:t>
+            </a:r>
+            <a:endParaRPr lang="en-US" sz="1000" dirty="0"/>
+          </a:p>
+        </p:txBody>
+      </p:sp>
+      <p:sp>
+        <p:nvSpPr>
+          <p:cNvPr id="23" name="Shape 20"/>
+          <p:cNvSpPr/>
+          <p:nvPr/>
+        </p:nvSpPr>
+        <p:spPr>
+          <a:xfrm>
+            <a:off x="502920" y="3849624"/>
+            <a:ext cx="411480" cy="411480"/>
+          </a:xfrm>
+          <a:prstGeom prst="ellipse">
+            <a:avLst/>
+          </a:prstGeom>
+          <a:solidFill>
+            <a:srgbClr val="4FB3BF"/>
+          </a:solidFill>
+          <a:ln/>
+        </p:spPr>
+      </p:sp>
+      <p:sp>
+        <p:nvSpPr>
+          <p:cNvPr id="24" name="Text 21"/>
+          <p:cNvSpPr txBox="1"/>
+          <p:nvPr/>
+        </p:nvSpPr>
+        <p:spPr>
+          <a:xfrm>
+            <a:off x="502920" y="3849624"/>
+            <a:ext cx="411480" cy="411480"/>
+          </a:xfrm>
+          <a:prstGeom prst="rect">
+            <a:avLst/>
+          </a:prstGeom>
+          <a:noFill/>
+          <a:ln/>
+        </p:spPr>
+        <p:txBody>
+          <a:bodyPr wrap="square" lIns="0" tIns="0" rIns="0" bIns="0" rtlCol="0" anchor="ctr"/>
+          <a:lstStyle/>
+          <a:p>
+            <a:pPr algn="ctr" indent="0" marL="0">
+              <a:buNone/>
+            </a:pPr>
+            <a:r>
+              <a:rPr lang="en-US" sz="1400" b="1" dirty="0">
+                <a:solidFill>
+                  <a:srgbClr val="0F1316"/>
+                </a:solidFill>
+                <a:latin typeface="Calibri" pitchFamily="34" charset="0"/>
+                <a:ea typeface="Calibri" pitchFamily="34" charset="-122"/>
+                <a:cs typeface="Calibri" pitchFamily="34" charset="-120"/>
+              </a:rPr>
+              <a:t>4</a:t>
+            </a:r>
+            <a:endParaRPr lang="en-US" sz="1400" dirty="0"/>
+          </a:p>
+        </p:txBody>
+      </p:sp>
+      <p:sp>
+        <p:nvSpPr>
+          <p:cNvPr id="25" name="Text 22"/>
+          <p:cNvSpPr txBox="1"/>
+          <p:nvPr/>
+        </p:nvSpPr>
+        <p:spPr>
+          <a:xfrm>
+            <a:off x="1097280" y="3739896"/>
+            <a:ext cx="2103120" cy="621792"/>
+          </a:xfrm>
+          <a:prstGeom prst="rect">
+            <a:avLst/>
+          </a:prstGeom>
+          <a:noFill/>
+          <a:ln/>
+        </p:spPr>
+        <p:txBody>
+          <a:bodyPr wrap="square" lIns="0" tIns="0" rIns="0" bIns="0" rtlCol="0" anchor="ctr"/>
+          <a:lstStyle/>
+          <a:p>
+            <a:pPr indent="0" marL="0">
+              <a:buNone/>
+            </a:pPr>
+            <a:r>
+              <a:rPr lang="en-US" sz="1700" b="1" dirty="0">
                 <a:solidFill>
                   <a:srgbClr val="F3F5F7"/>
                 </a:solidFill>
-                <a:latin typeface="Courier New" pitchFamily="34" charset="0"/>
-                <a:ea typeface="Courier New" pitchFamily="34" charset="-122"/>
-                <a:cs typeface="Courier New" pitchFamily="34" charset="-120"/>
-              </a:rPr>
-              <a:t>        model=MODEL, system=SYSTEM,</a:t>
-            </a:r>
-            <a:endParaRPr lang="en-US" sz="1100" dirty="0"/>
-          </a:p>
-          <a:p>
-            <a:pPr indent="0" marL="0">
-              <a:buNone/>
-            </a:pPr>
-            <a:r>
-              <a:rPr lang="en-US" sz="1100" dirty="0">
-                <a:solidFill>
-                  <a:srgbClr val="F5A623"/>
-                </a:solidFill>
-                <a:latin typeface="Courier New" pitchFamily="34" charset="0"/>
-                <a:ea typeface="Courier New" pitchFamily="34" charset="-122"/>
-                <a:cs typeface="Courier New" pitchFamily="34" charset="-120"/>
-              </a:rPr>
-              <a:t>        tools=TOOLS, messages=messages)</a:t>
-            </a:r>
-            <a:endParaRPr lang="en-US" sz="1100" dirty="0"/>
-          </a:p>
-          <a:p>
-            <a:pPr indent="0" marL="0">
-              <a:buNone/>
-            </a:pPr>
-            <a:r>
-              <a:rPr lang="en-US" sz="1100" dirty="0">
-                <a:solidFill>
-                  <a:srgbClr val="F3F5F7"/>
-                </a:solidFill>
-                <a:latin typeface="Courier New" pitchFamily="34" charset="0"/>
-                <a:ea typeface="Courier New" pitchFamily="34" charset="-122"/>
-                <a:cs typeface="Courier New" pitchFamily="34" charset="-120"/>
-              </a:rPr>
-              <a:t>    messages.append(assistant(resp.content))</a:t>
-            </a:r>
-            <a:endParaRPr lang="en-US" sz="1100" dirty="0"/>
-          </a:p>
-          <a:p>
-            <a:pPr indent="0" marL="0">
-              <a:buNone/>
-            </a:pPr>
-            <a:endParaRPr lang="en-US" sz="1100" dirty="0"/>
-          </a:p>
-          <a:p>
-            <a:pPr indent="0" marL="0">
-              <a:buNone/>
-            </a:pPr>
-            <a:r>
-              <a:rPr lang="en-US" sz="1100" dirty="0">
+                <a:latin typeface="Cambria" pitchFamily="34" charset="0"/>
+                <a:ea typeface="Cambria" pitchFamily="34" charset="-122"/>
+                <a:cs typeface="Cambria" pitchFamily="34" charset="-120"/>
+              </a:rPr>
+              <a:t>Run it twice</a:t>
+            </a:r>
+            <a:endParaRPr lang="en-US" sz="1700" dirty="0"/>
+          </a:p>
+        </p:txBody>
+      </p:sp>
+      <p:sp>
+        <p:nvSpPr>
+          <p:cNvPr id="26" name="Text 23"/>
+          <p:cNvSpPr txBox="1"/>
+          <p:nvPr/>
+        </p:nvSpPr>
+        <p:spPr>
+          <a:xfrm>
+            <a:off x="3200400" y="3739896"/>
+            <a:ext cx="4206240" cy="621792"/>
+          </a:xfrm>
+          <a:prstGeom prst="rect">
+            <a:avLst/>
+          </a:prstGeom>
+          <a:noFill/>
+          <a:ln/>
+        </p:spPr>
+        <p:txBody>
+          <a:bodyPr wrap="square" lIns="0" tIns="0" rIns="0" bIns="0" rtlCol="0" anchor="ctr"/>
+          <a:lstStyle/>
+          <a:p>
+            <a:pPr indent="0" marL="0">
+              <a:buNone/>
+            </a:pPr>
+            <a:r>
+              <a:rPr lang="en-US" sz="1200" dirty="0">
+                <a:solidFill>
+                  <a:srgbClr val="9AA6B2"/>
+                </a:solidFill>
+                <a:latin typeface="Calibri" pitchFamily="34" charset="0"/>
+                <a:ea typeface="Calibri" pitchFamily="34" charset="-122"/>
+                <a:cs typeface="Calibri" pitchFamily="34" charset="-120"/>
+              </a:rPr>
+              <a:t>A-7781 (refund) and A-7790 (refused) — watch the model choose different paths</a:t>
+            </a:r>
+            <a:endParaRPr lang="en-US" sz="1200" dirty="0"/>
+          </a:p>
+        </p:txBody>
+      </p:sp>
+      <p:sp>
+        <p:nvSpPr>
+          <p:cNvPr id="27" name="Shape 24"/>
+          <p:cNvSpPr/>
+          <p:nvPr/>
+        </p:nvSpPr>
+        <p:spPr>
+          <a:xfrm>
+            <a:off x="7543800" y="3895344"/>
+            <a:ext cx="1143000" cy="310896"/>
+          </a:xfrm>
+          <a:prstGeom prst="roundRect">
+            <a:avLst>
+              <a:gd name="adj" fmla="val 17647"/>
+            </a:avLst>
+          </a:prstGeom>
+          <a:solidFill>
+            <a:srgbClr val="232B33"/>
+          </a:solidFill>
+          <a:ln w="12700">
+            <a:solidFill>
+              <a:srgbClr val="4FB3BF"/>
+            </a:solidFill>
+            <a:prstDash val="solid"/>
+          </a:ln>
+        </p:spPr>
+      </p:sp>
+      <p:sp>
+        <p:nvSpPr>
+          <p:cNvPr id="28" name="Text 25"/>
+          <p:cNvSpPr txBox="1"/>
+          <p:nvPr/>
+        </p:nvSpPr>
+        <p:spPr>
+          <a:xfrm>
+            <a:off x="7543800" y="3895344"/>
+            <a:ext cx="1143000" cy="310896"/>
+          </a:xfrm>
+          <a:prstGeom prst="rect">
+            <a:avLst/>
+          </a:prstGeom>
+          <a:noFill/>
+          <a:ln/>
+        </p:spPr>
+        <p:txBody>
+          <a:bodyPr wrap="square" lIns="0" tIns="0" rIns="0" bIns="0" rtlCol="0" anchor="ctr"/>
+          <a:lstStyle/>
+          <a:p>
+            <a:pPr algn="ctr" indent="0" marL="0">
+              <a:buNone/>
+            </a:pPr>
+            <a:r>
+              <a:rPr lang="en-US" sz="1000" b="1" dirty="0">
                 <a:solidFill>
                   <a:srgbClr val="4FB3BF"/>
                 </a:solidFill>
-                <a:latin typeface="Courier New" pitchFamily="34" charset="0"/>
-                <a:ea typeface="Courier New" pitchFamily="34" charset="-122"/>
-                <a:cs typeface="Courier New" pitchFamily="34" charset="-120"/>
-              </a:rPr>
-              <a:t>    if resp.stop_reason != "tool_use":</a:t>
-            </a:r>
-            <a:endParaRPr lang="en-US" sz="1100" dirty="0"/>
-          </a:p>
-          <a:p>
-            <a:pPr indent="0" marL="0">
-              <a:buNone/>
-            </a:pPr>
-            <a:r>
-              <a:rPr lang="en-US" sz="1100" dirty="0">
-                <a:solidFill>
-                  <a:srgbClr val="4FB3BF"/>
-                </a:solidFill>
-                <a:latin typeface="Courier New" pitchFamily="34" charset="0"/>
-                <a:ea typeface="Courier New" pitchFamily="34" charset="-122"/>
-                <a:cs typeface="Courier New" pitchFamily="34" charset="-120"/>
-              </a:rPr>
-              <a:t>        return final_text(resp)</a:t>
-            </a:r>
-            <a:endParaRPr lang="en-US" sz="1100" dirty="0"/>
-          </a:p>
-          <a:p>
-            <a:pPr indent="0" marL="0">
-              <a:buNone/>
-            </a:pPr>
-            <a:endParaRPr lang="en-US" sz="1100" dirty="0"/>
-          </a:p>
-          <a:p>
-            <a:pPr indent="0" marL="0">
-              <a:buNone/>
-            </a:pPr>
-            <a:r>
-              <a:rPr lang="en-US" sz="1100" dirty="0">
-                <a:solidFill>
-                  <a:srgbClr val="F3F5F7"/>
-                </a:solidFill>
-                <a:latin typeface="Courier New" pitchFamily="34" charset="0"/>
-                <a:ea typeface="Courier New" pitchFamily="34" charset="-122"/>
-                <a:cs typeface="Courier New" pitchFamily="34" charset="-120"/>
-              </a:rPr>
-              <a:t>    for block in tool_uses(resp):</a:t>
-            </a:r>
-            <a:endParaRPr lang="en-US" sz="1100" dirty="0"/>
-          </a:p>
-          <a:p>
-            <a:pPr indent="0" marL="0">
-              <a:buNone/>
-            </a:pPr>
-            <a:r>
-              <a:rPr lang="en-US" sz="1100" dirty="0">
-                <a:solidFill>
-                  <a:srgbClr val="F5A623"/>
-                </a:solidFill>
-                <a:latin typeface="Courier New" pitchFamily="34" charset="0"/>
-                <a:ea typeface="Courier New" pitchFamily="34" charset="-122"/>
-                <a:cs typeface="Courier New" pitchFamily="34" charset="-120"/>
-              </a:rPr>
-              <a:t>        out = HANDLERS[block.name](**block.input)</a:t>
-            </a:r>
-            <a:endParaRPr lang="en-US" sz="1100" dirty="0"/>
-          </a:p>
-          <a:p>
-            <a:pPr indent="0" marL="0">
-              <a:buNone/>
-            </a:pPr>
-            <a:r>
-              <a:rPr lang="en-US" sz="1100" dirty="0">
-                <a:solidFill>
-                  <a:srgbClr val="F3F5F7"/>
-                </a:solidFill>
-                <a:latin typeface="Courier New" pitchFamily="34" charset="0"/>
-                <a:ea typeface="Courier New" pitchFamily="34" charset="-122"/>
-                <a:cs typeface="Courier New" pitchFamily="34" charset="-120"/>
-              </a:rPr>
-              <a:t>        results.append(tool_result(block.id, out))</a:t>
-            </a:r>
-            <a:endParaRPr lang="en-US" sz="1100" dirty="0"/>
-          </a:p>
-          <a:p>
-            <a:pPr indent="0" marL="0">
-              <a:buNone/>
-            </a:pPr>
-            <a:r>
-              <a:rPr lang="en-US" sz="1100" dirty="0">
-                <a:solidFill>
-                  <a:srgbClr val="F3F5F7"/>
-                </a:solidFill>
-                <a:latin typeface="Courier New" pitchFamily="34" charset="0"/>
-                <a:ea typeface="Courier New" pitchFamily="34" charset="-122"/>
-                <a:cs typeface="Courier New" pitchFamily="34" charset="-120"/>
-              </a:rPr>
-              <a:t>    messages.append(user(results))</a:t>
-            </a:r>
-            <a:endParaRPr lang="en-US" sz="1100" dirty="0"/>
-          </a:p>
-          <a:p>
-            <a:pPr indent="0" marL="0">
-              <a:buNone/>
-            </a:pPr>
-            <a:endParaRPr lang="en-US" sz="1100" dirty="0"/>
-          </a:p>
-          <a:p>
-            <a:pPr indent="0" marL="0">
-              <a:buNone/>
-            </a:pPr>
-            <a:r>
-              <a:rPr lang="en-US" sz="1100" dirty="0">
-                <a:solidFill>
-                  <a:srgbClr val="E5533D"/>
-                </a:solidFill>
-                <a:latin typeface="Courier New" pitchFamily="34" charset="0"/>
-                <a:ea typeface="Courier New" pitchFamily="34" charset="-122"/>
-                <a:cs typeface="Courier New" pitchFamily="34" charset="-120"/>
-              </a:rPr>
-              <a:t>return "Stopped: step limit reached."</a:t>
-            </a:r>
-            <a:endParaRPr lang="en-US" sz="1100" dirty="0"/>
-          </a:p>
-        </p:txBody>
-      </p:sp>
-      <p:sp>
-        <p:nvSpPr>
-          <p:cNvPr id="6" name="Text 3"/>
-          <p:cNvSpPr txBox="1"/>
-          <p:nvPr/>
-        </p:nvSpPr>
-        <p:spPr>
-          <a:xfrm>
-            <a:off x="6080760" y="1143000"/>
-            <a:ext cx="2606040" cy="274320"/>
-          </a:xfrm>
-          <a:prstGeom prst="rect">
-            <a:avLst/>
-          </a:prstGeom>
-          <a:noFill/>
-          <a:ln/>
-        </p:spPr>
-        <p:txBody>
-          <a:bodyPr wrap="square" lIns="0" tIns="0" rIns="0" bIns="0" rtlCol="0" anchor="ctr"/>
-          <a:lstStyle/>
-          <a:p>
-            <a:pPr indent="0" marL="0">
-              <a:buNone/>
-            </a:pPr>
-            <a:r>
-              <a:rPr lang="en-US" sz="1100" b="1" spc="200" kern="0" dirty="0">
-                <a:solidFill>
-                  <a:srgbClr val="F5A623"/>
-                </a:solidFill>
-                <a:latin typeface="Calibri" pitchFamily="34" charset="0"/>
-                <a:ea typeface="Calibri" pitchFamily="34" charset="-122"/>
-                <a:cs typeface="Calibri" pitchFamily="34" charset="-120"/>
-              </a:rPr>
-              <a:t>PLAN</a:t>
-            </a:r>
-            <a:endParaRPr lang="en-US" sz="1100" dirty="0"/>
-          </a:p>
-        </p:txBody>
-      </p:sp>
-      <p:sp>
-        <p:nvSpPr>
-          <p:cNvPr id="7" name="Text 4"/>
-          <p:cNvSpPr txBox="1"/>
-          <p:nvPr/>
-        </p:nvSpPr>
-        <p:spPr>
-          <a:xfrm>
-            <a:off x="6080760" y="1417320"/>
-            <a:ext cx="2606040" cy="548640"/>
-          </a:xfrm>
-          <a:prstGeom prst="rect">
-            <a:avLst/>
-          </a:prstGeom>
-          <a:noFill/>
-          <a:ln/>
-        </p:spPr>
-        <p:txBody>
-          <a:bodyPr wrap="square" lIns="0" tIns="0" rIns="0" bIns="0" rtlCol="0" anchor="t"/>
-          <a:lstStyle/>
-          <a:p>
-            <a:pPr indent="0" marL="0">
-              <a:buNone/>
-            </a:pPr>
-            <a:r>
-              <a:rPr lang="en-US" sz="1200" dirty="0">
-                <a:solidFill>
-                  <a:srgbClr val="9AA6B2"/>
-                </a:solidFill>
-                <a:latin typeface="Calibri" pitchFamily="34" charset="0"/>
-                <a:ea typeface="Calibri" pitchFamily="34" charset="-122"/>
-                <a:cs typeface="Calibri" pitchFamily="34" charset="-120"/>
-              </a:rPr>
-              <a:t>the model sees the goal, the tools, and everything so far — and picks</a:t>
-            </a:r>
-            <a:endParaRPr lang="en-US" sz="1200" dirty="0"/>
-          </a:p>
-        </p:txBody>
-      </p:sp>
-      <p:sp>
-        <p:nvSpPr>
-          <p:cNvPr id="8" name="Text 5"/>
-          <p:cNvSpPr txBox="1"/>
-          <p:nvPr/>
-        </p:nvSpPr>
-        <p:spPr>
-          <a:xfrm>
-            <a:off x="6080760" y="1984248"/>
-            <a:ext cx="2606040" cy="274320"/>
-          </a:xfrm>
-          <a:prstGeom prst="rect">
-            <a:avLst/>
-          </a:prstGeom>
-          <a:noFill/>
-          <a:ln/>
-        </p:spPr>
-        <p:txBody>
-          <a:bodyPr wrap="square" lIns="0" tIns="0" rIns="0" bIns="0" rtlCol="0" anchor="ctr"/>
-          <a:lstStyle/>
-          <a:p>
-            <a:pPr indent="0" marL="0">
-              <a:buNone/>
-            </a:pPr>
-            <a:r>
-              <a:rPr lang="en-US" sz="1100" b="1" spc="200" kern="0" dirty="0">
-                <a:solidFill>
-                  <a:srgbClr val="4FB3BF"/>
-                </a:solidFill>
-                <a:latin typeface="Calibri" pitchFamily="34" charset="0"/>
-                <a:ea typeface="Calibri" pitchFamily="34" charset="-122"/>
-                <a:cs typeface="Calibri" pitchFamily="34" charset="-120"/>
-              </a:rPr>
-              <a:t>DONE</a:t>
-            </a:r>
-            <a:endParaRPr lang="en-US" sz="1100" dirty="0"/>
-          </a:p>
-        </p:txBody>
-      </p:sp>
-      <p:sp>
-        <p:nvSpPr>
-          <p:cNvPr id="9" name="Text 6"/>
-          <p:cNvSpPr txBox="1"/>
-          <p:nvPr/>
-        </p:nvSpPr>
-        <p:spPr>
-          <a:xfrm>
-            <a:off x="6080760" y="2258568"/>
-            <a:ext cx="2606040" cy="548640"/>
-          </a:xfrm>
-          <a:prstGeom prst="rect">
-            <a:avLst/>
-          </a:prstGeom>
-          <a:noFill/>
-          <a:ln/>
-        </p:spPr>
-        <p:txBody>
-          <a:bodyPr wrap="square" lIns="0" tIns="0" rIns="0" bIns="0" rtlCol="0" anchor="t"/>
-          <a:lstStyle/>
-          <a:p>
-            <a:pPr indent="0" marL="0">
-              <a:buNone/>
-            </a:pPr>
-            <a:r>
-              <a:rPr lang="en-US" sz="1200" dirty="0">
-                <a:solidFill>
-                  <a:srgbClr val="9AA6B2"/>
-                </a:solidFill>
-                <a:latin typeface="Calibri" pitchFamily="34" charset="0"/>
-                <a:ea typeface="Calibri" pitchFamily="34" charset="-122"/>
-                <a:cs typeface="Calibri" pitchFamily="34" charset="-120"/>
-              </a:rPr>
-              <a:t>no tool requested → the model thinks the goal is met</a:t>
-            </a:r>
-            <a:endParaRPr lang="en-US" sz="1200" dirty="0"/>
-          </a:p>
-        </p:txBody>
-      </p:sp>
-      <p:sp>
-        <p:nvSpPr>
-          <p:cNvPr id="10" name="Text 7"/>
-          <p:cNvSpPr txBox="1"/>
-          <p:nvPr/>
-        </p:nvSpPr>
-        <p:spPr>
-          <a:xfrm>
-            <a:off x="6080760" y="2825496"/>
-            <a:ext cx="2606040" cy="274320"/>
-          </a:xfrm>
-          <a:prstGeom prst="rect">
-            <a:avLst/>
-          </a:prstGeom>
-          <a:noFill/>
-          <a:ln/>
-        </p:spPr>
-        <p:txBody>
-          <a:bodyPr wrap="square" lIns="0" tIns="0" rIns="0" bIns="0" rtlCol="0" anchor="ctr"/>
-          <a:lstStyle/>
-          <a:p>
-            <a:pPr indent="0" marL="0">
-              <a:buNone/>
-            </a:pPr>
-            <a:r>
-              <a:rPr lang="en-US" sz="1100" b="1" spc="200" kern="0" dirty="0">
-                <a:solidFill>
-                  <a:srgbClr val="F5A623"/>
-                </a:solidFill>
-                <a:latin typeface="Calibri" pitchFamily="34" charset="0"/>
-                <a:ea typeface="Calibri" pitchFamily="34" charset="-122"/>
-                <a:cs typeface="Calibri" pitchFamily="34" charset="-120"/>
-              </a:rPr>
-              <a:t>ACT + OBSERVE</a:t>
-            </a:r>
-            <a:endParaRPr lang="en-US" sz="1100" dirty="0"/>
-          </a:p>
-        </p:txBody>
-      </p:sp>
-      <p:sp>
-        <p:nvSpPr>
-          <p:cNvPr id="11" name="Text 8"/>
-          <p:cNvSpPr txBox="1"/>
-          <p:nvPr/>
-        </p:nvSpPr>
-        <p:spPr>
-          <a:xfrm>
-            <a:off x="6080760" y="3099816"/>
-            <a:ext cx="2606040" cy="548640"/>
-          </a:xfrm>
-          <a:prstGeom prst="rect">
-            <a:avLst/>
-          </a:prstGeom>
-          <a:noFill/>
-          <a:ln/>
-        </p:spPr>
-        <p:txBody>
-          <a:bodyPr wrap="square" lIns="0" tIns="0" rIns="0" bIns="0" rtlCol="0" anchor="t"/>
-          <a:lstStyle/>
-          <a:p>
-            <a:pPr indent="0" marL="0">
-              <a:buNone/>
-            </a:pPr>
-            <a:r>
-              <a:rPr lang="en-US" sz="1200" dirty="0">
-                <a:solidFill>
-                  <a:srgbClr val="9AA6B2"/>
-                </a:solidFill>
-                <a:latin typeface="Calibri" pitchFamily="34" charset="0"/>
-                <a:ea typeface="Calibri" pitchFamily="34" charset="-122"/>
-                <a:cs typeface="Calibri" pitchFamily="34" charset="-120"/>
-              </a:rPr>
-              <a:t>run what it asked for, feed the result back</a:t>
-            </a:r>
-            <a:endParaRPr lang="en-US" sz="1200" dirty="0"/>
-          </a:p>
-        </p:txBody>
-      </p:sp>
-      <p:sp>
-        <p:nvSpPr>
-          <p:cNvPr id="12" name="Text 9"/>
-          <p:cNvSpPr txBox="1"/>
-          <p:nvPr/>
-        </p:nvSpPr>
-        <p:spPr>
-          <a:xfrm>
-            <a:off x="6080760" y="3666744"/>
-            <a:ext cx="2606040" cy="274320"/>
-          </a:xfrm>
-          <a:prstGeom prst="rect">
-            <a:avLst/>
-          </a:prstGeom>
-          <a:noFill/>
-          <a:ln/>
-        </p:spPr>
-        <p:txBody>
-          <a:bodyPr wrap="square" lIns="0" tIns="0" rIns="0" bIns="0" rtlCol="0" anchor="ctr"/>
-          <a:lstStyle/>
-          <a:p>
-            <a:pPr indent="0" marL="0">
-              <a:buNone/>
-            </a:pPr>
-            <a:r>
-              <a:rPr lang="en-US" sz="1100" b="1" spc="200" kern="0" dirty="0">
-                <a:solidFill>
-                  <a:srgbClr val="E5533D"/>
-                </a:solidFill>
-                <a:latin typeface="Calibri" pitchFamily="34" charset="0"/>
-                <a:ea typeface="Calibri" pitchFamily="34" charset="-122"/>
-                <a:cs typeface="Calibri" pitchFamily="34" charset="-120"/>
-              </a:rPr>
-              <a:t>LIMIT</a:t>
-            </a:r>
-            <a:endParaRPr lang="en-US" sz="1100" dirty="0"/>
-          </a:p>
-        </p:txBody>
-      </p:sp>
-      <p:sp>
-        <p:nvSpPr>
-          <p:cNvPr id="13" name="Text 10"/>
-          <p:cNvSpPr txBox="1"/>
-          <p:nvPr/>
-        </p:nvSpPr>
-        <p:spPr>
-          <a:xfrm>
-            <a:off x="6080760" y="3941064"/>
-            <a:ext cx="2606040" cy="548640"/>
-          </a:xfrm>
-          <a:prstGeom prst="rect">
-            <a:avLst/>
-          </a:prstGeom>
-          <a:noFill/>
-          <a:ln/>
-        </p:spPr>
-        <p:txBody>
-          <a:bodyPr wrap="square" lIns="0" tIns="0" rIns="0" bIns="0" rtlCol="0" anchor="t"/>
-          <a:lstStyle/>
-          <a:p>
-            <a:pPr indent="0" marL="0">
-              <a:buNone/>
-            </a:pPr>
-            <a:r>
-              <a:rPr lang="en-US" sz="1200" dirty="0">
-                <a:solidFill>
-                  <a:srgbClr val="9AA6B2"/>
-                </a:solidFill>
-                <a:latin typeface="Calibri" pitchFamily="34" charset="0"/>
-                <a:ea typeface="Calibri" pitchFamily="34" charset="-122"/>
-                <a:cs typeface="Calibri" pitchFamily="34" charset="-120"/>
-              </a:rPr>
-              <a:t>MAX_STEPS. Also cap cost and time in production</a:t>
-            </a:r>
-            <a:endParaRPr lang="en-US" sz="1200" dirty="0"/>
-          </a:p>
-        </p:txBody>
-      </p:sp>
-      <p:sp>
-        <p:nvSpPr>
-          <p:cNvPr id="14" name="Text 11"/>
+                <a:latin typeface="Calibri" pitchFamily="34" charset="0"/>
+                <a:ea typeface="Calibri" pitchFamily="34" charset="-122"/>
+                <a:cs typeface="Calibri" pitchFamily="34" charset="-120"/>
+              </a:rPr>
+              <a:t>2 min</a:t>
+            </a:r>
+            <a:endParaRPr lang="en-US" sz="1000" dirty="0"/>
+          </a:p>
+        </p:txBody>
+      </p:sp>
+      <p:sp>
+        <p:nvSpPr>
+          <p:cNvPr id="29" name="Text 26"/>
           <p:cNvSpPr txBox="1"/>
           <p:nvPr/>
         </p:nvSpPr>
@@ -11719,7 +12769,7 @@
                 <a:ea typeface="Calibri" pitchFamily="34" charset="-122"/>
                 <a:cs typeface="Calibri" pitchFamily="34" charset="-120"/>
               </a:rPr>
-              <a:t>basic_agent.py · ~100 lines including four mock tools</a:t>
+              <a:t>agent_starter.py — tools pre-written, three TODOs for the loop</a:t>
             </a:r>
             <a:endParaRPr lang="en-US" sz="1000" dirty="0"/>
           </a:p>
